--- a/polyanka-prezentaciya.pptx
+++ b/polyanka-prezentaciya.pptx
@@ -222,7 +222,7 @@
                   <c:v>713800</c:v>
                 </c:pt>
                 <c:pt idx="4">
-                  <c:v>528000</c:v>
+                  <c:v>575000</c:v>
                 </c:pt>
                 <c:pt idx="5">
                   <c:v>18000</c:v>
@@ -937,7 +937,7 @@
           <a:p>
             <a:r>
               <a:rPr lang="en-US" dirty="0"/>
-              <a:t>Ведомость не является сметой по ТЕР/ФЕР; для конкурсной документации нужен локальный сметный расчёт.</a:t>
+              <a:t>Ведомость не является сметой по ТЕР/ФЕР; для конкурсной документации нужен локальный сметный расчёт. Существующее ограждение по трём сторонам принято исправным и не включено.</a:t>
             </a:r>
             <a:endParaRPr lang="en-US" dirty="0"/>
           </a:p>
@@ -2575,7 +2575,7 @@
                 <a:ea typeface="Cambria" pitchFamily="34" charset="-122"/>
                 <a:cs typeface="Cambria" pitchFamily="34" charset="-120"/>
               </a:rPr>
-              <a:t>3 179 463 ₽</a:t>
+              <a:t>3 228 813 ₽</a:t>
             </a:r>
             <a:endParaRPr lang="en-US" sz="1700" dirty="0"/>
           </a:p>
@@ -3177,7 +3177,7 @@
                 <a:ea typeface="Cambria" pitchFamily="34" charset="-122"/>
                 <a:cs typeface="Cambria" pitchFamily="34" charset="-120"/>
               </a:rPr>
-              <a:t>3 179 463 ₽ при лимите 3,5 млн</a:t>
+              <a:t>3 228 813 ₽ при лимите 3,5 млн</a:t>
             </a:r>
             <a:endParaRPr lang="en-US" sz="3200" dirty="0"/>
           </a:p>
@@ -3271,7 +3271,7 @@
                 <a:ea typeface="Cambria" pitchFamily="34" charset="-122"/>
                 <a:cs typeface="Cambria" pitchFamily="34" charset="-120"/>
               </a:rPr>
-              <a:t>3 028 060 ₽</a:t>
+              <a:t>3 075 060 ₽</a:t>
             </a:r>
             <a:endParaRPr lang="en-US" sz="2100" dirty="0"/>
           </a:p>
@@ -3349,7 +3349,7 @@
                 <a:ea typeface="Cambria" pitchFamily="34" charset="-122"/>
                 <a:cs typeface="Cambria" pitchFamily="34" charset="-120"/>
               </a:rPr>
-              <a:t>151 403 ₽</a:t>
+              <a:t>153 753 ₽</a:t>
             </a:r>
             <a:endParaRPr lang="en-US" sz="2100" dirty="0"/>
           </a:p>
@@ -3427,7 +3427,7 @@
                 <a:ea typeface="Cambria" pitchFamily="34" charset="-122"/>
                 <a:cs typeface="Cambria" pitchFamily="34" charset="-120"/>
               </a:rPr>
-              <a:t>320 537 ₽</a:t>
+              <a:t>271 187 ₽</a:t>
             </a:r>
             <a:endParaRPr lang="en-US" sz="2100" dirty="0"/>
           </a:p>
@@ -3466,7 +3466,7 @@
                 <a:ea typeface="Calibri" pitchFamily="34" charset="-122"/>
                 <a:cs typeface="Calibri" pitchFamily="34" charset="-120"/>
               </a:rPr>
-              <a:t>запас до лимита, 9,2 %</a:t>
+              <a:t>запас до лимита, 7,7 %</a:t>
             </a:r>
             <a:endParaRPr lang="en-US" sz="1100" dirty="0"/>
           </a:p>
@@ -4270,7 +4270,7 @@
                 <a:ea typeface="Cambria" pitchFamily="34" charset="-122"/>
                 <a:cs typeface="Cambria" pitchFamily="34" charset="-120"/>
               </a:rPr>
-              <a:t>3 179 463 ₽</a:t>
+              <a:t>3 228 813 ₽</a:t>
             </a:r>
             <a:endParaRPr lang="en-US" sz="2800" dirty="0"/>
           </a:p>
@@ -5746,7 +5746,7 @@
         </p:nvSpPr>
         <p:spPr>
           <a:xfrm>
-            <a:off x="5806440" y="1783080"/>
+            <a:off x="5806440" y="1691640"/>
             <a:ext cx="329184" cy="329184"/>
           </a:xfrm>
           <a:prstGeom prst="ellipse">
@@ -5766,7 +5766,7 @@
         </p:nvSpPr>
         <p:spPr>
           <a:xfrm>
-            <a:off x="5806440" y="1783080"/>
+            <a:off x="5806440" y="1691640"/>
             <a:ext cx="329184" cy="329184"/>
           </a:xfrm>
           <a:prstGeom prst="rect">
@@ -5805,7 +5805,7 @@
         </p:nvSpPr>
         <p:spPr>
           <a:xfrm>
-            <a:off x="6309360" y="1737360"/>
+            <a:off x="6309360" y="1645920"/>
             <a:ext cx="5303520" cy="237744"/>
           </a:xfrm>
           <a:prstGeom prst="rect">
@@ -5844,7 +5844,7 @@
         </p:nvSpPr>
         <p:spPr>
           <a:xfrm>
-            <a:off x="6309360" y="1965960"/>
+            <a:off x="6309360" y="1874520"/>
             <a:ext cx="5303520" cy="219456"/>
           </a:xfrm>
           <a:prstGeom prst="rect">
@@ -5883,7 +5883,7 @@
         </p:nvSpPr>
         <p:spPr>
           <a:xfrm>
-            <a:off x="5806440" y="2295144"/>
+            <a:off x="5806440" y="2185416"/>
             <a:ext cx="329184" cy="329184"/>
           </a:xfrm>
           <a:prstGeom prst="ellipse">
@@ -5903,7 +5903,7 @@
         </p:nvSpPr>
         <p:spPr>
           <a:xfrm>
-            <a:off x="5806440" y="2295144"/>
+            <a:off x="5806440" y="2185416"/>
             <a:ext cx="329184" cy="329184"/>
           </a:xfrm>
           <a:prstGeom prst="rect">
@@ -5942,7 +5942,7 @@
         </p:nvSpPr>
         <p:spPr>
           <a:xfrm>
-            <a:off x="6309360" y="2249424"/>
+            <a:off x="6309360" y="2139696"/>
             <a:ext cx="5303520" cy="237744"/>
           </a:xfrm>
           <a:prstGeom prst="rect">
@@ -5981,7 +5981,7 @@
         </p:nvSpPr>
         <p:spPr>
           <a:xfrm>
-            <a:off x="6309360" y="2478024"/>
+            <a:off x="6309360" y="2368296"/>
             <a:ext cx="5303520" cy="219456"/>
           </a:xfrm>
           <a:prstGeom prst="rect">
@@ -6020,7 +6020,7 @@
         </p:nvSpPr>
         <p:spPr>
           <a:xfrm>
-            <a:off x="5806440" y="2807208"/>
+            <a:off x="5806440" y="2679192"/>
             <a:ext cx="329184" cy="329184"/>
           </a:xfrm>
           <a:prstGeom prst="ellipse">
@@ -6040,7 +6040,7 @@
         </p:nvSpPr>
         <p:spPr>
           <a:xfrm>
-            <a:off x="5806440" y="2807208"/>
+            <a:off x="5806440" y="2679192"/>
             <a:ext cx="329184" cy="329184"/>
           </a:xfrm>
           <a:prstGeom prst="rect">
@@ -6079,7 +6079,7 @@
         </p:nvSpPr>
         <p:spPr>
           <a:xfrm>
-            <a:off x="6309360" y="2761488"/>
+            <a:off x="6309360" y="2633472"/>
             <a:ext cx="5303520" cy="237744"/>
           </a:xfrm>
           <a:prstGeom prst="rect">
@@ -6118,7 +6118,7 @@
         </p:nvSpPr>
         <p:spPr>
           <a:xfrm>
-            <a:off x="6309360" y="2990088"/>
+            <a:off x="6309360" y="2862072"/>
             <a:ext cx="5303520" cy="219456"/>
           </a:xfrm>
           <a:prstGeom prst="rect">
@@ -6157,7 +6157,7 @@
         </p:nvSpPr>
         <p:spPr>
           <a:xfrm>
-            <a:off x="5806440" y="3319272"/>
+            <a:off x="5806440" y="3172968"/>
             <a:ext cx="329184" cy="329184"/>
           </a:xfrm>
           <a:prstGeom prst="ellipse">
@@ -6177,7 +6177,7 @@
         </p:nvSpPr>
         <p:spPr>
           <a:xfrm>
-            <a:off x="5806440" y="3319272"/>
+            <a:off x="5806440" y="3172968"/>
             <a:ext cx="329184" cy="329184"/>
           </a:xfrm>
           <a:prstGeom prst="rect">
@@ -6216,7 +6216,7 @@
         </p:nvSpPr>
         <p:spPr>
           <a:xfrm>
-            <a:off x="6309360" y="3273552"/>
+            <a:off x="6309360" y="3127248"/>
             <a:ext cx="5303520" cy="237744"/>
           </a:xfrm>
           <a:prstGeom prst="rect">
@@ -6255,7 +6255,7 @@
         </p:nvSpPr>
         <p:spPr>
           <a:xfrm>
-            <a:off x="6309360" y="3502152"/>
+            <a:off x="6309360" y="3355848"/>
             <a:ext cx="5303520" cy="219456"/>
           </a:xfrm>
           <a:prstGeom prst="rect">
@@ -6294,7 +6294,7 @@
         </p:nvSpPr>
         <p:spPr>
           <a:xfrm>
-            <a:off x="5806440" y="3831336"/>
+            <a:off x="5806440" y="3666744"/>
             <a:ext cx="329184" cy="329184"/>
           </a:xfrm>
           <a:prstGeom prst="ellipse">
@@ -6314,7 +6314,7 @@
         </p:nvSpPr>
         <p:spPr>
           <a:xfrm>
-            <a:off x="5806440" y="3831336"/>
+            <a:off x="5806440" y="3666744"/>
             <a:ext cx="329184" cy="329184"/>
           </a:xfrm>
           <a:prstGeom prst="rect">
@@ -6353,7 +6353,7 @@
         </p:nvSpPr>
         <p:spPr>
           <a:xfrm>
-            <a:off x="6309360" y="3785616"/>
+            <a:off x="6309360" y="3621024"/>
             <a:ext cx="5303520" cy="237744"/>
           </a:xfrm>
           <a:prstGeom prst="rect">
@@ -6392,7 +6392,7 @@
         </p:nvSpPr>
         <p:spPr>
           <a:xfrm>
-            <a:off x="6309360" y="4014216"/>
+            <a:off x="6309360" y="3849624"/>
             <a:ext cx="5303520" cy="219456"/>
           </a:xfrm>
           <a:prstGeom prst="rect">
@@ -6431,7 +6431,7 @@
         </p:nvSpPr>
         <p:spPr>
           <a:xfrm>
-            <a:off x="5806440" y="4343400"/>
+            <a:off x="5806440" y="4160520"/>
             <a:ext cx="329184" cy="329184"/>
           </a:xfrm>
           <a:prstGeom prst="ellipse">
@@ -6451,7 +6451,7 @@
         </p:nvSpPr>
         <p:spPr>
           <a:xfrm>
-            <a:off x="5806440" y="4343400"/>
+            <a:off x="5806440" y="4160520"/>
             <a:ext cx="329184" cy="329184"/>
           </a:xfrm>
           <a:prstGeom prst="rect">
@@ -6490,7 +6490,7 @@
         </p:nvSpPr>
         <p:spPr>
           <a:xfrm>
-            <a:off x="6309360" y="4297680"/>
+            <a:off x="6309360" y="4114800"/>
             <a:ext cx="5303520" cy="237744"/>
           </a:xfrm>
           <a:prstGeom prst="rect">
@@ -6529,7 +6529,7 @@
         </p:nvSpPr>
         <p:spPr>
           <a:xfrm>
-            <a:off x="6309360" y="4526280"/>
+            <a:off x="6309360" y="4343400"/>
             <a:ext cx="5303520" cy="219456"/>
           </a:xfrm>
           <a:prstGeom prst="rect">
@@ -6568,7 +6568,7 @@
         </p:nvSpPr>
         <p:spPr>
           <a:xfrm>
-            <a:off x="5806440" y="4855464"/>
+            <a:off x="5806440" y="4654296"/>
             <a:ext cx="329184" cy="329184"/>
           </a:xfrm>
           <a:prstGeom prst="ellipse">
@@ -6588,7 +6588,7 @@
         </p:nvSpPr>
         <p:spPr>
           <a:xfrm>
-            <a:off x="5806440" y="4855464"/>
+            <a:off x="5806440" y="4654296"/>
             <a:ext cx="329184" cy="329184"/>
           </a:xfrm>
           <a:prstGeom prst="rect">
@@ -6627,7 +6627,7 @@
         </p:nvSpPr>
         <p:spPr>
           <a:xfrm>
-            <a:off x="6309360" y="4809744"/>
+            <a:off x="6309360" y="4608576"/>
             <a:ext cx="5303520" cy="237744"/>
           </a:xfrm>
           <a:prstGeom prst="rect">
@@ -6666,7 +6666,7 @@
         </p:nvSpPr>
         <p:spPr>
           <a:xfrm>
-            <a:off x="6309360" y="5038344"/>
+            <a:off x="6309360" y="4837176"/>
             <a:ext cx="5303520" cy="219456"/>
           </a:xfrm>
           <a:prstGeom prst="rect">
@@ -6705,7 +6705,7 @@
         </p:nvSpPr>
         <p:spPr>
           <a:xfrm>
-            <a:off x="5806440" y="5367528"/>
+            <a:off x="5806440" y="5148072"/>
             <a:ext cx="329184" cy="329184"/>
           </a:xfrm>
           <a:prstGeom prst="ellipse">
@@ -6725,7 +6725,7 @@
         </p:nvSpPr>
         <p:spPr>
           <a:xfrm>
-            <a:off x="5806440" y="5367528"/>
+            <a:off x="5806440" y="5148072"/>
             <a:ext cx="329184" cy="329184"/>
           </a:xfrm>
           <a:prstGeom prst="rect">
@@ -6764,7 +6764,7 @@
         </p:nvSpPr>
         <p:spPr>
           <a:xfrm>
-            <a:off x="6309360" y="5321808"/>
+            <a:off x="6309360" y="5102352"/>
             <a:ext cx="5303520" cy="237744"/>
           </a:xfrm>
           <a:prstGeom prst="rect">
@@ -6789,7 +6789,7 @@
                 <a:ea typeface="Calibri" pitchFamily="34" charset="-122"/>
                 <a:cs typeface="Calibri" pitchFamily="34" charset="-120"/>
               </a:rPr>
-              <a:t>Таблички на фасаде</a:t>
+              <a:t>Парковка</a:t>
             </a:r>
             <a:endParaRPr lang="en-US" sz="1250" dirty="0"/>
           </a:p>
@@ -6803,7 +6803,7 @@
         </p:nvSpPr>
         <p:spPr>
           <a:xfrm>
-            <a:off x="6309360" y="5550408"/>
+            <a:off x="6309360" y="5330952"/>
             <a:ext cx="5303520" cy="219456"/>
           </a:xfrm>
           <a:prstGeom prst="rect">
@@ -6828,7 +6828,7 @@
                 <a:ea typeface="Calibri" pitchFamily="34" charset="-122"/>
                 <a:cs typeface="Calibri" pitchFamily="34" charset="-120"/>
               </a:rPr>
-              <a:t>клуб и библиотека, под золото</a:t>
+              <a:t>6 мест на крошке, вне ограждения</a:t>
             </a:r>
             <a:endParaRPr lang="en-US" sz="1050" dirty="0"/>
           </a:p>
@@ -6842,7 +6842,7 @@
         </p:nvSpPr>
         <p:spPr>
           <a:xfrm>
-            <a:off x="5806440" y="5879592"/>
+            <a:off x="5806440" y="5641848"/>
             <a:ext cx="329184" cy="329184"/>
           </a:xfrm>
           <a:prstGeom prst="ellipse">
@@ -6862,7 +6862,7 @@
         </p:nvSpPr>
         <p:spPr>
           <a:xfrm>
-            <a:off x="5806440" y="5879592"/>
+            <a:off x="5806440" y="5641848"/>
             <a:ext cx="329184" cy="329184"/>
           </a:xfrm>
           <a:prstGeom prst="rect">
@@ -6901,7 +6901,7 @@
         </p:nvSpPr>
         <p:spPr>
           <a:xfrm>
-            <a:off x="6309360" y="5833872"/>
+            <a:off x="6309360" y="5596128"/>
             <a:ext cx="5303520" cy="237744"/>
           </a:xfrm>
           <a:prstGeom prst="rect">
@@ -6926,7 +6926,7 @@
                 <a:ea typeface="Calibri" pitchFamily="34" charset="-122"/>
                 <a:cs typeface="Calibri" pitchFamily="34" charset="-120"/>
               </a:rPr>
-              <a:t>Парковка</a:t>
+              <a:t>Ограждение по бровке берега</a:t>
             </a:r>
             <a:endParaRPr lang="en-US" sz="1250" dirty="0"/>
           </a:p>
@@ -6940,7 +6940,7 @@
         </p:nvSpPr>
         <p:spPr>
           <a:xfrm>
-            <a:off x="6309360" y="6062472"/>
+            <a:off x="6309360" y="5824728"/>
             <a:ext cx="5303520" cy="219456"/>
           </a:xfrm>
           <a:prstGeom prst="rect">
@@ -6965,7 +6965,7 @@
                 <a:ea typeface="Calibri" pitchFamily="34" charset="-122"/>
                 <a:cs typeface="Calibri" pitchFamily="34" charset="-120"/>
               </a:rPr>
-              <a:t>6 мест на крошке, вне ограждения</a:t>
+              <a:t>40 п.м по северной границе, крутой склон</a:t>
             </a:r>
             <a:endParaRPr lang="en-US" sz="1050" dirty="0"/>
           </a:p>
@@ -8473,7 +8473,7 @@
                 <a:ea typeface="Cambria" pitchFamily="34" charset="-122"/>
                 <a:cs typeface="Cambria" pitchFamily="34" charset="-120"/>
               </a:rPr>
-              <a:t>Две таблички под золото</a:t>
+              <a:t>Таблички клуба и библиотеки</a:t>
             </a:r>
             <a:endParaRPr lang="en-US" sz="1600" dirty="0"/>
           </a:p>
@@ -8515,7 +8515,7 @@
                 <a:ea typeface="Calibri" pitchFamily="34" charset="-122"/>
                 <a:cs typeface="Calibri" pitchFamily="34" charset="-120"/>
               </a:rPr>
-              <a:t>«Любино-Малоросский Старожильский клуб» и «Библиотека» — в один ряд у угла фасада.</a:t>
+              <a:t>Существующие, в смету не входят. На южном фасаде у угла, справа от дорожки, в один ряд на отметке 2,35 м — в модели показаны для ориентации.</a:t>
             </a:r>
             <a:endParaRPr lang="en-US" sz="1100" dirty="0"/>
           </a:p>

--- a/polyanka-prezentaciya.pptx
+++ b/polyanka-prezentaciya.pptx
@@ -177,9 +177,9 @@
           </c:dLbls>
           <c:cat>
             <c:multiLvlStrRef>
-              <c:f>Sheet1!$A$2:$A$7</c:f>
+              <c:f>Sheet1!$A$2:$A$8</c:f>
               <c:multiLvlStrCache>
-                <c:ptCount val="6"/>
+                <c:ptCount val="7"/>
                 <c:lvl>
                   <c:pt idx="0">
                     <c:v>Подготовка и демонтаж</c:v>
@@ -199,16 +199,19 @@
                   <c:pt idx="5">
                     <c:v>Сохранение насаждений</c:v>
                   </c:pt>
+                  <c:pt idx="6">
+                    <c:v>Наружная канализация</c:v>
+                  </c:pt>
                 </c:lvl>
               </c:multiLvlStrCache>
             </c:multiLvlStrRef>
           </c:cat>
           <c:val>
             <c:numRef>
-              <c:f>Sheet1!$B$2:$B$7</c:f>
+              <c:f>Sheet1!$B$2:$B$8</c:f>
               <c:numCache>
                 <c:formatCode>General</c:formatCode>
-                <c:ptCount val="6"/>
+                <c:ptCount val="7"/>
                 <c:pt idx="0">
                   <c:v>218760</c:v>
                 </c:pt>
@@ -222,10 +225,13 @@
                   <c:v>713800</c:v>
                 </c:pt>
                 <c:pt idx="4">
-                  <c:v>575000</c:v>
+                  <c:v>571950</c:v>
                 </c:pt>
                 <c:pt idx="5">
                   <c:v>18000</c:v>
+                </c:pt>
+                <c:pt idx="6">
+                  <c:v>140620</c:v>
                 </c:pt>
               </c:numCache>
             </c:numRef>
@@ -2104,7 +2110,7 @@
       </p:grpSpPr>
       <p:pic>
         <p:nvPicPr>
-          <p:cNvPr id="2" name="Image 0" descr="deck/hero.png">    </p:cNvPr>
+          <p:cNvPr id="2" name="Image 0" descr="deck/hero.jpg">    </p:cNvPr>
           <p:cNvPicPr>
             <a:picLocks noChangeAspect="1"/>
           </p:cNvPicPr>
@@ -2575,7 +2581,7 @@
                 <a:ea typeface="Cambria" pitchFamily="34" charset="-122"/>
                 <a:cs typeface="Cambria" pitchFamily="34" charset="-120"/>
               </a:rPr>
-              <a:t>3 228 813 ₽</a:t>
+              <a:t>3 373 262 ₽</a:t>
             </a:r>
             <a:endParaRPr lang="en-US" sz="1700" dirty="0"/>
           </a:p>
@@ -2654,7 +2660,7 @@
       </p:grpSpPr>
       <p:pic>
         <p:nvPicPr>
-          <p:cNvPr id="2" name="Image 0" descr="deck/scena.png">    </p:cNvPr>
+          <p:cNvPr id="2" name="Image 0" descr="deck/scena.jpg">    </p:cNvPr>
           <p:cNvPicPr>
             <a:picLocks noChangeAspect="1"/>
           </p:cNvPicPr>
@@ -3177,7 +3183,7 @@
                 <a:ea typeface="Cambria" pitchFamily="34" charset="-122"/>
                 <a:cs typeface="Cambria" pitchFamily="34" charset="-120"/>
               </a:rPr>
-              <a:t>3 228 813 ₽ при лимите 3,5 млн</a:t>
+              <a:t>3 373 262 ₽ при лимите 3,5 млн</a:t>
             </a:r>
             <a:endParaRPr lang="en-US" sz="3200" dirty="0"/>
           </a:p>
@@ -3216,7 +3222,7 @@
                 <a:ea typeface="Calibri" pitchFamily="34" charset="-122"/>
                 <a:cs typeface="Calibri" pitchFamily="34" charset="-120"/>
               </a:rPr>
-              <a:t>29 позиций в шести разделах. Расценки укрупнённые, до подачи подтверждаются коммерческими предложениями.</a:t>
+              <a:t>39 позиций в семи разделах. Расценки укрупнённые, до подачи подтверждаются коммерческими предложениями.</a:t>
             </a:r>
             <a:endParaRPr lang="en-US" sz="1250" dirty="0"/>
           </a:p>
@@ -3271,7 +3277,7 @@
                 <a:ea typeface="Cambria" pitchFamily="34" charset="-122"/>
                 <a:cs typeface="Cambria" pitchFamily="34" charset="-120"/>
               </a:rPr>
-              <a:t>3 075 060 ₽</a:t>
+              <a:t>3 212 630 ₽</a:t>
             </a:r>
             <a:endParaRPr lang="en-US" sz="2100" dirty="0"/>
           </a:p>
@@ -3349,7 +3355,7 @@
                 <a:ea typeface="Cambria" pitchFamily="34" charset="-122"/>
                 <a:cs typeface="Cambria" pitchFamily="34" charset="-120"/>
               </a:rPr>
-              <a:t>153 753 ₽</a:t>
+              <a:t>160 632 ₽</a:t>
             </a:r>
             <a:endParaRPr lang="en-US" sz="2100" dirty="0"/>
           </a:p>
@@ -3427,7 +3433,7 @@
                 <a:ea typeface="Cambria" pitchFamily="34" charset="-122"/>
                 <a:cs typeface="Cambria" pitchFamily="34" charset="-120"/>
               </a:rPr>
-              <a:t>271 187 ₽</a:t>
+              <a:t>126 738 ₽</a:t>
             </a:r>
             <a:endParaRPr lang="en-US" sz="2100" dirty="0"/>
           </a:p>
@@ -3466,7 +3472,7 @@
                 <a:ea typeface="Calibri" pitchFamily="34" charset="-122"/>
                 <a:cs typeface="Calibri" pitchFamily="34" charset="-120"/>
               </a:rPr>
-              <a:t>запас до лимита, 7,7 %</a:t>
+              <a:t>запас до лимита, 3,6 %</a:t>
             </a:r>
             <a:endParaRPr lang="en-US" sz="1100" dirty="0"/>
           </a:p>
@@ -3567,7 +3573,7 @@
                 <a:ea typeface="Calibri" pitchFamily="34" charset="-122"/>
                 <a:cs typeface="Calibri" pitchFamily="34" charset="-120"/>
               </a:rPr>
-              <a:t>Резина — только в зонах приземления, остальное песок. Парковка — крошка, не асфальт. Здание клуба, септик и существующие деревья в объём работ не входят.</a:t>
+              <a:t>Резина — только в зонах приземления, остальное песок. Парковка — крошка, не асфальт. Кровли беседки и козырька — металлочерепица «Каскад»: поликарбонат не держит здешние ветра.</a:t>
             </a:r>
             <a:endParaRPr lang="en-US" sz="1050" dirty="0"/>
           </a:p>
@@ -3607,7 +3613,7 @@
       </p:grpSpPr>
       <p:pic>
         <p:nvPicPr>
-          <p:cNvPr id="2" name="Image 0" descr="deck/hero.png">    </p:cNvPr>
+          <p:cNvPr id="2" name="Image 0" descr="deck/hero.jpg">    </p:cNvPr>
           <p:cNvPicPr>
             <a:picLocks noChangeAspect="1"/>
           </p:cNvPicPr>
@@ -4270,7 +4276,7 @@
                 <a:ea typeface="Cambria" pitchFamily="34" charset="-122"/>
                 <a:cs typeface="Cambria" pitchFamily="34" charset="-120"/>
               </a:rPr>
-              <a:t>3 228 813 ₽</a:t>
+              <a:t>3 373 262 ₽</a:t>
             </a:r>
             <a:endParaRPr lang="en-US" sz="2800" dirty="0"/>
           </a:p>
@@ -4349,7 +4355,7 @@
       </p:grpSpPr>
       <p:pic>
         <p:nvPicPr>
-          <p:cNvPr id="2" name="Image 0" descr="deck/vorota.png">    </p:cNvPr>
+          <p:cNvPr id="2" name="Image 0" descr="deck/vorota.jpg">    </p:cNvPr>
           <p:cNvPicPr>
             <a:picLocks noChangeAspect="1"/>
           </p:cNvPicPr>
@@ -6417,7 +6423,7 @@
                 <a:ea typeface="Calibri" pitchFamily="34" charset="-122"/>
                 <a:cs typeface="Calibri" pitchFamily="34" charset="-120"/>
               </a:rPr>
-              <a:t>шестигранная, на 10–12 человек</a:t>
+              <a:t>шестигранная, кровля «Каскад» — ветровая нагрузка</a:t>
             </a:r>
             <a:endParaRPr lang="en-US" sz="1050" dirty="0"/>
           </a:p>
@@ -6974,6 +6980,143 @@
       <p:sp>
         <p:nvSpPr>
           <p:cNvPr id="41" name="Shape 38"/>
+          <p:cNvSpPr/>
+          <p:nvPr/>
+        </p:nvSpPr>
+        <p:spPr>
+          <a:xfrm>
+            <a:off x="5806440" y="6135624"/>
+            <a:ext cx="329184" cy="329184"/>
+          </a:xfrm>
+          <a:prstGeom prst="ellipse">
+            <a:avLst/>
+          </a:prstGeom>
+          <a:solidFill>
+            <a:srgbClr val="D65E10"/>
+          </a:solidFill>
+          <a:ln/>
+        </p:spPr>
+      </p:sp>
+      <p:sp>
+        <p:nvSpPr>
+          <p:cNvPr id="42" name="Text 39"/>
+          <p:cNvSpPr txBox="1"/>
+          <p:nvPr/>
+        </p:nvSpPr>
+        <p:spPr>
+          <a:xfrm>
+            <a:off x="5806440" y="6135624"/>
+            <a:ext cx="329184" cy="329184"/>
+          </a:xfrm>
+          <a:prstGeom prst="rect">
+            <a:avLst/>
+          </a:prstGeom>
+          <a:noFill/>
+          <a:ln/>
+        </p:spPr>
+        <p:txBody>
+          <a:bodyPr wrap="square" lIns="0" tIns="0" rIns="0" bIns="0" rtlCol="0" anchor="ctr"/>
+          <a:lstStyle/>
+          <a:p>
+            <a:pPr algn="ctr" indent="0" marL="0">
+              <a:buNone/>
+            </a:pPr>
+            <a:r>
+              <a:rPr lang="en-US" sz="1100" b="1" dirty="0">
+                <a:solidFill>
+                  <a:srgbClr val="FFFFFF"/>
+                </a:solidFill>
+                <a:latin typeface="Calibri" pitchFamily="34" charset="0"/>
+                <a:ea typeface="Calibri" pitchFamily="34" charset="-122"/>
+                <a:cs typeface="Calibri" pitchFamily="34" charset="-120"/>
+              </a:rPr>
+              <a:t>10</a:t>
+            </a:r>
+            <a:endParaRPr lang="en-US" sz="1100" dirty="0"/>
+          </a:p>
+        </p:txBody>
+      </p:sp>
+      <p:sp>
+        <p:nvSpPr>
+          <p:cNvPr id="43" name="Text 40"/>
+          <p:cNvSpPr txBox="1"/>
+          <p:nvPr/>
+        </p:nvSpPr>
+        <p:spPr>
+          <a:xfrm>
+            <a:off x="6309360" y="6089904"/>
+            <a:ext cx="5303520" cy="237744"/>
+          </a:xfrm>
+          <a:prstGeom prst="rect">
+            <a:avLst/>
+          </a:prstGeom>
+          <a:noFill/>
+          <a:ln/>
+        </p:spPr>
+        <p:txBody>
+          <a:bodyPr wrap="square" lIns="0" tIns="0" rIns="0" bIns="0" rtlCol="0" anchor="ctr"/>
+          <a:lstStyle/>
+          <a:p>
+            <a:pPr indent="0" marL="0">
+              <a:buNone/>
+            </a:pPr>
+            <a:r>
+              <a:rPr lang="en-US" sz="1250" b="1" dirty="0">
+                <a:solidFill>
+                  <a:srgbClr val="15201A"/>
+                </a:solidFill>
+                <a:latin typeface="Calibri" pitchFamily="34" charset="0"/>
+                <a:ea typeface="Calibri" pitchFamily="34" charset="-122"/>
+                <a:cs typeface="Calibri" pitchFamily="34" charset="-120"/>
+              </a:rPr>
+              <a:t>Замена наружной канализации</a:t>
+            </a:r>
+            <a:endParaRPr lang="en-US" sz="1250" dirty="0"/>
+          </a:p>
+        </p:txBody>
+      </p:sp>
+      <p:sp>
+        <p:nvSpPr>
+          <p:cNvPr id="44" name="Text 41"/>
+          <p:cNvSpPr txBox="1"/>
+          <p:nvPr/>
+        </p:nvSpPr>
+        <p:spPr>
+          <a:xfrm>
+            <a:off x="6309360" y="6318504"/>
+            <a:ext cx="5303520" cy="219456"/>
+          </a:xfrm>
+          <a:prstGeom prst="rect">
+            <a:avLst/>
+          </a:prstGeom>
+          <a:noFill/>
+          <a:ln/>
+        </p:spPr>
+        <p:txBody>
+          <a:bodyPr wrap="square" lIns="0" tIns="0" rIns="0" bIns="0" rtlCol="0" anchor="ctr"/>
+          <a:lstStyle/>
+          <a:p>
+            <a:pPr indent="0" marL="0">
+              <a:buNone/>
+            </a:pPr>
+            <a:r>
+              <a:rPr lang="en-US" sz="1050" dirty="0">
+                <a:solidFill>
+                  <a:srgbClr val="6B7A70"/>
+                </a:solidFill>
+                <a:latin typeface="Calibri" pitchFamily="34" charset="0"/>
+                <a:ea typeface="Calibri" pitchFamily="34" charset="-122"/>
+                <a:cs typeface="Calibri" pitchFamily="34" charset="-120"/>
+              </a:rPr>
+              <a:t>20 п.м от выпуска здания до септика, h = 2,0 м</a:t>
+            </a:r>
+            <a:endParaRPr lang="en-US" sz="1050" dirty="0"/>
+          </a:p>
+        </p:txBody>
+      </p:sp>
+      <p:sp>
+        <p:nvSpPr>
+          <p:cNvPr id="45" name="Shape 42"/>
           <p:cNvSpPr/>
           <p:nvPr/>
         </p:nvSpPr>
@@ -7025,7 +7168,7 @@
       </p:grpSpPr>
       <p:pic>
         <p:nvPicPr>
-          <p:cNvPr id="2" name="Image 0" descr="deck/scena-clean.png">    </p:cNvPr>
+          <p:cNvPr id="2" name="Image 0" descr="deck/scena-clean.jpg">    </p:cNvPr>
           <p:cNvPicPr>
             <a:picLocks noChangeAspect="1"/>
           </p:cNvPicPr>
@@ -7203,7 +7346,7 @@
                 <a:ea typeface="Calibri" pitchFamily="34" charset="-122"/>
                 <a:cs typeface="Calibri" pitchFamily="34" charset="-120"/>
               </a:rPr>
-              <a:t>Полукруглый настил под сводом из оранжевого поликарбоната. Со стороны воды — прозрачная ветрозащита 1,9 м: гасит ветер с озера, но не закрывает вид.</a:t>
+              <a:t>Полукруглый настил под сводом из оранжевого поликарбоната — знак солнца и главный цветовой акцент площадки. Со стороны воды — прозрачная ветрозащита 1,9 м: гасит ветер с озера, но не закрывает вид.</a:t>
             </a:r>
             <a:endParaRPr lang="en-US" sz="1050" dirty="0"/>
           </a:p>
@@ -7405,7 +7548,7 @@
       </p:grpSpPr>
       <p:pic>
         <p:nvPicPr>
-          <p:cNvPr id="2" name="Image 0" descr="deck/detskaya.png">    </p:cNvPr>
+          <p:cNvPr id="2" name="Image 0" descr="deck/detskaya.jpg">    </p:cNvPr>
           <p:cNvPicPr>
             <a:picLocks noChangeAspect="1"/>
           </p:cNvPicPr>
@@ -7979,7 +8122,7 @@
       </p:grpSpPr>
       <p:pic>
         <p:nvPicPr>
-          <p:cNvPr id="2" name="Image 0" descr="deck/vhod.png">    </p:cNvPr>
+          <p:cNvPr id="2" name="Image 0" descr="deck/vhod.jpg">    </p:cNvPr>
           <p:cNvPicPr>
             <a:picLocks noChangeAspect="1"/>
           </p:cNvPicPr>

--- a/polyanka-prezentaciya.pptx
+++ b/polyanka-prezentaciya.pptx
@@ -231,7 +231,7 @@
                   <c:v>18000</c:v>
                 </c:pt>
                 <c:pt idx="6">
-                  <c:v>140620</c:v>
+                  <c:v>114620</c:v>
                 </c:pt>
               </c:numCache>
             </c:numRef>
@@ -2581,7 +2581,7 @@
                 <a:ea typeface="Cambria" pitchFamily="34" charset="-122"/>
                 <a:cs typeface="Cambria" pitchFamily="34" charset="-120"/>
               </a:rPr>
-              <a:t>3 373 262 ₽</a:t>
+              <a:t>3 345 962 ₽</a:t>
             </a:r>
             <a:endParaRPr lang="en-US" sz="1700" dirty="0"/>
           </a:p>
@@ -3183,7 +3183,7 @@
                 <a:ea typeface="Cambria" pitchFamily="34" charset="-122"/>
                 <a:cs typeface="Cambria" pitchFamily="34" charset="-120"/>
               </a:rPr>
-              <a:t>3 373 262 ₽ при лимите 3,5 млн</a:t>
+              <a:t>3 345 962 ₽ при лимите 3,5 млн</a:t>
             </a:r>
             <a:endParaRPr lang="en-US" sz="3200" dirty="0"/>
           </a:p>
@@ -3222,7 +3222,7 @@
                 <a:ea typeface="Calibri" pitchFamily="34" charset="-122"/>
                 <a:cs typeface="Calibri" pitchFamily="34" charset="-120"/>
               </a:rPr>
-              <a:t>39 позиций в семи разделах. Расценки укрупнённые, до подачи подтверждаются коммерческими предложениями.</a:t>
+              <a:t>38 позиций в семи разделах. Расценки укрупнённые, до подачи подтверждаются коммерческими предложениями.</a:t>
             </a:r>
             <a:endParaRPr lang="en-US" sz="1250" dirty="0"/>
           </a:p>
@@ -3277,7 +3277,7 @@
                 <a:ea typeface="Cambria" pitchFamily="34" charset="-122"/>
                 <a:cs typeface="Cambria" pitchFamily="34" charset="-120"/>
               </a:rPr>
-              <a:t>3 212 630 ₽</a:t>
+              <a:t>3 186 630 ₽</a:t>
             </a:r>
             <a:endParaRPr lang="en-US" sz="2100" dirty="0"/>
           </a:p>
@@ -3355,7 +3355,7 @@
                 <a:ea typeface="Cambria" pitchFamily="34" charset="-122"/>
                 <a:cs typeface="Cambria" pitchFamily="34" charset="-120"/>
               </a:rPr>
-              <a:t>160 632 ₽</a:t>
+              <a:t>159 332 ₽</a:t>
             </a:r>
             <a:endParaRPr lang="en-US" sz="2100" dirty="0"/>
           </a:p>
@@ -3433,7 +3433,7 @@
                 <a:ea typeface="Cambria" pitchFamily="34" charset="-122"/>
                 <a:cs typeface="Cambria" pitchFamily="34" charset="-120"/>
               </a:rPr>
-              <a:t>126 738 ₽</a:t>
+              <a:t>154 038 ₽</a:t>
             </a:r>
             <a:endParaRPr lang="en-US" sz="2100" dirty="0"/>
           </a:p>
@@ -3472,7 +3472,7 @@
                 <a:ea typeface="Calibri" pitchFamily="34" charset="-122"/>
                 <a:cs typeface="Calibri" pitchFamily="34" charset="-120"/>
               </a:rPr>
-              <a:t>запас до лимита, 3,6 %</a:t>
+              <a:t>запас до лимита, 4,4 %</a:t>
             </a:r>
             <a:endParaRPr lang="en-US" sz="1100" dirty="0"/>
           </a:p>
@@ -4276,7 +4276,7 @@
                 <a:ea typeface="Cambria" pitchFamily="34" charset="-122"/>
                 <a:cs typeface="Cambria" pitchFamily="34" charset="-120"/>
               </a:rPr>
-              <a:t>3 373 262 ₽</a:t>
+              <a:t>3 345 962 ₽</a:t>
             </a:r>
             <a:endParaRPr lang="en-US" sz="2800" dirty="0"/>
           </a:p>
@@ -7069,7 +7069,7 @@
                 <a:ea typeface="Calibri" pitchFamily="34" charset="-122"/>
                 <a:cs typeface="Calibri" pitchFamily="34" charset="-120"/>
               </a:rPr>
-              <a:t>Замена наружной канализации</a:t>
+              <a:t>Замена трубы канализации</a:t>
             </a:r>
             <a:endParaRPr lang="en-US" sz="1250" dirty="0"/>
           </a:p>
@@ -7108,7 +7108,7 @@
                 <a:ea typeface="Calibri" pitchFamily="34" charset="-122"/>
                 <a:cs typeface="Calibri" pitchFamily="34" charset="-120"/>
               </a:rPr>
-              <a:t>20 п.м от выпуска здания до септика, h = 2,0 м</a:t>
+              <a:t>20 п.м от выпуска до септика, траншея до 2,0 м</a:t>
             </a:r>
             <a:endParaRPr lang="en-US" sz="1050" dirty="0"/>
           </a:p>

--- a/polyanka-prezentaciya.pptx
+++ b/polyanka-prezentaciya.pptx
@@ -216,7 +216,7 @@
                   <c:v>218760</c:v>
                 </c:pt>
                 <c:pt idx="1">
-                  <c:v>1087500</c:v>
+                  <c:v>963720</c:v>
                 </c:pt>
                 <c:pt idx="2">
                   <c:v>462000</c:v>
@@ -225,7 +225,7 @@
                   <c:v>713800</c:v>
                 </c:pt>
                 <c:pt idx="4">
-                  <c:v>571950</c:v>
+                  <c:v>966290</c:v>
                 </c:pt>
                 <c:pt idx="5">
                   <c:v>18000</c:v>
@@ -2581,7 +2581,7 @@
                 <a:ea typeface="Cambria" pitchFamily="34" charset="-122"/>
                 <a:cs typeface="Cambria" pitchFamily="34" charset="-120"/>
               </a:rPr>
-              <a:t>3 345 962 ₽</a:t>
+              <a:t>3 630 050 ₽</a:t>
             </a:r>
             <a:endParaRPr lang="en-US" sz="1700" dirty="0"/>
           </a:p>
@@ -3183,7 +3183,7 @@
                 <a:ea typeface="Cambria" pitchFamily="34" charset="-122"/>
                 <a:cs typeface="Cambria" pitchFamily="34" charset="-120"/>
               </a:rPr>
-              <a:t>3 345 962 ₽ при лимите 3,5 млн</a:t>
+              <a:t>3 630 050 ₽ — превышение лимита</a:t>
             </a:r>
             <a:endParaRPr lang="en-US" sz="3200" dirty="0"/>
           </a:p>
@@ -3222,7 +3222,7 @@
                 <a:ea typeface="Calibri" pitchFamily="34" charset="-122"/>
                 <a:cs typeface="Calibri" pitchFamily="34" charset="-120"/>
               </a:rPr>
-              <a:t>38 позиций в семи разделах. Расценки укрупнённые, до подачи подтверждаются коммерческими предложениями.</a:t>
+              <a:t>41 позиция в семи разделах. Расценки укрупнённые, до подачи подтверждаются коммерческими предложениями.</a:t>
             </a:r>
             <a:endParaRPr lang="en-US" sz="1250" dirty="0"/>
           </a:p>
@@ -3277,7 +3277,7 @@
                 <a:ea typeface="Cambria" pitchFamily="34" charset="-122"/>
                 <a:cs typeface="Cambria" pitchFamily="34" charset="-120"/>
               </a:rPr>
-              <a:t>3 186 630 ₽</a:t>
+              <a:t>3 457 190 ₽</a:t>
             </a:r>
             <a:endParaRPr lang="en-US" sz="2100" dirty="0"/>
           </a:p>
@@ -3355,7 +3355,7 @@
                 <a:ea typeface="Cambria" pitchFamily="34" charset="-122"/>
                 <a:cs typeface="Cambria" pitchFamily="34" charset="-120"/>
               </a:rPr>
-              <a:t>159 332 ₽</a:t>
+              <a:t>172 860 ₽</a:t>
             </a:r>
             <a:endParaRPr lang="en-US" sz="2100" dirty="0"/>
           </a:p>
@@ -3433,7 +3433,7 @@
                 <a:ea typeface="Cambria" pitchFamily="34" charset="-122"/>
                 <a:cs typeface="Cambria" pitchFamily="34" charset="-120"/>
               </a:rPr>
-              <a:t>154 038 ₽</a:t>
+              <a:t>−130 050 ₽</a:t>
             </a:r>
             <a:endParaRPr lang="en-US" sz="2100" dirty="0"/>
           </a:p>
@@ -3472,7 +3472,7 @@
                 <a:ea typeface="Calibri" pitchFamily="34" charset="-122"/>
                 <a:cs typeface="Calibri" pitchFamily="34" charset="-120"/>
               </a:rPr>
-              <a:t>запас до лимита, 4,4 %</a:t>
+              <a:t>превышение лимита, 3,7 %</a:t>
             </a:r>
             <a:endParaRPr lang="en-US" sz="1100" dirty="0"/>
           </a:p>
@@ -3573,7 +3573,7 @@
                 <a:ea typeface="Calibri" pitchFamily="34" charset="-122"/>
                 <a:cs typeface="Calibri" pitchFamily="34" charset="-120"/>
               </a:rPr>
-              <a:t>Резина — только в зонах приземления, остальное песок. Парковка — крошка, не асфальт. Кровли беседки и козырька — металлочерепица «Каскад»: поликарбонат не держит здешние ветра.</a:t>
+              <a:t>Ограждение с трёх сторон по образцу заказчика поднимает смету выше лимита на 130 050 ₽ — объём требует сокращения до подачи. Варианты: отказ от бетонного цоколя, ограждение в две очереди или замена резинового покрытия песком.</a:t>
             </a:r>
             <a:endParaRPr lang="en-US" sz="1050" dirty="0"/>
           </a:p>
@@ -4276,7 +4276,7 @@
                 <a:ea typeface="Cambria" pitchFamily="34" charset="-122"/>
                 <a:cs typeface="Cambria" pitchFamily="34" charset="-120"/>
               </a:rPr>
-              <a:t>3 345 962 ₽</a:t>
+              <a:t>3 630 050 ₽</a:t>
             </a:r>
             <a:endParaRPr lang="en-US" sz="2800" dirty="0"/>
           </a:p>
@@ -6423,7 +6423,7 @@
                 <a:ea typeface="Calibri" pitchFamily="34" charset="-122"/>
                 <a:cs typeface="Calibri" pitchFamily="34" charset="-120"/>
               </a:rPr>
-              <a:t>шестигранная, кровля «Каскад» — ветровая нагрузка</a:t>
+              <a:t>в начале восточной полосы, кровля «Каскад»</a:t>
             </a:r>
             <a:endParaRPr lang="en-US" sz="1050" dirty="0"/>
           </a:p>
@@ -6560,7 +6560,7 @@
                 <a:ea typeface="Calibri" pitchFamily="34" charset="-122"/>
                 <a:cs typeface="Calibri" pitchFamily="34" charset="-120"/>
               </a:rPr>
-              <a:t>195 м², четыре игровых элемента</a:t>
+              <a:t>106 м² в полосе 6,7 м вдоль забора</a:t>
             </a:r>
             <a:endParaRPr lang="en-US" sz="1050" dirty="0"/>
           </a:p>
@@ -6932,7 +6932,7 @@
                 <a:ea typeface="Calibri" pitchFamily="34" charset="-122"/>
                 <a:cs typeface="Calibri" pitchFamily="34" charset="-120"/>
               </a:rPr>
-              <a:t>Ограждение по бровке берега</a:t>
+              <a:t>Ограждение решётчатое</a:t>
             </a:r>
             <a:endParaRPr lang="en-US" sz="1250" dirty="0"/>
           </a:p>
@@ -6971,7 +6971,7 @@
                 <a:ea typeface="Calibri" pitchFamily="34" charset="-122"/>
                 <a:cs typeface="Calibri" pitchFamily="34" charset="-120"/>
               </a:rPr>
-              <a:t>40 п.м по северной границе, крутой склон</a:t>
+              <a:t>114 п.м с трёх сторон, на бетонном цоколе</a:t>
             </a:r>
             <a:endParaRPr lang="en-US" sz="1050" dirty="0"/>
           </a:p>

--- a/polyanka-prezentaciya.pptx
+++ b/polyanka-prezentaciya.pptx
@@ -216,7 +216,7 @@
                   <c:v>218760</c:v>
                 </c:pt>
                 <c:pt idx="1">
-                  <c:v>963720</c:v>
+                  <c:v>806680</c:v>
                 </c:pt>
                 <c:pt idx="2">
                   <c:v>462000</c:v>
@@ -225,7 +225,7 @@
                   <c:v>713800</c:v>
                 </c:pt>
                 <c:pt idx="4">
-                  <c:v>966290</c:v>
+                  <c:v>835190</c:v>
                 </c:pt>
                 <c:pt idx="5">
                   <c:v>18000</c:v>
@@ -767,7 +767,7 @@
           <a:p>
             <a:r>
               <a:rPr lang="en-US" dirty="0"/>
-              <a:t>Проект благоустройства территории Старожильского клуба. Участок 55:11:100201:1471, 1712 м². Стоимость 3 179 463 руб. при лимите 3,5 млн.</a:t>
+              <a:t>Проект благоустройства территории Старожильского клуба. Участок 55:11:100201:1471, 1712 м². Стоимость 3 327 503 руб. при лимите 3,5 млн, запас 4,9 %.</a:t>
             </a:r>
             <a:endParaRPr lang="en-US" dirty="0"/>
           </a:p>
@@ -2581,7 +2581,7 @@
                 <a:ea typeface="Cambria" pitchFamily="34" charset="-122"/>
                 <a:cs typeface="Cambria" pitchFamily="34" charset="-120"/>
               </a:rPr>
-              <a:t>3 630 050 ₽</a:t>
+              <a:t>3 327 503 ₽</a:t>
             </a:r>
             <a:endParaRPr lang="en-US" sz="1700" dirty="0"/>
           </a:p>
@@ -3183,7 +3183,7 @@
                 <a:ea typeface="Cambria" pitchFamily="34" charset="-122"/>
                 <a:cs typeface="Cambria" pitchFamily="34" charset="-120"/>
               </a:rPr>
-              <a:t>3 630 050 ₽ — превышение лимита</a:t>
+              <a:t>3 327 503 ₽ при лимите 3,5 млн</a:t>
             </a:r>
             <a:endParaRPr lang="en-US" sz="3200" dirty="0"/>
           </a:p>
@@ -3222,7 +3222,7 @@
                 <a:ea typeface="Calibri" pitchFamily="34" charset="-122"/>
                 <a:cs typeface="Calibri" pitchFamily="34" charset="-120"/>
               </a:rPr>
-              <a:t>41 позиция в семи разделах. Расценки укрупнённые, до подачи подтверждаются коммерческими предложениями.</a:t>
+              <a:t>38 позиций в семи разделах. Расценки укрупнённые, до подачи подтверждаются коммерческими предложениями.</a:t>
             </a:r>
             <a:endParaRPr lang="en-US" sz="1250" dirty="0"/>
           </a:p>
@@ -3277,7 +3277,7 @@
                 <a:ea typeface="Cambria" pitchFamily="34" charset="-122"/>
                 <a:cs typeface="Cambria" pitchFamily="34" charset="-120"/>
               </a:rPr>
-              <a:t>3 457 190 ₽</a:t>
+              <a:t>3 169 050 ₽</a:t>
             </a:r>
             <a:endParaRPr lang="en-US" sz="2100" dirty="0"/>
           </a:p>
@@ -3355,7 +3355,7 @@
                 <a:ea typeface="Cambria" pitchFamily="34" charset="-122"/>
                 <a:cs typeface="Cambria" pitchFamily="34" charset="-120"/>
               </a:rPr>
-              <a:t>172 860 ₽</a:t>
+              <a:t>158 453 ₽</a:t>
             </a:r>
             <a:endParaRPr lang="en-US" sz="2100" dirty="0"/>
           </a:p>
@@ -3433,7 +3433,7 @@
                 <a:ea typeface="Cambria" pitchFamily="34" charset="-122"/>
                 <a:cs typeface="Cambria" pitchFamily="34" charset="-120"/>
               </a:rPr>
-              <a:t>−130 050 ₽</a:t>
+              <a:t>172 497 ₽</a:t>
             </a:r>
             <a:endParaRPr lang="en-US" sz="2100" dirty="0"/>
           </a:p>
@@ -3472,7 +3472,7 @@
                 <a:ea typeface="Calibri" pitchFamily="34" charset="-122"/>
                 <a:cs typeface="Calibri" pitchFamily="34" charset="-120"/>
               </a:rPr>
-              <a:t>превышение лимита, 3,7 %</a:t>
+              <a:t>запас до лимита, 4,9 %</a:t>
             </a:r>
             <a:endParaRPr lang="en-US" sz="1100" dirty="0"/>
           </a:p>
@@ -3486,8 +3486,8 @@
         </p:nvSpPr>
         <p:spPr>
           <a:xfrm>
-            <a:off x="7772400" y="5029200"/>
-            <a:ext cx="3794760" cy="1280160"/>
+            <a:off x="7772400" y="4846320"/>
+            <a:ext cx="3794760" cy="1508760"/>
           </a:xfrm>
           <a:prstGeom prst="rect">
             <a:avLst/>
@@ -3506,7 +3506,7 @@
         </p:nvSpPr>
         <p:spPr>
           <a:xfrm>
-            <a:off x="8001000" y="5193792"/>
+            <a:off x="8001000" y="4983480"/>
             <a:ext cx="3383280" cy="237744"/>
           </a:xfrm>
           <a:prstGeom prst="rect">
@@ -3545,8 +3545,8 @@
         </p:nvSpPr>
         <p:spPr>
           <a:xfrm>
-            <a:off x="8001000" y="5468112"/>
-            <a:ext cx="3383280" cy="777240"/>
+            <a:off x="8001000" y="5248656"/>
+            <a:ext cx="3383280" cy="1051560"/>
           </a:xfrm>
           <a:prstGeom prst="rect">
             <a:avLst/>
@@ -3560,12 +3560,12 @@
           <a:p>
             <a:pPr indent="0" marL="0">
               <a:lnSpc>
-                <a:spcPts val="1300"/>
+                <a:spcPts val="1250"/>
               </a:lnSpc>
               <a:buNone/>
             </a:pPr>
             <a:r>
-              <a:rPr lang="en-US" sz="1050" dirty="0">
+              <a:rPr lang="en-US" sz="980" dirty="0">
                 <a:solidFill>
                   <a:srgbClr val="15201A"/>
                 </a:solidFill>
@@ -3573,9 +3573,9 @@
                 <a:ea typeface="Calibri" pitchFamily="34" charset="-122"/>
                 <a:cs typeface="Calibri" pitchFamily="34" charset="-120"/>
               </a:rPr>
-              <a:t>Ограждение с трёх сторон по образцу заказчика поднимает смету выше лимита на 130 050 ₽ — объём требует сокращения до подачи. Варианты: отказ от бетонного цоколя, ограждение в две очереди или замена резинового покрытия песком.</a:t>
-            </a:r>
-            <a:endParaRPr lang="en-US" sz="1050" dirty="0"/>
+              <a:t>Ради нового ограждения отказались от бетонного цоколя под забором и от резинового покрытия: площадка целиком на песке 30 см — по ГОСТ Р ЕН 1177 это равноценно. Состав объектов и игровое оборудование сохранены.</a:t>
+            </a:r>
+            <a:endParaRPr lang="en-US" sz="980" dirty="0"/>
           </a:p>
         </p:txBody>
       </p:sp>
@@ -4276,7 +4276,7 @@
                 <a:ea typeface="Cambria" pitchFamily="34" charset="-122"/>
                 <a:cs typeface="Cambria" pitchFamily="34" charset="-120"/>
               </a:rPr>
-              <a:t>3 630 050 ₽</a:t>
+              <a:t>3 327 503 ₽</a:t>
             </a:r>
             <a:endParaRPr lang="en-US" sz="2800" dirty="0"/>
           </a:p>
@@ -6423,7 +6423,7 @@
                 <a:ea typeface="Calibri" pitchFamily="34" charset="-122"/>
                 <a:cs typeface="Calibri" pitchFamily="34" charset="-120"/>
               </a:rPr>
-              <a:t>в начале восточной полосы, кровля «Каскад»</a:t>
+              <a:t>справа от ворот, створы на сцену и площадку</a:t>
             </a:r>
             <a:endParaRPr lang="en-US" sz="1050" dirty="0"/>
           </a:p>
@@ -6971,7 +6971,7 @@
                 <a:ea typeface="Calibri" pitchFamily="34" charset="-122"/>
                 <a:cs typeface="Calibri" pitchFamily="34" charset="-120"/>
               </a:rPr>
-              <a:t>114 п.м с трёх сторон, на бетонном цоколе</a:t>
+              <a:t>114 п.м с трёх сторон, столбы с бетонированием</a:t>
             </a:r>
             <a:endParaRPr lang="en-US" sz="1050" dirty="0"/>
           </a:p>

--- a/polyanka-prezentaciya.pptx
+++ b/polyanka-prezentaciya.pptx
@@ -17,9 +17,10 @@
     <p:sldId id="265" r:id="rId11"/>
     <p:sldId id="266" r:id="rId12"/>
     <p:sldId id="267" r:id="rId13"/>
+    <p:sldId id="268" r:id="rId14"/>
   </p:sldIdLst>
   <p:notesMasterIdLst>
-    <p:notesMasterId r:id="rId14"/>
+    <p:notesMasterId r:id="rId15"/>
   </p:notesMasterIdLst>
   <p:sldSz cx="12192000" cy="6858000"/>
   <p:notesSz cx="6858000" cy="12192000"/>
@@ -216,7 +217,7 @@
                   <c:v>218760</c:v>
                 </c:pt>
                 <c:pt idx="1">
-                  <c:v>806680</c:v>
+                  <c:v>811200</c:v>
                 </c:pt>
                 <c:pt idx="2">
                   <c:v>462000</c:v>
@@ -225,7 +226,7 @@
                   <c:v>713800</c:v>
                 </c:pt>
                 <c:pt idx="4">
-                  <c:v>835190</c:v>
+                  <c:v>859190</c:v>
                 </c:pt>
                 <c:pt idx="5">
                   <c:v>18000</c:v>
@@ -767,7 +768,7 @@
           <a:p>
             <a:r>
               <a:rPr lang="en-US" dirty="0"/>
-              <a:t>Проект благоустройства территории Старожильского клуба. Участок 55:11:100201:1471, 1712 м². Стоимость 3 327 503 руб. при лимите 3,5 млн, запас 4,9 %.</a:t>
+              <a:t>Проект благоустройства территории Старожильского клуба. Участок 55:11:100201:1471, 1712 м². Стоимость 3 357 449 руб. при лимите 3,5 млн, запас 4,1 %.</a:t>
             </a:r>
             <a:endParaRPr lang="en-US" dirty="0"/>
           </a:p>
@@ -855,7 +856,7 @@
           <a:p>
             <a:r>
               <a:rPr lang="en-US" dirty="0"/>
-              <a:t>Аргумент о развитии: вложение работает за пределами одного села.</a:t>
+              <a:t>Ансамбль «Жихарка» и коллектив «Сибирская песня» — готовая основа для вечорок.</a:t>
             </a:r>
             <a:endParaRPr lang="en-US" dirty="0"/>
           </a:p>
@@ -943,7 +944,7 @@
           <a:p>
             <a:r>
               <a:rPr lang="en-US" dirty="0"/>
-              <a:t>Ведомость не является сметой по ТЕР/ФЕР; для конкурсной документации нужен локальный сметный расчёт. Существующее ограждение по трём сторонам принято исправным и не включено.</a:t>
+              <a:t>Аргумент о развитии: вложение работает за пределами одного села.</a:t>
             </a:r>
             <a:endParaRPr lang="en-US" dirty="0"/>
           </a:p>
@@ -1031,7 +1032,7 @@
           <a:p>
             <a:r>
               <a:rPr lang="en-US" dirty="0"/>
-              <a:t>Заполнить данные собрания и софинансирования перед подачей.</a:t>
+              <a:t>Ведомость не является сметой по ТЕР/ФЕР; для конкурсной документации нужен локальный сметный расчёт. Существующее ограждение по трём сторонам принято исправным и не включено.</a:t>
             </a:r>
             <a:endParaRPr lang="en-US" dirty="0"/>
           </a:p>
@@ -1055,6 +1056,94 @@
             <a:fld id="{F7021451-1387-4CA6-816F-3879F97B5CBC}" type="slidenum">
               <a:rPr lang="en-US"/>
               <a:t>12</a:t>
+            </a:fld>
+            <a:endParaRPr lang="en-US"/>
+          </a:p>
+        </p:txBody>
+      </p:sp>
+    </p:spTree>
+    <p:extLst>
+      <p:ext uri="{BB962C8B-B14F-4D97-AF65-F5344CB8AC3E}">
+        <p14:creationId xmlns:p14="http://schemas.microsoft.com/office/powerpoint/2010/main" val="1024086991"/>
+      </p:ext>
+    </p:extLst>
+  </p:cSld>
+  <p:clrMapOvr>
+    <a:masterClrMapping/>
+  </p:clrMapOvr>
+</p:notes>
+</file>
+
+<file path=ppt/notesSlides/notesSlide13.xml><?xml version="1.0" encoding="utf-8"?>
+<p:notes xmlns:a="http://schemas.openxmlformats.org/drawingml/2006/main" xmlns:r="http://schemas.openxmlformats.org/officeDocument/2006/relationships" xmlns:p="http://schemas.openxmlformats.org/presentationml/2006/main">
+  <p:cSld>
+    <p:spTree>
+      <p:nvGrpSpPr>
+        <p:cNvPr id="1" name=""/>
+        <p:cNvGrpSpPr/>
+        <p:nvPr/>
+      </p:nvGrpSpPr>
+      <p:grpSpPr>
+        <a:xfrm>
+          <a:off x="0" y="0"/>
+          <a:ext cx="0" cy="0"/>
+          <a:chOff x="0" y="0"/>
+          <a:chExt cx="0" cy="0"/>
+        </a:xfrm>
+      </p:grpSpPr>
+      <p:sp>
+        <p:nvSpPr>
+          <p:cNvPr id="2" name="Slide Image Placeholder 1"/>
+          <p:cNvSpPr>
+            <a:spLocks noGrp="1" noRot="1" noChangeAspect="1"/>
+          </p:cNvSpPr>
+          <p:nvPr>
+            <p:ph type="sldImg"/>
+          </p:nvPr>
+        </p:nvSpPr>
+        <p:spPr/>
+      </p:sp>
+      <p:sp>
+        <p:nvSpPr>
+          <p:cNvPr id="3" name="Notes Placeholder 2"/>
+          <p:cNvSpPr>
+            <a:spLocks noGrp="1"/>
+          </p:cNvSpPr>
+          <p:nvPr>
+            <p:ph type="body" idx="1"/>
+          </p:nvPr>
+        </p:nvSpPr>
+        <p:spPr/>
+        <p:txBody>
+          <a:bodyPr/>
+          <a:lstStyle/>
+          <a:p>
+            <a:r>
+              <a:rPr lang="en-US" dirty="0"/>
+              <a:t>Заполнить данные собрания и софинансирования перед подачей.</a:t>
+            </a:r>
+            <a:endParaRPr lang="en-US" dirty="0"/>
+          </a:p>
+        </p:txBody>
+      </p:sp>
+      <p:sp>
+        <p:nvSpPr>
+          <p:cNvPr id="4" name="Slide Number Placeholder 3"/>
+          <p:cNvSpPr>
+            <a:spLocks noGrp="1"/>
+          </p:cNvSpPr>
+          <p:nvPr>
+            <p:ph type="sldNum" sz="quarter" idx="10"/>
+          </p:nvPr>
+        </p:nvSpPr>
+        <p:spPr/>
+        <p:txBody>
+          <a:bodyPr/>
+          <a:lstStyle/>
+          <a:p>
+            <a:fld id="{F7021451-1387-4CA6-816F-3879F97B5CBC}" type="slidenum">
+              <a:rPr lang="en-US"/>
+              <a:t>13</a:t>
             </a:fld>
             <a:endParaRPr lang="en-US"/>
           </a:p>
@@ -1647,7 +1736,7 @@
           <a:p>
             <a:r>
               <a:rPr lang="en-US" dirty="0"/>
-              <a:t>Вместимость 200-250 человек — расчёт по площади полянки и зрительской площадки.</a:t>
+              <a:t>Ассортимент подобран по непрерывности цветения и по традиционной деревенской палитре — те же охра, малиновый и фиолетовый, что в тканых половиках на полянке.</a:t>
             </a:r>
             <a:endParaRPr lang="en-US" dirty="0"/>
           </a:p>
@@ -1735,7 +1824,7 @@
           <a:p>
             <a:r>
               <a:rPr lang="en-US" dirty="0"/>
-              <a:t>Ансамбль «Жихарка» и коллектив «Сибирская песня» — готовая основа для вечорок.</a:t>
+              <a:t>Вместимость 200-250 человек — расчёт по площади полянки и зрительской площадки.</a:t>
             </a:r>
             <a:endParaRPr lang="en-US" dirty="0"/>
           </a:p>
@@ -2581,7 +2670,7 @@
                 <a:ea typeface="Cambria" pitchFamily="34" charset="-122"/>
                 <a:cs typeface="Cambria" pitchFamily="34" charset="-120"/>
               </a:rPr>
-              <a:t>3 327 503 ₽</a:t>
+              <a:t>3 357 449 ₽</a:t>
             </a:r>
             <a:endParaRPr lang="en-US" sz="1700" dirty="0"/>
           </a:p>
@@ -2640,7 +2729,7 @@
     <p:bg>
       <p:bgPr>
         <a:solidFill>
-          <a:srgbClr val="FFFFFF"/>
+          <a:srgbClr val="15201A"/>
         </a:solidFill>
       </p:bgPr>
     </p:bg>
@@ -2658,39 +2747,16 @@
           <a:chExt cx="0" cy="0"/>
         </a:xfrm>
       </p:grpSpPr>
-      <p:pic>
-        <p:nvPicPr>
-          <p:cNvPr id="2" name="Image 0" descr="deck/scena.jpg">    </p:cNvPr>
-          <p:cNvPicPr>
-            <a:picLocks noChangeAspect="1"/>
-          </p:cNvPicPr>
-          <p:nvPr/>
-        </p:nvPicPr>
-        <p:blipFill>
-          <a:blip r:embed="rId1"/>
-          <a:srcRect l="0" r="0" t="0" b="0"/>
-          <a:stretch/>
-        </p:blipFill>
-        <p:spPr>
-          <a:xfrm>
-            <a:off x="0" y="0"/>
-            <a:ext cx="12188952" cy="3200400"/>
-          </a:xfrm>
-          <a:prstGeom prst="rect">
-            <a:avLst/>
-          </a:prstGeom>
-        </p:spPr>
-      </p:pic>
-      <p:sp>
-        <p:nvSpPr>
-          <p:cNvPr id="3" name="Text 0"/>
-          <p:cNvSpPr txBox="1"/>
-          <p:nvPr/>
-        </p:nvSpPr>
-        <p:spPr>
-          <a:xfrm>
-            <a:off x="640080" y="3520440"/>
-            <a:ext cx="5486400" cy="274320"/>
+      <p:sp>
+        <p:nvSpPr>
+          <p:cNvPr id="2" name="Text 0"/>
+          <p:cNvSpPr txBox="1"/>
+          <p:nvPr/>
+        </p:nvSpPr>
+        <p:spPr>
+          <a:xfrm>
+            <a:off x="640080" y="566928"/>
+            <a:ext cx="7315200" cy="274320"/>
           </a:xfrm>
           <a:prstGeom prst="rect">
             <a:avLst/>
@@ -2708,13 +2774,13 @@
             <a:r>
               <a:rPr lang="en-US" sz="1000" b="1" spc="200" kern="0" dirty="0">
                 <a:solidFill>
-                  <a:srgbClr val="6B7A70"/>
-                </a:solidFill>
-                <a:latin typeface="Calibri" pitchFamily="34" charset="0"/>
-                <a:ea typeface="Calibri" pitchFamily="34" charset="-122"/>
-                <a:cs typeface="Calibri" pitchFamily="34" charset="-120"/>
-              </a:rPr>
-              <a:t>РАЗВИТИЕ</a:t>
+                  <a:srgbClr val="F4A56B"/>
+                </a:solidFill>
+                <a:latin typeface="Calibri" pitchFamily="34" charset="0"/>
+                <a:ea typeface="Calibri" pitchFamily="34" charset="-122"/>
+                <a:cs typeface="Calibri" pitchFamily="34" charset="-120"/>
+              </a:rPr>
+              <a:t>КУЛЬТУРНЫЙ КОД И ТРАДИЦИИ</a:t>
             </a:r>
             <a:endParaRPr lang="en-US" sz="1000" dirty="0"/>
           </a:p>
@@ -2722,80 +2788,77 @@
       </p:sp>
       <p:sp>
         <p:nvSpPr>
-          <p:cNvPr id="4" name="Text 1"/>
-          <p:cNvSpPr txBox="1"/>
-          <p:nvPr/>
-        </p:nvSpPr>
-        <p:spPr>
-          <a:xfrm>
-            <a:off x="640080" y="3840480"/>
-            <a:ext cx="6675120" cy="548640"/>
-          </a:xfrm>
-          <a:prstGeom prst="rect">
-            <a:avLst/>
-          </a:prstGeom>
-          <a:noFill/>
-          <a:ln/>
-        </p:spPr>
-        <p:txBody>
-          <a:bodyPr wrap="square" lIns="0" tIns="0" rIns="0" bIns="0" rtlCol="0" anchor="ctr"/>
-          <a:lstStyle/>
-          <a:p>
-            <a:pPr indent="0" marL="0">
-              <a:buNone/>
-            </a:pPr>
-            <a:r>
-              <a:rPr lang="en-US" sz="2800" b="1" dirty="0">
-                <a:solidFill>
-                  <a:srgbClr val="15201A"/>
+          <p:cNvPr id="3" name="Text 1"/>
+          <p:cNvSpPr txBox="1"/>
+          <p:nvPr/>
+        </p:nvSpPr>
+        <p:spPr>
+          <a:xfrm>
+            <a:off x="640080" y="914400"/>
+            <a:ext cx="10058400" cy="548640"/>
+          </a:xfrm>
+          <a:prstGeom prst="rect">
+            <a:avLst/>
+          </a:prstGeom>
+          <a:noFill/>
+          <a:ln/>
+        </p:spPr>
+        <p:txBody>
+          <a:bodyPr wrap="square" lIns="0" tIns="0" rIns="0" bIns="0" rtlCol="0" anchor="ctr"/>
+          <a:lstStyle/>
+          <a:p>
+            <a:pPr indent="0" marL="0">
+              <a:buNone/>
+            </a:pPr>
+            <a:r>
+              <a:rPr lang="en-US" sz="3000" b="1" dirty="0">
+                <a:solidFill>
+                  <a:srgbClr val="FFFFFF"/>
                 </a:solidFill>
                 <a:latin typeface="Cambria" pitchFamily="34" charset="0"/>
                 <a:ea typeface="Cambria" pitchFamily="34" charset="-122"/>
                 <a:cs typeface="Cambria" pitchFamily="34" charset="-120"/>
               </a:rPr>
-              <a:t>Гости села и отдыхающие</a:t>
-            </a:r>
-            <a:endParaRPr lang="en-US" sz="2800" dirty="0"/>
-          </a:p>
-        </p:txBody>
-      </p:sp>
-      <p:sp>
-        <p:nvSpPr>
-          <p:cNvPr id="5" name="Text 2"/>
-          <p:cNvSpPr txBox="1"/>
-          <p:nvPr/>
-        </p:nvSpPr>
-        <p:spPr>
-          <a:xfrm>
-            <a:off x="640080" y="4526280"/>
-            <a:ext cx="6400800" cy="731520"/>
-          </a:xfrm>
-          <a:prstGeom prst="rect">
-            <a:avLst/>
-          </a:prstGeom>
-          <a:noFill/>
-          <a:ln/>
-        </p:spPr>
-        <p:txBody>
-          <a:bodyPr wrap="square" lIns="0" tIns="0" rIns="0" bIns="0" rtlCol="0" anchor="ctr"/>
-          <a:lstStyle/>
-          <a:p>
-            <a:pPr indent="0" marL="0">
-              <a:lnSpc>
-                <a:spcPts val="1800"/>
-              </a:lnSpc>
+              <a:t>Проект намеренно сделан не «городским»</a:t>
+            </a:r>
+            <a:endParaRPr lang="en-US" sz="3000" dirty="0"/>
+          </a:p>
+        </p:txBody>
+      </p:sp>
+      <p:sp>
+        <p:nvSpPr>
+          <p:cNvPr id="4" name="Text 2"/>
+          <p:cNvSpPr txBox="1"/>
+          <p:nvPr/>
+        </p:nvSpPr>
+        <p:spPr>
+          <a:xfrm>
+            <a:off x="640080" y="1627632"/>
+            <a:ext cx="9144000" cy="320040"/>
+          </a:xfrm>
+          <a:prstGeom prst="rect">
+            <a:avLst/>
+          </a:prstGeom>
+          <a:noFill/>
+          <a:ln/>
+        </p:spPr>
+        <p:txBody>
+          <a:bodyPr wrap="square" lIns="0" tIns="0" rIns="0" bIns="0" rtlCol="0" anchor="ctr"/>
+          <a:lstStyle/>
+          <a:p>
+            <a:pPr indent="0" marL="0">
               <a:buNone/>
             </a:pPr>
             <a:r>
               <a:rPr lang="en-US" sz="1300" dirty="0">
                 <a:solidFill>
-                  <a:srgbClr val="15201A"/>
-                </a:solidFill>
-                <a:latin typeface="Calibri" pitchFamily="34" charset="0"/>
-                <a:ea typeface="Calibri" pitchFamily="34" charset="-122"/>
-                <a:cs typeface="Calibri" pitchFamily="34" charset="-120"/>
-              </a:rPr>
-              <a:t>Старица — место, куда в сезон приезжают на отдых. Обустроенная площадка позволяет селу впервые предложить гостю не просто берег, а программу.</a:t>
+                  <a:srgbClr val="A8B6AB"/>
+                </a:solidFill>
+                <a:latin typeface="Calibri" pitchFamily="34" charset="0"/>
+                <a:ea typeface="Calibri" pitchFamily="34" charset="-122"/>
+                <a:cs typeface="Calibri" pitchFamily="34" charset="-120"/>
+              </a:rPr>
+              <a:t>Ни пластиковых скамей, ни типового павильона: каждое решение отсылает к тому, как в селе празднуют до сих пор.</a:t>
             </a:r>
             <a:endParaRPr lang="en-US" sz="1300" dirty="0"/>
           </a:p>
@@ -2803,14 +2866,34 @@
       </p:sp>
       <p:sp>
         <p:nvSpPr>
-          <p:cNvPr id="6" name="Shape 3"/>
+          <p:cNvPr id="5" name="Shape 3"/>
           <p:cNvSpPr/>
           <p:nvPr/>
         </p:nvSpPr>
         <p:spPr>
           <a:xfrm>
-            <a:off x="685800" y="5440680"/>
-            <a:ext cx="128016" cy="128016"/>
+            <a:off x="640080" y="2286000"/>
+            <a:ext cx="5257800" cy="1600200"/>
+          </a:xfrm>
+          <a:prstGeom prst="rect">
+            <a:avLst/>
+          </a:prstGeom>
+          <a:solidFill>
+            <a:srgbClr val="1F2C25"/>
+          </a:solidFill>
+          <a:ln/>
+        </p:spPr>
+      </p:sp>
+      <p:sp>
+        <p:nvSpPr>
+          <p:cNvPr id="6" name="Shape 4"/>
+          <p:cNvSpPr/>
+          <p:nvPr/>
+        </p:nvSpPr>
+        <p:spPr>
+          <a:xfrm>
+            <a:off x="932688" y="2560320"/>
+            <a:ext cx="402336" cy="402336"/>
           </a:xfrm>
           <a:prstGeom prst="ellipse">
             <a:avLst/>
@@ -2823,53 +2906,154 @@
       </p:sp>
       <p:sp>
         <p:nvSpPr>
-          <p:cNvPr id="7" name="Text 4"/>
-          <p:cNvSpPr txBox="1"/>
-          <p:nvPr/>
-        </p:nvSpPr>
-        <p:spPr>
-          <a:xfrm>
-            <a:off x="960120" y="5349240"/>
-            <a:ext cx="5852160" cy="310896"/>
-          </a:xfrm>
-          <a:prstGeom prst="rect">
-            <a:avLst/>
-          </a:prstGeom>
-          <a:noFill/>
-          <a:ln/>
-        </p:spPr>
-        <p:txBody>
-          <a:bodyPr wrap="square" lIns="0" tIns="0" rIns="0" bIns="0" rtlCol="0" anchor="ctr"/>
-          <a:lstStyle/>
-          <a:p>
-            <a:pPr indent="0" marL="0">
-              <a:buNone/>
-            </a:pPr>
-            <a:r>
-              <a:rPr lang="en-US" sz="1150" dirty="0">
-                <a:solidFill>
-                  <a:srgbClr val="15201A"/>
-                </a:solidFill>
-                <a:latin typeface="Calibri" pitchFamily="34" charset="0"/>
-                <a:ea typeface="Calibri" pitchFamily="34" charset="-122"/>
-                <a:cs typeface="Calibri" pitchFamily="34" charset="-120"/>
-              </a:rPr>
-              <a:t>Вечорка с «Сибирской песней» и «Жихаркой»</a:t>
-            </a:r>
-            <a:endParaRPr lang="en-US" sz="1150" dirty="0"/>
-          </a:p>
-        </p:txBody>
-      </p:sp>
-      <p:sp>
-        <p:nvSpPr>
-          <p:cNvPr id="8" name="Shape 5"/>
+          <p:cNvPr id="7" name="Text 5"/>
+          <p:cNvSpPr txBox="1"/>
+          <p:nvPr/>
+        </p:nvSpPr>
+        <p:spPr>
+          <a:xfrm>
+            <a:off x="932688" y="2560320"/>
+            <a:ext cx="402336" cy="402336"/>
+          </a:xfrm>
+          <a:prstGeom prst="rect">
+            <a:avLst/>
+          </a:prstGeom>
+          <a:noFill/>
+          <a:ln/>
+        </p:spPr>
+        <p:txBody>
+          <a:bodyPr wrap="square" lIns="0" tIns="0" rIns="0" bIns="0" rtlCol="0" anchor="ctr"/>
+          <a:lstStyle/>
+          <a:p>
+            <a:pPr algn="ctr" indent="0" marL="0">
+              <a:buNone/>
+            </a:pPr>
+            <a:r>
+              <a:rPr lang="en-US" sz="1100" b="1" dirty="0">
+                <a:solidFill>
+                  <a:srgbClr val="FFFFFF"/>
+                </a:solidFill>
+                <a:latin typeface="Calibri" pitchFamily="34" charset="0"/>
+                <a:ea typeface="Calibri" pitchFamily="34" charset="-122"/>
+                <a:cs typeface="Calibri" pitchFamily="34" charset="-120"/>
+              </a:rPr>
+              <a:t>1</a:t>
+            </a:r>
+            <a:endParaRPr lang="en-US" sz="1100" dirty="0"/>
+          </a:p>
+        </p:txBody>
+      </p:sp>
+      <p:sp>
+        <p:nvSpPr>
+          <p:cNvPr id="8" name="Text 6"/>
+          <p:cNvSpPr txBox="1"/>
+          <p:nvPr/>
+        </p:nvSpPr>
+        <p:spPr>
+          <a:xfrm>
+            <a:off x="1508760" y="2578608"/>
+            <a:ext cx="4114800" cy="274320"/>
+          </a:xfrm>
+          <a:prstGeom prst="rect">
+            <a:avLst/>
+          </a:prstGeom>
+          <a:noFill/>
+          <a:ln/>
+        </p:spPr>
+        <p:txBody>
+          <a:bodyPr wrap="square" lIns="0" tIns="0" rIns="0" bIns="0" rtlCol="0" anchor="ctr"/>
+          <a:lstStyle/>
+          <a:p>
+            <a:pPr indent="0" marL="0">
+              <a:buNone/>
+            </a:pPr>
+            <a:r>
+              <a:rPr lang="en-US" sz="1600" b="1" dirty="0">
+                <a:solidFill>
+                  <a:srgbClr val="F4A56B"/>
+                </a:solidFill>
+                <a:latin typeface="Cambria" pitchFamily="34" charset="0"/>
+                <a:ea typeface="Cambria" pitchFamily="34" charset="-122"/>
+                <a:cs typeface="Cambria" pitchFamily="34" charset="-120"/>
+              </a:rPr>
+              <a:t>Любинские вечорки</a:t>
+            </a:r>
+            <a:endParaRPr lang="en-US" sz="1600" dirty="0"/>
+          </a:p>
+        </p:txBody>
+      </p:sp>
+      <p:sp>
+        <p:nvSpPr>
+          <p:cNvPr id="9" name="Text 7"/>
+          <p:cNvSpPr txBox="1"/>
+          <p:nvPr/>
+        </p:nvSpPr>
+        <p:spPr>
+          <a:xfrm>
+            <a:off x="1508760" y="2944368"/>
+            <a:ext cx="4114800" cy="822960"/>
+          </a:xfrm>
+          <a:prstGeom prst="rect">
+            <a:avLst/>
+          </a:prstGeom>
+          <a:noFill/>
+          <a:ln/>
+        </p:spPr>
+        <p:txBody>
+          <a:bodyPr wrap="square" lIns="0" tIns="0" rIns="0" bIns="0" rtlCol="0" anchor="ctr"/>
+          <a:lstStyle/>
+          <a:p>
+            <a:pPr indent="0" marL="0">
+              <a:lnSpc>
+                <a:spcPts val="1400"/>
+              </a:lnSpc>
+              <a:buNone/>
+            </a:pPr>
+            <a:r>
+              <a:rPr lang="en-US" sz="1050" dirty="0">
+                <a:solidFill>
+                  <a:srgbClr val="C8D3C9"/>
+                </a:solidFill>
+                <a:latin typeface="Calibri" pitchFamily="34" charset="0"/>
+                <a:ea typeface="Calibri" pitchFamily="34" charset="-122"/>
+                <a:cs typeface="Calibri" pitchFamily="34" charset="-120"/>
+              </a:rPr>
+              <a:t>Главное, ради чего затевается площадка. Молодёжные посиделки с песнями, играми и плясками планируем возродить — для них нужно ровное открытое место, где круг собирается и расходится.</a:t>
+            </a:r>
+            <a:endParaRPr lang="en-US" sz="1050" dirty="0"/>
+          </a:p>
+        </p:txBody>
+      </p:sp>
+      <p:sp>
+        <p:nvSpPr>
+          <p:cNvPr id="10" name="Shape 8"/>
           <p:cNvSpPr/>
           <p:nvPr/>
         </p:nvSpPr>
         <p:spPr>
           <a:xfrm>
-            <a:off x="685800" y="5843016"/>
-            <a:ext cx="128016" cy="128016"/>
+            <a:off x="6263640" y="2286000"/>
+            <a:ext cx="5257800" cy="1600200"/>
+          </a:xfrm>
+          <a:prstGeom prst="rect">
+            <a:avLst/>
+          </a:prstGeom>
+          <a:solidFill>
+            <a:srgbClr val="1F2C25"/>
+          </a:solidFill>
+          <a:ln/>
+        </p:spPr>
+      </p:sp>
+      <p:sp>
+        <p:nvSpPr>
+          <p:cNvPr id="11" name="Shape 9"/>
+          <p:cNvSpPr/>
+          <p:nvPr/>
+        </p:nvSpPr>
+        <p:spPr>
+          <a:xfrm>
+            <a:off x="6556248" y="2560320"/>
+            <a:ext cx="402336" cy="402336"/>
           </a:xfrm>
           <a:prstGeom prst="ellipse">
             <a:avLst/>
@@ -2882,53 +3066,154 @@
       </p:sp>
       <p:sp>
         <p:nvSpPr>
-          <p:cNvPr id="9" name="Text 6"/>
-          <p:cNvSpPr txBox="1"/>
-          <p:nvPr/>
-        </p:nvSpPr>
-        <p:spPr>
-          <a:xfrm>
-            <a:off x="960120" y="5751576"/>
-            <a:ext cx="5852160" cy="310896"/>
-          </a:xfrm>
-          <a:prstGeom prst="rect">
-            <a:avLst/>
-          </a:prstGeom>
-          <a:noFill/>
-          <a:ln/>
-        </p:spPr>
-        <p:txBody>
-          <a:bodyPr wrap="square" lIns="0" tIns="0" rIns="0" bIns="0" rtlCol="0" anchor="ctr"/>
-          <a:lstStyle/>
-          <a:p>
-            <a:pPr indent="0" marL="0">
-              <a:buNone/>
-            </a:pPr>
-            <a:r>
-              <a:rPr lang="en-US" sz="1150" dirty="0">
-                <a:solidFill>
-                  <a:srgbClr val="15201A"/>
-                </a:solidFill>
-                <a:latin typeface="Calibri" pitchFamily="34" charset="0"/>
-                <a:ea typeface="Calibri" pitchFamily="34" charset="-122"/>
-                <a:cs typeface="Calibri" pitchFamily="34" charset="-120"/>
-              </a:rPr>
-              <a:t>Фольклорный концерт на эстраде у воды</a:t>
-            </a:r>
-            <a:endParaRPr lang="en-US" sz="1150" dirty="0"/>
-          </a:p>
-        </p:txBody>
-      </p:sp>
-      <p:sp>
-        <p:nvSpPr>
-          <p:cNvPr id="10" name="Shape 7"/>
+          <p:cNvPr id="12" name="Text 10"/>
+          <p:cNvSpPr txBox="1"/>
+          <p:nvPr/>
+        </p:nvSpPr>
+        <p:spPr>
+          <a:xfrm>
+            <a:off x="6556248" y="2560320"/>
+            <a:ext cx="402336" cy="402336"/>
+          </a:xfrm>
+          <a:prstGeom prst="rect">
+            <a:avLst/>
+          </a:prstGeom>
+          <a:noFill/>
+          <a:ln/>
+        </p:spPr>
+        <p:txBody>
+          <a:bodyPr wrap="square" lIns="0" tIns="0" rIns="0" bIns="0" rtlCol="0" anchor="ctr"/>
+          <a:lstStyle/>
+          <a:p>
+            <a:pPr algn="ctr" indent="0" marL="0">
+              <a:buNone/>
+            </a:pPr>
+            <a:r>
+              <a:rPr lang="en-US" sz="1100" b="1" dirty="0">
+                <a:solidFill>
+                  <a:srgbClr val="FFFFFF"/>
+                </a:solidFill>
+                <a:latin typeface="Calibri" pitchFamily="34" charset="0"/>
+                <a:ea typeface="Calibri" pitchFamily="34" charset="-122"/>
+                <a:cs typeface="Calibri" pitchFamily="34" charset="-120"/>
+              </a:rPr>
+              <a:t>2</a:t>
+            </a:r>
+            <a:endParaRPr lang="en-US" sz="1100" dirty="0"/>
+          </a:p>
+        </p:txBody>
+      </p:sp>
+      <p:sp>
+        <p:nvSpPr>
+          <p:cNvPr id="13" name="Text 11"/>
+          <p:cNvSpPr txBox="1"/>
+          <p:nvPr/>
+        </p:nvSpPr>
+        <p:spPr>
+          <a:xfrm>
+            <a:off x="7132320" y="2578608"/>
+            <a:ext cx="4114800" cy="274320"/>
+          </a:xfrm>
+          <a:prstGeom prst="rect">
+            <a:avLst/>
+          </a:prstGeom>
+          <a:noFill/>
+          <a:ln/>
+        </p:spPr>
+        <p:txBody>
+          <a:bodyPr wrap="square" lIns="0" tIns="0" rIns="0" bIns="0" rtlCol="0" anchor="ctr"/>
+          <a:lstStyle/>
+          <a:p>
+            <a:pPr indent="0" marL="0">
+              <a:buNone/>
+            </a:pPr>
+            <a:r>
+              <a:rPr lang="en-US" sz="1600" b="1" dirty="0">
+                <a:solidFill>
+                  <a:srgbClr val="F4A56B"/>
+                </a:solidFill>
+                <a:latin typeface="Cambria" pitchFamily="34" charset="0"/>
+                <a:ea typeface="Cambria" pitchFamily="34" charset="-122"/>
+                <a:cs typeface="Cambria" pitchFamily="34" charset="-120"/>
+              </a:rPr>
+              <a:t>Традиционные хороводы</a:t>
+            </a:r>
+            <a:endParaRPr lang="en-US" sz="1600" dirty="0"/>
+          </a:p>
+        </p:txBody>
+      </p:sp>
+      <p:sp>
+        <p:nvSpPr>
+          <p:cNvPr id="14" name="Text 12"/>
+          <p:cNvSpPr txBox="1"/>
+          <p:nvPr/>
+        </p:nvSpPr>
+        <p:spPr>
+          <a:xfrm>
+            <a:off x="7132320" y="2944368"/>
+            <a:ext cx="4114800" cy="822960"/>
+          </a:xfrm>
+          <a:prstGeom prst="rect">
+            <a:avLst/>
+          </a:prstGeom>
+          <a:noFill/>
+          <a:ln/>
+        </p:spPr>
+        <p:txBody>
+          <a:bodyPr wrap="square" lIns="0" tIns="0" rIns="0" bIns="0" rtlCol="0" anchor="ctr"/>
+          <a:lstStyle/>
+          <a:p>
+            <a:pPr indent="0" marL="0">
+              <a:lnSpc>
+                <a:spcPts val="1400"/>
+              </a:lnSpc>
+              <a:buNone/>
+            </a:pPr>
+            <a:r>
+              <a:rPr lang="en-US" sz="1050" dirty="0">
+                <a:solidFill>
+                  <a:srgbClr val="C8D3C9"/>
+                </a:solidFill>
+                <a:latin typeface="Calibri" pitchFamily="34" charset="0"/>
+                <a:ea typeface="Calibri" pitchFamily="34" charset="-122"/>
+                <a:cs typeface="Calibri" pitchFamily="34" charset="-120"/>
+              </a:rPr>
+              <a:t>Хоровод требует свободного круга, а не рядов. Именно поэтому полянка остаётся ровной и без скамеек — это не экономия, а функция.</a:t>
+            </a:r>
+            <a:endParaRPr lang="en-US" sz="1050" dirty="0"/>
+          </a:p>
+        </p:txBody>
+      </p:sp>
+      <p:sp>
+        <p:nvSpPr>
+          <p:cNvPr id="15" name="Shape 13"/>
           <p:cNvSpPr/>
           <p:nvPr/>
         </p:nvSpPr>
         <p:spPr>
           <a:xfrm>
-            <a:off x="685800" y="6245352"/>
-            <a:ext cx="128016" cy="128016"/>
+            <a:off x="640080" y="4114800"/>
+            <a:ext cx="5257800" cy="1600200"/>
+          </a:xfrm>
+          <a:prstGeom prst="rect">
+            <a:avLst/>
+          </a:prstGeom>
+          <a:solidFill>
+            <a:srgbClr val="1F2C25"/>
+          </a:solidFill>
+          <a:ln/>
+        </p:spPr>
+      </p:sp>
+      <p:sp>
+        <p:nvSpPr>
+          <p:cNvPr id="16" name="Shape 14"/>
+          <p:cNvSpPr/>
+          <p:nvPr/>
+        </p:nvSpPr>
+        <p:spPr>
+          <a:xfrm>
+            <a:off x="932688" y="4389120"/>
+            <a:ext cx="402336" cy="402336"/>
           </a:xfrm>
           <a:prstGeom prst="ellipse">
             <a:avLst/>
@@ -2941,112 +3226,294 @@
       </p:sp>
       <p:sp>
         <p:nvSpPr>
-          <p:cNvPr id="11" name="Text 8"/>
-          <p:cNvSpPr txBox="1"/>
-          <p:nvPr/>
-        </p:nvSpPr>
-        <p:spPr>
-          <a:xfrm>
-            <a:off x="960120" y="6153912"/>
-            <a:ext cx="5852160" cy="310896"/>
-          </a:xfrm>
-          <a:prstGeom prst="rect">
-            <a:avLst/>
-          </a:prstGeom>
-          <a:noFill/>
-          <a:ln/>
-        </p:spPr>
-        <p:txBody>
-          <a:bodyPr wrap="square" lIns="0" tIns="0" rIns="0" bIns="0" rtlCol="0" anchor="ctr"/>
-          <a:lstStyle/>
-          <a:p>
-            <a:pPr indent="0" marL="0">
-              <a:buNone/>
-            </a:pPr>
-            <a:r>
-              <a:rPr lang="en-US" sz="1150" dirty="0">
-                <a:solidFill>
-                  <a:srgbClr val="15201A"/>
-                </a:solidFill>
-                <a:latin typeface="Calibri" pitchFamily="34" charset="0"/>
-                <a:ea typeface="Calibri" pitchFamily="34" charset="-122"/>
-                <a:cs typeface="Calibri" pitchFamily="34" charset="-120"/>
-              </a:rPr>
-              <a:t>Деревенский праздник в назначенный день</a:t>
-            </a:r>
-            <a:endParaRPr lang="en-US" sz="1150" dirty="0"/>
-          </a:p>
-        </p:txBody>
-      </p:sp>
-      <p:sp>
-        <p:nvSpPr>
-          <p:cNvPr id="12" name="Shape 9"/>
+          <p:cNvPr id="17" name="Text 15"/>
+          <p:cNvSpPr txBox="1"/>
+          <p:nvPr/>
+        </p:nvSpPr>
+        <p:spPr>
+          <a:xfrm>
+            <a:off x="932688" y="4389120"/>
+            <a:ext cx="402336" cy="402336"/>
+          </a:xfrm>
+          <a:prstGeom prst="rect">
+            <a:avLst/>
+          </a:prstGeom>
+          <a:noFill/>
+          <a:ln/>
+        </p:spPr>
+        <p:txBody>
+          <a:bodyPr wrap="square" lIns="0" tIns="0" rIns="0" bIns="0" rtlCol="0" anchor="ctr"/>
+          <a:lstStyle/>
+          <a:p>
+            <a:pPr algn="ctr" indent="0" marL="0">
+              <a:buNone/>
+            </a:pPr>
+            <a:r>
+              <a:rPr lang="en-US" sz="1100" b="1" dirty="0">
+                <a:solidFill>
+                  <a:srgbClr val="FFFFFF"/>
+                </a:solidFill>
+                <a:latin typeface="Calibri" pitchFamily="34" charset="0"/>
+                <a:ea typeface="Calibri" pitchFamily="34" charset="-122"/>
+                <a:cs typeface="Calibri" pitchFamily="34" charset="-120"/>
+              </a:rPr>
+              <a:t>3</a:t>
+            </a:r>
+            <a:endParaRPr lang="en-US" sz="1100" dirty="0"/>
+          </a:p>
+        </p:txBody>
+      </p:sp>
+      <p:sp>
+        <p:nvSpPr>
+          <p:cNvPr id="18" name="Text 16"/>
+          <p:cNvSpPr txBox="1"/>
+          <p:nvPr/>
+        </p:nvSpPr>
+        <p:spPr>
+          <a:xfrm>
+            <a:off x="1508760" y="4407408"/>
+            <a:ext cx="4114800" cy="274320"/>
+          </a:xfrm>
+          <a:prstGeom prst="rect">
+            <a:avLst/>
+          </a:prstGeom>
+          <a:noFill/>
+          <a:ln/>
+        </p:spPr>
+        <p:txBody>
+          <a:bodyPr wrap="square" lIns="0" tIns="0" rIns="0" bIns="0" rtlCol="0" anchor="ctr"/>
+          <a:lstStyle/>
+          <a:p>
+            <a:pPr indent="0" marL="0">
+              <a:buNone/>
+            </a:pPr>
+            <a:r>
+              <a:rPr lang="en-US" sz="1600" b="1" dirty="0">
+                <a:solidFill>
+                  <a:srgbClr val="F4A56B"/>
+                </a:solidFill>
+                <a:latin typeface="Cambria" pitchFamily="34" charset="0"/>
+                <a:ea typeface="Cambria" pitchFamily="34" charset="-122"/>
+                <a:cs typeface="Cambria" pitchFamily="34" charset="-120"/>
+              </a:rPr>
+              <a:t>Тканые половики</a:t>
+            </a:r>
+            <a:endParaRPr lang="en-US" sz="1600" dirty="0"/>
+          </a:p>
+        </p:txBody>
+      </p:sp>
+      <p:sp>
+        <p:nvSpPr>
+          <p:cNvPr id="19" name="Text 17"/>
+          <p:cNvSpPr txBox="1"/>
+          <p:nvPr/>
+        </p:nvSpPr>
+        <p:spPr>
+          <a:xfrm>
+            <a:off x="1508760" y="4773168"/>
+            <a:ext cx="4114800" cy="822960"/>
+          </a:xfrm>
+          <a:prstGeom prst="rect">
+            <a:avLst/>
+          </a:prstGeom>
+          <a:noFill/>
+          <a:ln/>
+        </p:spPr>
+        <p:txBody>
+          <a:bodyPr wrap="square" lIns="0" tIns="0" rIns="0" bIns="0" rtlCol="0" anchor="ctr"/>
+          <a:lstStyle/>
+          <a:p>
+            <a:pPr indent="0" marL="0">
+              <a:lnSpc>
+                <a:spcPts val="1400"/>
+              </a:lnSpc>
+              <a:buNone/>
+            </a:pPr>
+            <a:r>
+              <a:rPr lang="en-US" sz="1050" dirty="0">
+                <a:solidFill>
+                  <a:srgbClr val="C8D3C9"/>
+                </a:solidFill>
+                <a:latin typeface="Calibri" pitchFamily="34" charset="0"/>
+                <a:ea typeface="Calibri" pitchFamily="34" charset="-122"/>
+                <a:cs typeface="Calibri" pitchFamily="34" charset="-120"/>
+              </a:rPr>
+              <a:t>Домотканые дорожки есть в каждом доме, и на гуляньях их расстилали испокон веку. Полянка спроектирована под половики: это принятая в проекте норма, а не декоративная отсылка.</a:t>
+            </a:r>
+            <a:endParaRPr lang="en-US" sz="1050" dirty="0"/>
+          </a:p>
+        </p:txBody>
+      </p:sp>
+      <p:sp>
+        <p:nvSpPr>
+          <p:cNvPr id="20" name="Shape 18"/>
           <p:cNvSpPr/>
           <p:nvPr/>
         </p:nvSpPr>
         <p:spPr>
           <a:xfrm>
-            <a:off x="7589520" y="3840480"/>
-            <a:ext cx="3977640" cy="2331720"/>
+            <a:off x="6263640" y="4114800"/>
+            <a:ext cx="5257800" cy="1600200"/>
           </a:xfrm>
           <a:prstGeom prst="rect">
             <a:avLst/>
           </a:prstGeom>
           <a:solidFill>
-            <a:srgbClr val="E8DFC8"/>
+            <a:srgbClr val="1F2C25"/>
           </a:solidFill>
           <a:ln/>
         </p:spPr>
       </p:sp>
       <p:sp>
         <p:nvSpPr>
-          <p:cNvPr id="13" name="Text 10"/>
-          <p:cNvSpPr txBox="1"/>
-          <p:nvPr/>
-        </p:nvSpPr>
-        <p:spPr>
-          <a:xfrm>
-            <a:off x="7863840" y="4041648"/>
-            <a:ext cx="3474720" cy="256032"/>
-          </a:xfrm>
-          <a:prstGeom prst="rect">
-            <a:avLst/>
-          </a:prstGeom>
-          <a:noFill/>
-          <a:ln/>
-        </p:spPr>
-        <p:txBody>
-          <a:bodyPr wrap="square" lIns="0" tIns="0" rIns="0" bIns="0" rtlCol="0" anchor="ctr"/>
-          <a:lstStyle/>
-          <a:p>
-            <a:pPr indent="0" marL="0">
-              <a:buNone/>
-            </a:pPr>
-            <a:r>
-              <a:rPr lang="en-US" sz="1000" b="1" spc="140" kern="0" dirty="0">
-                <a:solidFill>
-                  <a:srgbClr val="D65E10"/>
-                </a:solidFill>
-                <a:latin typeface="Calibri" pitchFamily="34" charset="0"/>
-                <a:ea typeface="Calibri" pitchFamily="34" charset="-122"/>
-                <a:cs typeface="Calibri" pitchFamily="34" charset="-120"/>
-              </a:rPr>
-              <a:t>Что это меняет</a:t>
-            </a:r>
-            <a:endParaRPr lang="en-US" sz="1000" dirty="0"/>
-          </a:p>
-        </p:txBody>
-      </p:sp>
-      <p:sp>
-        <p:nvSpPr>
-          <p:cNvPr id="14" name="Text 11"/>
-          <p:cNvSpPr txBox="1"/>
-          <p:nvPr/>
-        </p:nvSpPr>
-        <p:spPr>
-          <a:xfrm>
-            <a:off x="7863840" y="4370832"/>
-            <a:ext cx="3474720" cy="1645920"/>
+          <p:cNvPr id="21" name="Shape 19"/>
+          <p:cNvSpPr/>
+          <p:nvPr/>
+        </p:nvSpPr>
+        <p:spPr>
+          <a:xfrm>
+            <a:off x="6556248" y="4389120"/>
+            <a:ext cx="402336" cy="402336"/>
+          </a:xfrm>
+          <a:prstGeom prst="ellipse">
+            <a:avLst/>
+          </a:prstGeom>
+          <a:solidFill>
+            <a:srgbClr val="D65E10"/>
+          </a:solidFill>
+          <a:ln/>
+        </p:spPr>
+      </p:sp>
+      <p:sp>
+        <p:nvSpPr>
+          <p:cNvPr id="22" name="Text 20"/>
+          <p:cNvSpPr txBox="1"/>
+          <p:nvPr/>
+        </p:nvSpPr>
+        <p:spPr>
+          <a:xfrm>
+            <a:off x="6556248" y="4389120"/>
+            <a:ext cx="402336" cy="402336"/>
+          </a:xfrm>
+          <a:prstGeom prst="rect">
+            <a:avLst/>
+          </a:prstGeom>
+          <a:noFill/>
+          <a:ln/>
+        </p:spPr>
+        <p:txBody>
+          <a:bodyPr wrap="square" lIns="0" tIns="0" rIns="0" bIns="0" rtlCol="0" anchor="ctr"/>
+          <a:lstStyle/>
+          <a:p>
+            <a:pPr algn="ctr" indent="0" marL="0">
+              <a:buNone/>
+            </a:pPr>
+            <a:r>
+              <a:rPr lang="en-US" sz="1100" b="1" dirty="0">
+                <a:solidFill>
+                  <a:srgbClr val="FFFFFF"/>
+                </a:solidFill>
+                <a:latin typeface="Calibri" pitchFamily="34" charset="0"/>
+                <a:ea typeface="Calibri" pitchFamily="34" charset="-122"/>
+                <a:cs typeface="Calibri" pitchFamily="34" charset="-120"/>
+              </a:rPr>
+              <a:t>4</a:t>
+            </a:r>
+            <a:endParaRPr lang="en-US" sz="1100" dirty="0"/>
+          </a:p>
+        </p:txBody>
+      </p:sp>
+      <p:sp>
+        <p:nvSpPr>
+          <p:cNvPr id="23" name="Text 21"/>
+          <p:cNvSpPr txBox="1"/>
+          <p:nvPr/>
+        </p:nvSpPr>
+        <p:spPr>
+          <a:xfrm>
+            <a:off x="7132320" y="4407408"/>
+            <a:ext cx="4114800" cy="274320"/>
+          </a:xfrm>
+          <a:prstGeom prst="rect">
+            <a:avLst/>
+          </a:prstGeom>
+          <a:noFill/>
+          <a:ln/>
+        </p:spPr>
+        <p:txBody>
+          <a:bodyPr wrap="square" lIns="0" tIns="0" rIns="0" bIns="0" rtlCol="0" anchor="ctr"/>
+          <a:lstStyle/>
+          <a:p>
+            <a:pPr indent="0" marL="0">
+              <a:buNone/>
+            </a:pPr>
+            <a:r>
+              <a:rPr lang="en-US" sz="1600" b="1" dirty="0">
+                <a:solidFill>
+                  <a:srgbClr val="F4A56B"/>
+                </a:solidFill>
+                <a:latin typeface="Cambria" pitchFamily="34" charset="0"/>
+                <a:ea typeface="Cambria" pitchFamily="34" charset="-122"/>
+                <a:cs typeface="Cambria" pitchFamily="34" charset="-120"/>
+              </a:rPr>
+              <a:t>Клуб и библиотека вместе</a:t>
+            </a:r>
+            <a:endParaRPr lang="en-US" sz="1600" dirty="0"/>
+          </a:p>
+        </p:txBody>
+      </p:sp>
+      <p:sp>
+        <p:nvSpPr>
+          <p:cNvPr id="24" name="Text 22"/>
+          <p:cNvSpPr txBox="1"/>
+          <p:nvPr/>
+        </p:nvSpPr>
+        <p:spPr>
+          <a:xfrm>
+            <a:off x="7132320" y="4773168"/>
+            <a:ext cx="4114800" cy="822960"/>
+          </a:xfrm>
+          <a:prstGeom prst="rect">
+            <a:avLst/>
+          </a:prstGeom>
+          <a:noFill/>
+          <a:ln/>
+        </p:spPr>
+        <p:txBody>
+          <a:bodyPr wrap="square" lIns="0" tIns="0" rIns="0" bIns="0" rtlCol="0" anchor="ctr"/>
+          <a:lstStyle/>
+          <a:p>
+            <a:pPr indent="0" marL="0">
+              <a:lnSpc>
+                <a:spcPts val="1400"/>
+              </a:lnSpc>
+              <a:buNone/>
+            </a:pPr>
+            <a:r>
+              <a:rPr lang="en-US" sz="1050" dirty="0">
+                <a:solidFill>
+                  <a:srgbClr val="C8D3C9"/>
+                </a:solidFill>
+                <a:latin typeface="Calibri" pitchFamily="34" charset="0"/>
+                <a:ea typeface="Calibri" pitchFamily="34" charset="-122"/>
+                <a:cs typeface="Calibri" pitchFamily="34" charset="-120"/>
+              </a:rPr>
+              <a:t>Две таблички на фасаде обозначают то, что у нас сохранилось и чего во многих сёлах уже нет: работающий очаг культуры с книгой.</a:t>
+            </a:r>
+            <a:endParaRPr lang="en-US" sz="1050" dirty="0"/>
+          </a:p>
+        </p:txBody>
+      </p:sp>
+      <p:sp>
+        <p:nvSpPr>
+          <p:cNvPr id="25" name="Text 23"/>
+          <p:cNvSpPr txBox="1"/>
+          <p:nvPr/>
+        </p:nvSpPr>
+        <p:spPr>
+          <a:xfrm>
+            <a:off x="640080" y="6035040"/>
+            <a:ext cx="10881360" cy="548640"/>
           </a:xfrm>
           <a:prstGeom prst="rect">
             <a:avLst/>
@@ -3065,17 +3532,17 @@
               <a:buNone/>
             </a:pPr>
             <a:r>
-              <a:rPr lang="en-US" sz="1150" dirty="0">
-                <a:solidFill>
-                  <a:srgbClr val="15201A"/>
-                </a:solidFill>
-                <a:latin typeface="Calibri" pitchFamily="34" charset="0"/>
-                <a:ea typeface="Calibri" pitchFamily="34" charset="-122"/>
-                <a:cs typeface="Calibri" pitchFamily="34" charset="-120"/>
-              </a:rPr>
-              <a:t>Площадка работает не только на жителей, но и на узнаваемость Любино-Малоросс за пределами района — и создаёт основание для дальнейших проектов: сельский туризм, ярмарка, сувенирное ремесло.</a:t>
-            </a:r>
-            <a:endParaRPr lang="en-US" sz="1150" dirty="0"/>
+              <a:rPr lang="en-US" sz="1200" i="1" dirty="0">
+                <a:solidFill>
+                  <a:srgbClr val="FFFFFF"/>
+                </a:solidFill>
+                <a:latin typeface="Calibri" pitchFamily="34" charset="0"/>
+                <a:ea typeface="Calibri" pitchFamily="34" charset="-122"/>
+                <a:cs typeface="Calibri" pitchFamily="34" charset="-120"/>
+              </a:rPr>
+              <a:t>Культурный код не восстанавливается лекциями. Он держится на том, что люди делают вместе и регулярно: водят хоровод, садятся на половики, поют, приводят детей на ту же поляну, где водили их самих.</a:t>
+            </a:r>
+            <a:endParaRPr lang="en-US" sz="1200" dirty="0"/>
           </a:p>
         </p:txBody>
       </p:sp>
@@ -3111,16 +3578,39 @@
           <a:chExt cx="0" cy="0"/>
         </a:xfrm>
       </p:grpSpPr>
-      <p:sp>
-        <p:nvSpPr>
-          <p:cNvPr id="2" name="Text 0"/>
-          <p:cNvSpPr txBox="1"/>
-          <p:nvPr/>
-        </p:nvSpPr>
-        <p:spPr>
-          <a:xfrm>
-            <a:off x="640080" y="566928"/>
-            <a:ext cx="7315200" cy="274320"/>
+      <p:pic>
+        <p:nvPicPr>
+          <p:cNvPr id="2" name="Image 0" descr="deck/scena.jpg">    </p:cNvPr>
+          <p:cNvPicPr>
+            <a:picLocks noChangeAspect="1"/>
+          </p:cNvPicPr>
+          <p:nvPr/>
+        </p:nvPicPr>
+        <p:blipFill>
+          <a:blip r:embed="rId1"/>
+          <a:srcRect l="0" r="0" t="0" b="0"/>
+          <a:stretch/>
+        </p:blipFill>
+        <p:spPr>
+          <a:xfrm>
+            <a:off x="0" y="0"/>
+            <a:ext cx="12188952" cy="3200400"/>
+          </a:xfrm>
+          <a:prstGeom prst="rect">
+            <a:avLst/>
+          </a:prstGeom>
+        </p:spPr>
+      </p:pic>
+      <p:sp>
+        <p:nvSpPr>
+          <p:cNvPr id="3" name="Text 0"/>
+          <p:cNvSpPr txBox="1"/>
+          <p:nvPr/>
+        </p:nvSpPr>
+        <p:spPr>
+          <a:xfrm>
+            <a:off x="640080" y="3520440"/>
+            <a:ext cx="5486400" cy="274320"/>
           </a:xfrm>
           <a:prstGeom prst="rect">
             <a:avLst/>
@@ -3144,7 +3634,7 @@
                 <a:ea typeface="Calibri" pitchFamily="34" charset="-122"/>
                 <a:cs typeface="Calibri" pitchFamily="34" charset="-120"/>
               </a:rPr>
-              <a:t>ДЕФЕКТНАЯ ВЕДОМОСТЬ</a:t>
+              <a:t>РАЗВИТИЕ</a:t>
             </a:r>
             <a:endParaRPr lang="en-US" sz="1000" dirty="0"/>
           </a:p>
@@ -3152,30 +3642,30 @@
       </p:sp>
       <p:sp>
         <p:nvSpPr>
-          <p:cNvPr id="3" name="Text 1"/>
-          <p:cNvSpPr txBox="1"/>
-          <p:nvPr/>
-        </p:nvSpPr>
-        <p:spPr>
-          <a:xfrm>
-            <a:off x="640080" y="914400"/>
-            <a:ext cx="8686800" cy="548640"/>
-          </a:xfrm>
-          <a:prstGeom prst="rect">
-            <a:avLst/>
-          </a:prstGeom>
-          <a:noFill/>
-          <a:ln/>
-        </p:spPr>
-        <p:txBody>
-          <a:bodyPr wrap="square" lIns="0" tIns="0" rIns="0" bIns="0" rtlCol="0" anchor="ctr"/>
-          <a:lstStyle/>
-          <a:p>
-            <a:pPr indent="0" marL="0">
-              <a:buNone/>
-            </a:pPr>
-            <a:r>
-              <a:rPr lang="en-US" sz="3200" b="1" dirty="0">
+          <p:cNvPr id="4" name="Text 1"/>
+          <p:cNvSpPr txBox="1"/>
+          <p:nvPr/>
+        </p:nvSpPr>
+        <p:spPr>
+          <a:xfrm>
+            <a:off x="640080" y="3840480"/>
+            <a:ext cx="6675120" cy="548640"/>
+          </a:xfrm>
+          <a:prstGeom prst="rect">
+            <a:avLst/>
+          </a:prstGeom>
+          <a:noFill/>
+          <a:ln/>
+        </p:spPr>
+        <p:txBody>
+          <a:bodyPr wrap="square" lIns="0" tIns="0" rIns="0" bIns="0" rtlCol="0" anchor="ctr"/>
+          <a:lstStyle/>
+          <a:p>
+            <a:pPr indent="0" marL="0">
+              <a:buNone/>
+            </a:pPr>
+            <a:r>
+              <a:rPr lang="en-US" sz="2800" b="1" dirty="0">
                 <a:solidFill>
                   <a:srgbClr val="15201A"/>
                 </a:solidFill>
@@ -3183,7 +3673,437 @@
                 <a:ea typeface="Cambria" pitchFamily="34" charset="-122"/>
                 <a:cs typeface="Cambria" pitchFamily="34" charset="-120"/>
               </a:rPr>
-              <a:t>3 327 503 ₽ при лимите 3,5 млн</a:t>
+              <a:t>Гости села и отдыхающие</a:t>
+            </a:r>
+            <a:endParaRPr lang="en-US" sz="2800" dirty="0"/>
+          </a:p>
+        </p:txBody>
+      </p:sp>
+      <p:sp>
+        <p:nvSpPr>
+          <p:cNvPr id="5" name="Text 2"/>
+          <p:cNvSpPr txBox="1"/>
+          <p:nvPr/>
+        </p:nvSpPr>
+        <p:spPr>
+          <a:xfrm>
+            <a:off x="640080" y="4526280"/>
+            <a:ext cx="6400800" cy="731520"/>
+          </a:xfrm>
+          <a:prstGeom prst="rect">
+            <a:avLst/>
+          </a:prstGeom>
+          <a:noFill/>
+          <a:ln/>
+        </p:spPr>
+        <p:txBody>
+          <a:bodyPr wrap="square" lIns="0" tIns="0" rIns="0" bIns="0" rtlCol="0" anchor="ctr"/>
+          <a:lstStyle/>
+          <a:p>
+            <a:pPr indent="0" marL="0">
+              <a:lnSpc>
+                <a:spcPts val="1800"/>
+              </a:lnSpc>
+              <a:buNone/>
+            </a:pPr>
+            <a:r>
+              <a:rPr lang="en-US" sz="1300" dirty="0">
+                <a:solidFill>
+                  <a:srgbClr val="15201A"/>
+                </a:solidFill>
+                <a:latin typeface="Calibri" pitchFamily="34" charset="0"/>
+                <a:ea typeface="Calibri" pitchFamily="34" charset="-122"/>
+                <a:cs typeface="Calibri" pitchFamily="34" charset="-120"/>
+              </a:rPr>
+              <a:t>Старица — место, куда в сезон приезжают на отдых. Обустроенная площадка позволяет селу впервые предложить гостю не просто берег, а программу.</a:t>
+            </a:r>
+            <a:endParaRPr lang="en-US" sz="1300" dirty="0"/>
+          </a:p>
+        </p:txBody>
+      </p:sp>
+      <p:sp>
+        <p:nvSpPr>
+          <p:cNvPr id="6" name="Shape 3"/>
+          <p:cNvSpPr/>
+          <p:nvPr/>
+        </p:nvSpPr>
+        <p:spPr>
+          <a:xfrm>
+            <a:off x="685800" y="5440680"/>
+            <a:ext cx="128016" cy="128016"/>
+          </a:xfrm>
+          <a:prstGeom prst="ellipse">
+            <a:avLst/>
+          </a:prstGeom>
+          <a:solidFill>
+            <a:srgbClr val="D65E10"/>
+          </a:solidFill>
+          <a:ln/>
+        </p:spPr>
+      </p:sp>
+      <p:sp>
+        <p:nvSpPr>
+          <p:cNvPr id="7" name="Text 4"/>
+          <p:cNvSpPr txBox="1"/>
+          <p:nvPr/>
+        </p:nvSpPr>
+        <p:spPr>
+          <a:xfrm>
+            <a:off x="960120" y="5349240"/>
+            <a:ext cx="5852160" cy="310896"/>
+          </a:xfrm>
+          <a:prstGeom prst="rect">
+            <a:avLst/>
+          </a:prstGeom>
+          <a:noFill/>
+          <a:ln/>
+        </p:spPr>
+        <p:txBody>
+          <a:bodyPr wrap="square" lIns="0" tIns="0" rIns="0" bIns="0" rtlCol="0" anchor="ctr"/>
+          <a:lstStyle/>
+          <a:p>
+            <a:pPr indent="0" marL="0">
+              <a:buNone/>
+            </a:pPr>
+            <a:r>
+              <a:rPr lang="en-US" sz="1150" dirty="0">
+                <a:solidFill>
+                  <a:srgbClr val="15201A"/>
+                </a:solidFill>
+                <a:latin typeface="Calibri" pitchFamily="34" charset="0"/>
+                <a:ea typeface="Calibri" pitchFamily="34" charset="-122"/>
+                <a:cs typeface="Calibri" pitchFamily="34" charset="-120"/>
+              </a:rPr>
+              <a:t>Вечорка с «Сибирской песней» и «Жихаркой»</a:t>
+            </a:r>
+            <a:endParaRPr lang="en-US" sz="1150" dirty="0"/>
+          </a:p>
+        </p:txBody>
+      </p:sp>
+      <p:sp>
+        <p:nvSpPr>
+          <p:cNvPr id="8" name="Shape 5"/>
+          <p:cNvSpPr/>
+          <p:nvPr/>
+        </p:nvSpPr>
+        <p:spPr>
+          <a:xfrm>
+            <a:off x="685800" y="5843016"/>
+            <a:ext cx="128016" cy="128016"/>
+          </a:xfrm>
+          <a:prstGeom prst="ellipse">
+            <a:avLst/>
+          </a:prstGeom>
+          <a:solidFill>
+            <a:srgbClr val="D65E10"/>
+          </a:solidFill>
+          <a:ln/>
+        </p:spPr>
+      </p:sp>
+      <p:sp>
+        <p:nvSpPr>
+          <p:cNvPr id="9" name="Text 6"/>
+          <p:cNvSpPr txBox="1"/>
+          <p:nvPr/>
+        </p:nvSpPr>
+        <p:spPr>
+          <a:xfrm>
+            <a:off x="960120" y="5751576"/>
+            <a:ext cx="5852160" cy="310896"/>
+          </a:xfrm>
+          <a:prstGeom prst="rect">
+            <a:avLst/>
+          </a:prstGeom>
+          <a:noFill/>
+          <a:ln/>
+        </p:spPr>
+        <p:txBody>
+          <a:bodyPr wrap="square" lIns="0" tIns="0" rIns="0" bIns="0" rtlCol="0" anchor="ctr"/>
+          <a:lstStyle/>
+          <a:p>
+            <a:pPr indent="0" marL="0">
+              <a:buNone/>
+            </a:pPr>
+            <a:r>
+              <a:rPr lang="en-US" sz="1150" dirty="0">
+                <a:solidFill>
+                  <a:srgbClr val="15201A"/>
+                </a:solidFill>
+                <a:latin typeface="Calibri" pitchFamily="34" charset="0"/>
+                <a:ea typeface="Calibri" pitchFamily="34" charset="-122"/>
+                <a:cs typeface="Calibri" pitchFamily="34" charset="-120"/>
+              </a:rPr>
+              <a:t>Фольклорный концерт на эстраде у воды</a:t>
+            </a:r>
+            <a:endParaRPr lang="en-US" sz="1150" dirty="0"/>
+          </a:p>
+        </p:txBody>
+      </p:sp>
+      <p:sp>
+        <p:nvSpPr>
+          <p:cNvPr id="10" name="Shape 7"/>
+          <p:cNvSpPr/>
+          <p:nvPr/>
+        </p:nvSpPr>
+        <p:spPr>
+          <a:xfrm>
+            <a:off x="685800" y="6245352"/>
+            <a:ext cx="128016" cy="128016"/>
+          </a:xfrm>
+          <a:prstGeom prst="ellipse">
+            <a:avLst/>
+          </a:prstGeom>
+          <a:solidFill>
+            <a:srgbClr val="D65E10"/>
+          </a:solidFill>
+          <a:ln/>
+        </p:spPr>
+      </p:sp>
+      <p:sp>
+        <p:nvSpPr>
+          <p:cNvPr id="11" name="Text 8"/>
+          <p:cNvSpPr txBox="1"/>
+          <p:nvPr/>
+        </p:nvSpPr>
+        <p:spPr>
+          <a:xfrm>
+            <a:off x="960120" y="6153912"/>
+            <a:ext cx="5852160" cy="310896"/>
+          </a:xfrm>
+          <a:prstGeom prst="rect">
+            <a:avLst/>
+          </a:prstGeom>
+          <a:noFill/>
+          <a:ln/>
+        </p:spPr>
+        <p:txBody>
+          <a:bodyPr wrap="square" lIns="0" tIns="0" rIns="0" bIns="0" rtlCol="0" anchor="ctr"/>
+          <a:lstStyle/>
+          <a:p>
+            <a:pPr indent="0" marL="0">
+              <a:buNone/>
+            </a:pPr>
+            <a:r>
+              <a:rPr lang="en-US" sz="1150" dirty="0">
+                <a:solidFill>
+                  <a:srgbClr val="15201A"/>
+                </a:solidFill>
+                <a:latin typeface="Calibri" pitchFamily="34" charset="0"/>
+                <a:ea typeface="Calibri" pitchFamily="34" charset="-122"/>
+                <a:cs typeface="Calibri" pitchFamily="34" charset="-120"/>
+              </a:rPr>
+              <a:t>Деревенский праздник в назначенный день</a:t>
+            </a:r>
+            <a:endParaRPr lang="en-US" sz="1150" dirty="0"/>
+          </a:p>
+        </p:txBody>
+      </p:sp>
+      <p:sp>
+        <p:nvSpPr>
+          <p:cNvPr id="12" name="Shape 9"/>
+          <p:cNvSpPr/>
+          <p:nvPr/>
+        </p:nvSpPr>
+        <p:spPr>
+          <a:xfrm>
+            <a:off x="7589520" y="3840480"/>
+            <a:ext cx="3977640" cy="2331720"/>
+          </a:xfrm>
+          <a:prstGeom prst="rect">
+            <a:avLst/>
+          </a:prstGeom>
+          <a:solidFill>
+            <a:srgbClr val="E8DFC8"/>
+          </a:solidFill>
+          <a:ln/>
+        </p:spPr>
+      </p:sp>
+      <p:sp>
+        <p:nvSpPr>
+          <p:cNvPr id="13" name="Text 10"/>
+          <p:cNvSpPr txBox="1"/>
+          <p:nvPr/>
+        </p:nvSpPr>
+        <p:spPr>
+          <a:xfrm>
+            <a:off x="7863840" y="4041648"/>
+            <a:ext cx="3474720" cy="256032"/>
+          </a:xfrm>
+          <a:prstGeom prst="rect">
+            <a:avLst/>
+          </a:prstGeom>
+          <a:noFill/>
+          <a:ln/>
+        </p:spPr>
+        <p:txBody>
+          <a:bodyPr wrap="square" lIns="0" tIns="0" rIns="0" bIns="0" rtlCol="0" anchor="ctr"/>
+          <a:lstStyle/>
+          <a:p>
+            <a:pPr indent="0" marL="0">
+              <a:buNone/>
+            </a:pPr>
+            <a:r>
+              <a:rPr lang="en-US" sz="1000" b="1" spc="140" kern="0" dirty="0">
+                <a:solidFill>
+                  <a:srgbClr val="D65E10"/>
+                </a:solidFill>
+                <a:latin typeface="Calibri" pitchFamily="34" charset="0"/>
+                <a:ea typeface="Calibri" pitchFamily="34" charset="-122"/>
+                <a:cs typeface="Calibri" pitchFamily="34" charset="-120"/>
+              </a:rPr>
+              <a:t>Что это меняет</a:t>
+            </a:r>
+            <a:endParaRPr lang="en-US" sz="1000" dirty="0"/>
+          </a:p>
+        </p:txBody>
+      </p:sp>
+      <p:sp>
+        <p:nvSpPr>
+          <p:cNvPr id="14" name="Text 11"/>
+          <p:cNvSpPr txBox="1"/>
+          <p:nvPr/>
+        </p:nvSpPr>
+        <p:spPr>
+          <a:xfrm>
+            <a:off x="7863840" y="4370832"/>
+            <a:ext cx="3474720" cy="1645920"/>
+          </a:xfrm>
+          <a:prstGeom prst="rect">
+            <a:avLst/>
+          </a:prstGeom>
+          <a:noFill/>
+          <a:ln/>
+        </p:spPr>
+        <p:txBody>
+          <a:bodyPr wrap="square" lIns="0" tIns="0" rIns="0" bIns="0" rtlCol="0" anchor="ctr"/>
+          <a:lstStyle/>
+          <a:p>
+            <a:pPr indent="0" marL="0">
+              <a:lnSpc>
+                <a:spcPts val="1600"/>
+              </a:lnSpc>
+              <a:buNone/>
+            </a:pPr>
+            <a:r>
+              <a:rPr lang="en-US" sz="1150" dirty="0">
+                <a:solidFill>
+                  <a:srgbClr val="15201A"/>
+                </a:solidFill>
+                <a:latin typeface="Calibri" pitchFamily="34" charset="0"/>
+                <a:ea typeface="Calibri" pitchFamily="34" charset="-122"/>
+                <a:cs typeface="Calibri" pitchFamily="34" charset="-120"/>
+              </a:rPr>
+              <a:t>Площадка работает не только на жителей, но и на узнаваемость Любино-Малоросс за пределами района — и создаёт основание для дальнейших проектов: сельский туризм, ярмарка, сувенирное ремесло.</a:t>
+            </a:r>
+            <a:endParaRPr lang="en-US" sz="1150" dirty="0"/>
+          </a:p>
+        </p:txBody>
+      </p:sp>
+    </p:spTree>
+  </p:cSld>
+  <p:clrMapOvr>
+    <a:masterClrMapping/>
+  </p:clrMapOvr>
+</p:sld>
+</file>
+
+<file path=ppt/slides/slide12.xml><?xml version="1.0" encoding="utf-8"?>
+<p:sld xmlns:a="http://schemas.openxmlformats.org/drawingml/2006/main" xmlns:r="http://schemas.openxmlformats.org/officeDocument/2006/relationships" xmlns:p="http://schemas.openxmlformats.org/presentationml/2006/main">
+  <p:cSld name="Slide 12">
+    <p:bg>
+      <p:bgPr>
+        <a:solidFill>
+          <a:srgbClr val="FFFFFF"/>
+        </a:solidFill>
+      </p:bgPr>
+    </p:bg>
+    <p:spTree>
+      <p:nvGrpSpPr>
+        <p:cNvPr id="1" name=""/>
+        <p:cNvGrpSpPr/>
+        <p:nvPr/>
+      </p:nvGrpSpPr>
+      <p:grpSpPr>
+        <a:xfrm>
+          <a:off x="0" y="0"/>
+          <a:ext cx="0" cy="0"/>
+          <a:chOff x="0" y="0"/>
+          <a:chExt cx="0" cy="0"/>
+        </a:xfrm>
+      </p:grpSpPr>
+      <p:sp>
+        <p:nvSpPr>
+          <p:cNvPr id="2" name="Text 0"/>
+          <p:cNvSpPr txBox="1"/>
+          <p:nvPr/>
+        </p:nvSpPr>
+        <p:spPr>
+          <a:xfrm>
+            <a:off x="640080" y="566928"/>
+            <a:ext cx="7315200" cy="274320"/>
+          </a:xfrm>
+          <a:prstGeom prst="rect">
+            <a:avLst/>
+          </a:prstGeom>
+          <a:noFill/>
+          <a:ln/>
+        </p:spPr>
+        <p:txBody>
+          <a:bodyPr wrap="square" lIns="0" tIns="0" rIns="0" bIns="0" rtlCol="0" anchor="ctr"/>
+          <a:lstStyle/>
+          <a:p>
+            <a:pPr indent="0" marL="0">
+              <a:buNone/>
+            </a:pPr>
+            <a:r>
+              <a:rPr lang="en-US" sz="1000" b="1" spc="200" kern="0" dirty="0">
+                <a:solidFill>
+                  <a:srgbClr val="6B7A70"/>
+                </a:solidFill>
+                <a:latin typeface="Calibri" pitchFamily="34" charset="0"/>
+                <a:ea typeface="Calibri" pitchFamily="34" charset="-122"/>
+                <a:cs typeface="Calibri" pitchFamily="34" charset="-120"/>
+              </a:rPr>
+              <a:t>ДЕФЕКТНАЯ ВЕДОМОСТЬ</a:t>
+            </a:r>
+            <a:endParaRPr lang="en-US" sz="1000" dirty="0"/>
+          </a:p>
+        </p:txBody>
+      </p:sp>
+      <p:sp>
+        <p:nvSpPr>
+          <p:cNvPr id="3" name="Text 1"/>
+          <p:cNvSpPr txBox="1"/>
+          <p:nvPr/>
+        </p:nvSpPr>
+        <p:spPr>
+          <a:xfrm>
+            <a:off x="640080" y="914400"/>
+            <a:ext cx="8686800" cy="548640"/>
+          </a:xfrm>
+          <a:prstGeom prst="rect">
+            <a:avLst/>
+          </a:prstGeom>
+          <a:noFill/>
+          <a:ln/>
+        </p:spPr>
+        <p:txBody>
+          <a:bodyPr wrap="square" lIns="0" tIns="0" rIns="0" bIns="0" rtlCol="0" anchor="ctr"/>
+          <a:lstStyle/>
+          <a:p>
+            <a:pPr indent="0" marL="0">
+              <a:buNone/>
+            </a:pPr>
+            <a:r>
+              <a:rPr lang="en-US" sz="3200" b="1" dirty="0">
+                <a:solidFill>
+                  <a:srgbClr val="15201A"/>
+                </a:solidFill>
+                <a:latin typeface="Cambria" pitchFamily="34" charset="0"/>
+                <a:ea typeface="Cambria" pitchFamily="34" charset="-122"/>
+                <a:cs typeface="Cambria" pitchFamily="34" charset="-120"/>
+              </a:rPr>
+              <a:t>3 357 449 ₽ при лимите 3,5 млн</a:t>
             </a:r>
             <a:endParaRPr lang="en-US" sz="3200" dirty="0"/>
           </a:p>
@@ -3222,7 +4142,7 @@
                 <a:ea typeface="Calibri" pitchFamily="34" charset="-122"/>
                 <a:cs typeface="Calibri" pitchFamily="34" charset="-120"/>
               </a:rPr>
-              <a:t>38 позиций в семи разделах. Расценки укрупнённые, до подачи подтверждаются коммерческими предложениями.</a:t>
+              <a:t>41 позиция в семи разделах. Расценки укрупнённые, до подачи подтверждаются коммерческими предложениями.</a:t>
             </a:r>
             <a:endParaRPr lang="en-US" sz="1250" dirty="0"/>
           </a:p>
@@ -3277,7 +4197,7 @@
                 <a:ea typeface="Cambria" pitchFamily="34" charset="-122"/>
                 <a:cs typeface="Cambria" pitchFamily="34" charset="-120"/>
               </a:rPr>
-              <a:t>3 169 050 ₽</a:t>
+              <a:t>3 197 570 ₽</a:t>
             </a:r>
             <a:endParaRPr lang="en-US" sz="2100" dirty="0"/>
           </a:p>
@@ -3355,7 +4275,7 @@
                 <a:ea typeface="Cambria" pitchFamily="34" charset="-122"/>
                 <a:cs typeface="Cambria" pitchFamily="34" charset="-120"/>
               </a:rPr>
-              <a:t>158 453 ₽</a:t>
+              <a:t>159 879 ₽</a:t>
             </a:r>
             <a:endParaRPr lang="en-US" sz="2100" dirty="0"/>
           </a:p>
@@ -3433,7 +4353,7 @@
                 <a:ea typeface="Cambria" pitchFamily="34" charset="-122"/>
                 <a:cs typeface="Cambria" pitchFamily="34" charset="-120"/>
               </a:rPr>
-              <a:t>172 497 ₽</a:t>
+              <a:t>142 551 ₽</a:t>
             </a:r>
             <a:endParaRPr lang="en-US" sz="2100" dirty="0"/>
           </a:p>
@@ -3472,7 +4392,7 @@
                 <a:ea typeface="Calibri" pitchFamily="34" charset="-122"/>
                 <a:cs typeface="Calibri" pitchFamily="34" charset="-120"/>
               </a:rPr>
-              <a:t>запас до лимита, 4,9 %</a:t>
+              <a:t>запас до лимита, 4,1 %</a:t>
             </a:r>
             <a:endParaRPr lang="en-US" sz="1100" dirty="0"/>
           </a:p>
@@ -3587,9 +4507,9 @@
 </p:sld>
 </file>
 
-<file path=ppt/slides/slide12.xml><?xml version="1.0" encoding="utf-8"?>
+<file path=ppt/slides/slide13.xml><?xml version="1.0" encoding="utf-8"?>
 <p:sld xmlns:a="http://schemas.openxmlformats.org/drawingml/2006/main" xmlns:r="http://schemas.openxmlformats.org/officeDocument/2006/relationships" xmlns:p="http://schemas.openxmlformats.org/presentationml/2006/main">
-  <p:cSld name="Slide 12">
+  <p:cSld name="Slide 13">
     <p:bg>
       <p:bgPr>
         <a:solidFill>
@@ -4276,7 +5196,7 @@
                 <a:ea typeface="Cambria" pitchFamily="34" charset="-122"/>
                 <a:cs typeface="Cambria" pitchFamily="34" charset="-120"/>
               </a:rPr>
-              <a:t>3 327 503 ₽</a:t>
+              <a:t>3 357 449 ₽</a:t>
             </a:r>
             <a:endParaRPr lang="en-US" sz="2800" dirty="0"/>
           </a:p>
@@ -6658,7 +7578,7 @@
                 <a:ea typeface="Calibri" pitchFamily="34" charset="-122"/>
                 <a:cs typeface="Calibri" pitchFamily="34" charset="-120"/>
               </a:rPr>
-              <a:t>Цветник, лавочка, навес</a:t>
+              <a:t>Цветник 52 растения</a:t>
             </a:r>
             <a:endParaRPr lang="en-US" sz="1250" dirty="0"/>
           </a:p>
@@ -6697,7 +7617,7 @@
                 <a:ea typeface="Calibri" pitchFamily="34" charset="-122"/>
                 <a:cs typeface="Calibri" pitchFamily="34" charset="-120"/>
               </a:rPr>
-              <a:t>у входа в клуб</a:t>
+              <a:t>шесть видов у входа в клуб</a:t>
             </a:r>
             <a:endParaRPr lang="en-US" sz="1050" dirty="0"/>
           </a:p>
@@ -8729,7 +9649,7 @@
                 <a:ea typeface="Calibri" pitchFamily="34" charset="-122"/>
                 <a:cs typeface="Calibri" pitchFamily="34" charset="-120"/>
               </a:rPr>
-              <a:t>ПОЧЕМУ ЭТО ТОЧКА ПРИТЯЖЕНИЯ</a:t>
+              <a:t>ЦВЕТНИК У ВХОДА В КЛУБ</a:t>
             </a:r>
             <a:endParaRPr lang="en-US" sz="1000" dirty="0"/>
           </a:p>
@@ -8744,7 +9664,7 @@
         <p:spPr>
           <a:xfrm>
             <a:off x="640080" y="914400"/>
-            <a:ext cx="9144000" cy="548640"/>
+            <a:ext cx="10515600" cy="548640"/>
           </a:xfrm>
           <a:prstGeom prst="rect">
             <a:avLst/>
@@ -8768,7 +9688,7 @@
                 <a:ea typeface="Cambria" pitchFamily="34" charset="-122"/>
                 <a:cs typeface="Cambria" pitchFamily="34" charset="-120"/>
               </a:rPr>
-              <a:t>Одно место для четырёх поколений</a:t>
+              <a:t>Шесть видов, цветение с июня до заморозков</a:t>
             </a:r>
             <a:endParaRPr lang="en-US" sz="3200" dirty="0"/>
           </a:p>
@@ -8782,8 +9702,8 @@
         </p:nvSpPr>
         <p:spPr>
           <a:xfrm>
-            <a:off x="640080" y="1600200"/>
-            <a:ext cx="8686800" cy="502920"/>
+            <a:off x="640080" y="1572768"/>
+            <a:ext cx="10881360" cy="457200"/>
           </a:xfrm>
           <a:prstGeom prst="rect">
             <a:avLst/>
@@ -8797,12 +9717,12 @@
           <a:p>
             <a:pPr indent="0" marL="0">
               <a:lnSpc>
-                <a:spcPts val="1700"/>
+                <a:spcPts val="1600"/>
               </a:lnSpc>
               <a:buNone/>
             </a:pPr>
             <a:r>
-              <a:rPr lang="en-US" sz="1300" dirty="0">
+              <a:rPr lang="en-US" sz="1250" dirty="0">
                 <a:solidFill>
                   <a:srgbClr val="6B7A70"/>
                 </a:solidFill>
@@ -8810,22 +9730,735 @@
                 <a:ea typeface="Calibri" pitchFamily="34" charset="-122"/>
                 <a:cs typeface="Calibri" pitchFamily="34" charset="-120"/>
               </a:rPr>
-              <a:t>Зал вмещает ограниченное число людей и делит их на сцену и ряды. Открытая площадка такого деления не делает.</a:t>
-            </a:r>
-            <a:endParaRPr lang="en-US" sz="1300" dirty="0"/>
-          </a:p>
-        </p:txBody>
-      </p:sp>
-      <p:sp>
-        <p:nvSpPr>
-          <p:cNvPr id="5" name="Shape 3"/>
+              <a:t>Полоса 5,0 × 2,0 м вдоль западного фасада, 52 растения в четыре яруса. Подобраны так, чтобы цветник работал весь сезон мероприятий: от летних праздников до Дня пожилого человека.</a:t>
+            </a:r>
+            <a:endParaRPr lang="en-US" sz="1250" dirty="0"/>
+          </a:p>
+        </p:txBody>
+      </p:sp>
+      <p:pic>
+        <p:nvPicPr>
+          <p:cNvPr id="5" name="Image 0" descr="deck/bed.png">    </p:cNvPr>
+          <p:cNvPicPr>
+            <a:picLocks noChangeAspect="1"/>
+          </p:cNvPicPr>
+          <p:nvPr/>
+        </p:nvPicPr>
+        <p:blipFill>
+          <a:blip r:embed="rId1"/>
+          <a:stretch>
+            <a:fillRect/>
+          </a:stretch>
+        </p:blipFill>
+        <p:spPr>
+          <a:xfrm>
+            <a:off x="640080" y="2103120"/>
+            <a:ext cx="7223760" cy="2953512"/>
+          </a:xfrm>
+          <a:prstGeom prst="rect">
+            <a:avLst/>
+          </a:prstGeom>
+        </p:spPr>
+      </p:pic>
+      <p:pic>
+        <p:nvPicPr>
+          <p:cNvPr id="6" name="Image 1" descr="deck/cvetnik.jpg">    </p:cNvPr>
+          <p:cNvPicPr>
+            <a:picLocks noChangeAspect="1"/>
+          </p:cNvPicPr>
+          <p:nvPr/>
+        </p:nvPicPr>
+        <p:blipFill>
+          <a:blip r:embed="rId2"/>
+          <a:srcRect l="0" r="0" t="0" b="0"/>
+          <a:stretch/>
+        </p:blipFill>
+        <p:spPr>
+          <a:xfrm>
+            <a:off x="8092440" y="2103120"/>
+            <a:ext cx="3456432" cy="2889504"/>
+          </a:xfrm>
+          <a:prstGeom prst="rect">
+            <a:avLst/>
+          </a:prstGeom>
+        </p:spPr>
+      </p:pic>
+      <p:sp>
+        <p:nvSpPr>
+          <p:cNvPr id="7" name="Text 3"/>
+          <p:cNvSpPr txBox="1"/>
+          <p:nvPr/>
+        </p:nvSpPr>
+        <p:spPr>
+          <a:xfrm>
+            <a:off x="640080" y="5047488"/>
+            <a:ext cx="3657600" cy="237744"/>
+          </a:xfrm>
+          <a:prstGeom prst="rect">
+            <a:avLst/>
+          </a:prstGeom>
+          <a:noFill/>
+          <a:ln/>
+        </p:spPr>
+        <p:txBody>
+          <a:bodyPr wrap="square" lIns="0" tIns="0" rIns="0" bIns="0" rtlCol="0" anchor="ctr"/>
+          <a:lstStyle/>
+          <a:p>
+            <a:pPr indent="0" marL="0">
+              <a:buNone/>
+            </a:pPr>
+            <a:r>
+              <a:rPr lang="en-US" sz="950" dirty="0">
+                <a:solidFill>
+                  <a:srgbClr val="6B7A70"/>
+                </a:solidFill>
+                <a:latin typeface="Calibri" pitchFamily="34" charset="0"/>
+                <a:ea typeface="Calibri" pitchFamily="34" charset="-122"/>
+                <a:cs typeface="Calibri" pitchFamily="34" charset="-120"/>
+              </a:rPr>
+              <a:t>Схема посадки, М 1:25</a:t>
+            </a:r>
+            <a:endParaRPr lang="en-US" sz="950" dirty="0"/>
+          </a:p>
+        </p:txBody>
+      </p:sp>
+      <p:sp>
+        <p:nvSpPr>
+          <p:cNvPr id="8" name="Text 4"/>
+          <p:cNvSpPr txBox="1"/>
+          <p:nvPr/>
+        </p:nvSpPr>
+        <p:spPr>
+          <a:xfrm>
+            <a:off x="8092440" y="5047488"/>
+            <a:ext cx="3657600" cy="237744"/>
+          </a:xfrm>
+          <a:prstGeom prst="rect">
+            <a:avLst/>
+          </a:prstGeom>
+          <a:noFill/>
+          <a:ln/>
+        </p:spPr>
+        <p:txBody>
+          <a:bodyPr wrap="square" lIns="0" tIns="0" rIns="0" bIns="0" rtlCol="0" anchor="ctr"/>
+          <a:lstStyle/>
+          <a:p>
+            <a:pPr indent="0" marL="0">
+              <a:buNone/>
+            </a:pPr>
+            <a:r>
+              <a:rPr lang="en-US" sz="950" dirty="0">
+                <a:solidFill>
+                  <a:srgbClr val="6B7A70"/>
+                </a:solidFill>
+                <a:latin typeface="Calibri" pitchFamily="34" charset="0"/>
+                <a:ea typeface="Calibri" pitchFamily="34" charset="-122"/>
+                <a:cs typeface="Calibri" pitchFamily="34" charset="-120"/>
+              </a:rPr>
+              <a:t>Вид с дорожки</a:t>
+            </a:r>
+            <a:endParaRPr lang="en-US" sz="950" dirty="0"/>
+          </a:p>
+        </p:txBody>
+      </p:sp>
+      <p:sp>
+        <p:nvSpPr>
+          <p:cNvPr id="9" name="Shape 5"/>
           <p:cNvSpPr/>
           <p:nvPr/>
         </p:nvSpPr>
         <p:spPr>
           <a:xfrm>
-            <a:off x="640080" y="2194560"/>
-            <a:ext cx="2606040" cy="2377440"/>
+            <a:off x="640080" y="5468112"/>
+            <a:ext cx="237744" cy="237744"/>
+          </a:xfrm>
+          <a:prstGeom prst="ellipse">
+            <a:avLst/>
+          </a:prstGeom>
+          <a:solidFill>
+            <a:srgbClr val="C8A98C"/>
+          </a:solidFill>
+          <a:ln/>
+        </p:spPr>
+      </p:sp>
+      <p:sp>
+        <p:nvSpPr>
+          <p:cNvPr id="10" name="Text 6"/>
+          <p:cNvSpPr txBox="1"/>
+          <p:nvPr/>
+        </p:nvSpPr>
+        <p:spPr>
+          <a:xfrm>
+            <a:off x="969264" y="5440680"/>
+            <a:ext cx="1481328" cy="274320"/>
+          </a:xfrm>
+          <a:prstGeom prst="rect">
+            <a:avLst/>
+          </a:prstGeom>
+          <a:noFill/>
+          <a:ln/>
+        </p:spPr>
+        <p:txBody>
+          <a:bodyPr wrap="square" lIns="0" tIns="0" rIns="0" bIns="0" rtlCol="0" anchor="ctr"/>
+          <a:lstStyle/>
+          <a:p>
+            <a:pPr indent="0" marL="0">
+              <a:buNone/>
+            </a:pPr>
+            <a:r>
+              <a:rPr lang="en-US" sz="1000" b="1" dirty="0">
+                <a:solidFill>
+                  <a:srgbClr val="15201A"/>
+                </a:solidFill>
+                <a:latin typeface="Calibri" pitchFamily="34" charset="0"/>
+                <a:ea typeface="Calibri" pitchFamily="34" charset="-122"/>
+                <a:cs typeface="Calibri" pitchFamily="34" charset="-120"/>
+              </a:rPr>
+              <a:t>Гортензия метельчатая</a:t>
+            </a:r>
+            <a:endParaRPr lang="en-US" sz="1000" dirty="0"/>
+          </a:p>
+        </p:txBody>
+      </p:sp>
+      <p:sp>
+        <p:nvSpPr>
+          <p:cNvPr id="11" name="Text 7"/>
+          <p:cNvSpPr txBox="1"/>
+          <p:nvPr/>
+        </p:nvSpPr>
+        <p:spPr>
+          <a:xfrm>
+            <a:off x="969264" y="5687568"/>
+            <a:ext cx="1481328" cy="274320"/>
+          </a:xfrm>
+          <a:prstGeom prst="rect">
+            <a:avLst/>
+          </a:prstGeom>
+          <a:noFill/>
+          <a:ln/>
+        </p:spPr>
+        <p:txBody>
+          <a:bodyPr wrap="square" lIns="0" tIns="0" rIns="0" bIns="0" rtlCol="0" anchor="ctr"/>
+          <a:lstStyle/>
+          <a:p>
+            <a:pPr indent="0" marL="0">
+              <a:buNone/>
+            </a:pPr>
+            <a:r>
+              <a:rPr lang="en-US" sz="880" dirty="0">
+                <a:solidFill>
+                  <a:srgbClr val="6B7A70"/>
+                </a:solidFill>
+                <a:latin typeface="Calibri" pitchFamily="34" charset="0"/>
+                <a:ea typeface="Calibri" pitchFamily="34" charset="-122"/>
+                <a:cs typeface="Calibri" pitchFamily="34" charset="-120"/>
+              </a:rPr>
+              <a:t>2 шт · июль–сентябрь</a:t>
+            </a:r>
+            <a:endParaRPr lang="en-US" sz="880" dirty="0"/>
+          </a:p>
+        </p:txBody>
+      </p:sp>
+      <p:sp>
+        <p:nvSpPr>
+          <p:cNvPr id="12" name="Shape 8"/>
+          <p:cNvSpPr/>
+          <p:nvPr/>
+        </p:nvSpPr>
+        <p:spPr>
+          <a:xfrm>
+            <a:off x="2468880" y="5468112"/>
+            <a:ext cx="237744" cy="237744"/>
+          </a:xfrm>
+          <a:prstGeom prst="ellipse">
+            <a:avLst/>
+          </a:prstGeom>
+          <a:solidFill>
+            <a:srgbClr val="C08A12"/>
+          </a:solidFill>
+          <a:ln/>
+        </p:spPr>
+      </p:sp>
+      <p:sp>
+        <p:nvSpPr>
+          <p:cNvPr id="13" name="Text 9"/>
+          <p:cNvSpPr txBox="1"/>
+          <p:nvPr/>
+        </p:nvSpPr>
+        <p:spPr>
+          <a:xfrm>
+            <a:off x="2798064" y="5440680"/>
+            <a:ext cx="1481328" cy="274320"/>
+          </a:xfrm>
+          <a:prstGeom prst="rect">
+            <a:avLst/>
+          </a:prstGeom>
+          <a:noFill/>
+          <a:ln/>
+        </p:spPr>
+        <p:txBody>
+          <a:bodyPr wrap="square" lIns="0" tIns="0" rIns="0" bIns="0" rtlCol="0" anchor="ctr"/>
+          <a:lstStyle/>
+          <a:p>
+            <a:pPr indent="0" marL="0">
+              <a:buNone/>
+            </a:pPr>
+            <a:r>
+              <a:rPr lang="en-US" sz="1000" b="1" dirty="0">
+                <a:solidFill>
+                  <a:srgbClr val="15201A"/>
+                </a:solidFill>
+                <a:latin typeface="Calibri" pitchFamily="34" charset="0"/>
+                <a:ea typeface="Calibri" pitchFamily="34" charset="-122"/>
+                <a:cs typeface="Calibri" pitchFamily="34" charset="-120"/>
+              </a:rPr>
+              <a:t>Хризантема «дубки»</a:t>
+            </a:r>
+            <a:endParaRPr lang="en-US" sz="1000" dirty="0"/>
+          </a:p>
+        </p:txBody>
+      </p:sp>
+      <p:sp>
+        <p:nvSpPr>
+          <p:cNvPr id="14" name="Text 10"/>
+          <p:cNvSpPr txBox="1"/>
+          <p:nvPr/>
+        </p:nvSpPr>
+        <p:spPr>
+          <a:xfrm>
+            <a:off x="2798064" y="5687568"/>
+            <a:ext cx="1481328" cy="274320"/>
+          </a:xfrm>
+          <a:prstGeom prst="rect">
+            <a:avLst/>
+          </a:prstGeom>
+          <a:noFill/>
+          <a:ln/>
+        </p:spPr>
+        <p:txBody>
+          <a:bodyPr wrap="square" lIns="0" tIns="0" rIns="0" bIns="0" rtlCol="0" anchor="ctr"/>
+          <a:lstStyle/>
+          <a:p>
+            <a:pPr indent="0" marL="0">
+              <a:buNone/>
+            </a:pPr>
+            <a:r>
+              <a:rPr lang="en-US" sz="880" dirty="0">
+                <a:solidFill>
+                  <a:srgbClr val="6B7A70"/>
+                </a:solidFill>
+                <a:latin typeface="Calibri" pitchFamily="34" charset="0"/>
+                <a:ea typeface="Calibri" pitchFamily="34" charset="-122"/>
+                <a:cs typeface="Calibri" pitchFamily="34" charset="-120"/>
+              </a:rPr>
+              <a:t>6 шт · август–октябрь</a:t>
+            </a:r>
+            <a:endParaRPr lang="en-US" sz="880" dirty="0"/>
+          </a:p>
+        </p:txBody>
+      </p:sp>
+      <p:sp>
+        <p:nvSpPr>
+          <p:cNvPr id="15" name="Shape 11"/>
+          <p:cNvSpPr/>
+          <p:nvPr/>
+        </p:nvSpPr>
+        <p:spPr>
+          <a:xfrm>
+            <a:off x="4297680" y="5468112"/>
+            <a:ext cx="237744" cy="237744"/>
+          </a:xfrm>
+          <a:prstGeom prst="ellipse">
+            <a:avLst/>
+          </a:prstGeom>
+          <a:solidFill>
+            <a:srgbClr val="6B4DAF"/>
+          </a:solidFill>
+          <a:ln/>
+        </p:spPr>
+      </p:sp>
+      <p:sp>
+        <p:nvSpPr>
+          <p:cNvPr id="16" name="Text 12"/>
+          <p:cNvSpPr txBox="1"/>
+          <p:nvPr/>
+        </p:nvSpPr>
+        <p:spPr>
+          <a:xfrm>
+            <a:off x="4626864" y="5440680"/>
+            <a:ext cx="1481328" cy="274320"/>
+          </a:xfrm>
+          <a:prstGeom prst="rect">
+            <a:avLst/>
+          </a:prstGeom>
+          <a:noFill/>
+          <a:ln/>
+        </p:spPr>
+        <p:txBody>
+          <a:bodyPr wrap="square" lIns="0" tIns="0" rIns="0" bIns="0" rtlCol="0" anchor="ctr"/>
+          <a:lstStyle/>
+          <a:p>
+            <a:pPr indent="0" marL="0">
+              <a:buNone/>
+            </a:pPr>
+            <a:r>
+              <a:rPr lang="en-US" sz="1000" b="1" dirty="0">
+                <a:solidFill>
+                  <a:srgbClr val="15201A"/>
+                </a:solidFill>
+                <a:latin typeface="Calibri" pitchFamily="34" charset="0"/>
+                <a:ea typeface="Calibri" pitchFamily="34" charset="-122"/>
+                <a:cs typeface="Calibri" pitchFamily="34" charset="-120"/>
+              </a:rPr>
+              <a:t>Октябринки</a:t>
+            </a:r>
+            <a:endParaRPr lang="en-US" sz="1000" dirty="0"/>
+          </a:p>
+        </p:txBody>
+      </p:sp>
+      <p:sp>
+        <p:nvSpPr>
+          <p:cNvPr id="17" name="Text 13"/>
+          <p:cNvSpPr txBox="1"/>
+          <p:nvPr/>
+        </p:nvSpPr>
+        <p:spPr>
+          <a:xfrm>
+            <a:off x="4626864" y="5687568"/>
+            <a:ext cx="1481328" cy="274320"/>
+          </a:xfrm>
+          <a:prstGeom prst="rect">
+            <a:avLst/>
+          </a:prstGeom>
+          <a:noFill/>
+          <a:ln/>
+        </p:spPr>
+        <p:txBody>
+          <a:bodyPr wrap="square" lIns="0" tIns="0" rIns="0" bIns="0" rtlCol="0" anchor="ctr"/>
+          <a:lstStyle/>
+          <a:p>
+            <a:pPr indent="0" marL="0">
+              <a:buNone/>
+            </a:pPr>
+            <a:r>
+              <a:rPr lang="en-US" sz="880" dirty="0">
+                <a:solidFill>
+                  <a:srgbClr val="6B7A70"/>
+                </a:solidFill>
+                <a:latin typeface="Calibri" pitchFamily="34" charset="0"/>
+                <a:ea typeface="Calibri" pitchFamily="34" charset="-122"/>
+                <a:cs typeface="Calibri" pitchFamily="34" charset="-120"/>
+              </a:rPr>
+              <a:t>7 шт · сентябрь–октябрь</a:t>
+            </a:r>
+            <a:endParaRPr lang="en-US" sz="880" dirty="0"/>
+          </a:p>
+        </p:txBody>
+      </p:sp>
+      <p:sp>
+        <p:nvSpPr>
+          <p:cNvPr id="18" name="Shape 14"/>
+          <p:cNvSpPr/>
+          <p:nvPr/>
+        </p:nvSpPr>
+        <p:spPr>
+          <a:xfrm>
+            <a:off x="6126480" y="5468112"/>
+            <a:ext cx="237744" cy="237744"/>
+          </a:xfrm>
+          <a:prstGeom prst="ellipse">
+            <a:avLst/>
+          </a:prstGeom>
+          <a:solidFill>
+            <a:srgbClr val="39704C"/>
+          </a:solidFill>
+          <a:ln/>
+        </p:spPr>
+      </p:sp>
+      <p:sp>
+        <p:nvSpPr>
+          <p:cNvPr id="19" name="Text 15"/>
+          <p:cNvSpPr txBox="1"/>
+          <p:nvPr/>
+        </p:nvSpPr>
+        <p:spPr>
+          <a:xfrm>
+            <a:off x="6455664" y="5440680"/>
+            <a:ext cx="1481328" cy="274320"/>
+          </a:xfrm>
+          <a:prstGeom prst="rect">
+            <a:avLst/>
+          </a:prstGeom>
+          <a:noFill/>
+          <a:ln/>
+        </p:spPr>
+        <p:txBody>
+          <a:bodyPr wrap="square" lIns="0" tIns="0" rIns="0" bIns="0" rtlCol="0" anchor="ctr"/>
+          <a:lstStyle/>
+          <a:p>
+            <a:pPr indent="0" marL="0">
+              <a:buNone/>
+            </a:pPr>
+            <a:r>
+              <a:rPr lang="en-US" sz="1000" b="1" dirty="0">
+                <a:solidFill>
+                  <a:srgbClr val="15201A"/>
+                </a:solidFill>
+                <a:latin typeface="Calibri" pitchFamily="34" charset="0"/>
+                <a:ea typeface="Calibri" pitchFamily="34" charset="-122"/>
+                <a:cs typeface="Calibri" pitchFamily="34" charset="-120"/>
+              </a:rPr>
+              <a:t>Хоста</a:t>
+            </a:r>
+            <a:endParaRPr lang="en-US" sz="1000" dirty="0"/>
+          </a:p>
+        </p:txBody>
+      </p:sp>
+      <p:sp>
+        <p:nvSpPr>
+          <p:cNvPr id="20" name="Text 16"/>
+          <p:cNvSpPr txBox="1"/>
+          <p:nvPr/>
+        </p:nvSpPr>
+        <p:spPr>
+          <a:xfrm>
+            <a:off x="6455664" y="5687568"/>
+            <a:ext cx="1481328" cy="274320"/>
+          </a:xfrm>
+          <a:prstGeom prst="rect">
+            <a:avLst/>
+          </a:prstGeom>
+          <a:noFill/>
+          <a:ln/>
+        </p:spPr>
+        <p:txBody>
+          <a:bodyPr wrap="square" lIns="0" tIns="0" rIns="0" bIns="0" rtlCol="0" anchor="ctr"/>
+          <a:lstStyle/>
+          <a:p>
+            <a:pPr indent="0" marL="0">
+              <a:buNone/>
+            </a:pPr>
+            <a:r>
+              <a:rPr lang="en-US" sz="880" dirty="0">
+                <a:solidFill>
+                  <a:srgbClr val="6B7A70"/>
+                </a:solidFill>
+                <a:latin typeface="Calibri" pitchFamily="34" charset="0"/>
+                <a:ea typeface="Calibri" pitchFamily="34" charset="-122"/>
+                <a:cs typeface="Calibri" pitchFamily="34" charset="-120"/>
+              </a:rPr>
+              <a:t>5 шт · лист май–октябрь</a:t>
+            </a:r>
+            <a:endParaRPr lang="en-US" sz="880" dirty="0"/>
+          </a:p>
+        </p:txBody>
+      </p:sp>
+      <p:sp>
+        <p:nvSpPr>
+          <p:cNvPr id="21" name="Shape 17"/>
+          <p:cNvSpPr/>
+          <p:nvPr/>
+        </p:nvSpPr>
+        <p:spPr>
+          <a:xfrm>
+            <a:off x="7955280" y="5468112"/>
+            <a:ext cx="237744" cy="237744"/>
+          </a:xfrm>
+          <a:prstGeom prst="ellipse">
+            <a:avLst/>
+          </a:prstGeom>
+          <a:solidFill>
+            <a:srgbClr val="9C2159"/>
+          </a:solidFill>
+          <a:ln/>
+        </p:spPr>
+      </p:sp>
+      <p:sp>
+        <p:nvSpPr>
+          <p:cNvPr id="22" name="Text 18"/>
+          <p:cNvSpPr txBox="1"/>
+          <p:nvPr/>
+        </p:nvSpPr>
+        <p:spPr>
+          <a:xfrm>
+            <a:off x="8284464" y="5440680"/>
+            <a:ext cx="1481328" cy="274320"/>
+          </a:xfrm>
+          <a:prstGeom prst="rect">
+            <a:avLst/>
+          </a:prstGeom>
+          <a:noFill/>
+          <a:ln/>
+        </p:spPr>
+        <p:txBody>
+          <a:bodyPr wrap="square" lIns="0" tIns="0" rIns="0" bIns="0" rtlCol="0" anchor="ctr"/>
+          <a:lstStyle/>
+          <a:p>
+            <a:pPr indent="0" marL="0">
+              <a:buNone/>
+            </a:pPr>
+            <a:r>
+              <a:rPr lang="en-US" sz="1000" b="1" dirty="0">
+                <a:solidFill>
+                  <a:srgbClr val="15201A"/>
+                </a:solidFill>
+                <a:latin typeface="Calibri" pitchFamily="34" charset="0"/>
+                <a:ea typeface="Calibri" pitchFamily="34" charset="-122"/>
+                <a:cs typeface="Calibri" pitchFamily="34" charset="-120"/>
+              </a:rPr>
+              <a:t>Петуния</a:t>
+            </a:r>
+            <a:endParaRPr lang="en-US" sz="1000" dirty="0"/>
+          </a:p>
+        </p:txBody>
+      </p:sp>
+      <p:sp>
+        <p:nvSpPr>
+          <p:cNvPr id="23" name="Text 19"/>
+          <p:cNvSpPr txBox="1"/>
+          <p:nvPr/>
+        </p:nvSpPr>
+        <p:spPr>
+          <a:xfrm>
+            <a:off x="8284464" y="5687568"/>
+            <a:ext cx="1481328" cy="274320"/>
+          </a:xfrm>
+          <a:prstGeom prst="rect">
+            <a:avLst/>
+          </a:prstGeom>
+          <a:noFill/>
+          <a:ln/>
+        </p:spPr>
+        <p:txBody>
+          <a:bodyPr wrap="square" lIns="0" tIns="0" rIns="0" bIns="0" rtlCol="0" anchor="ctr"/>
+          <a:lstStyle/>
+          <a:p>
+            <a:pPr indent="0" marL="0">
+              <a:buNone/>
+            </a:pPr>
+            <a:r>
+              <a:rPr lang="en-US" sz="880" dirty="0">
+                <a:solidFill>
+                  <a:srgbClr val="6B7A70"/>
+                </a:solidFill>
+                <a:latin typeface="Calibri" pitchFamily="34" charset="0"/>
+                <a:ea typeface="Calibri" pitchFamily="34" charset="-122"/>
+                <a:cs typeface="Calibri" pitchFamily="34" charset="-120"/>
+              </a:rPr>
+              <a:t>14 шт · июнь–сентябрь</a:t>
+            </a:r>
+            <a:endParaRPr lang="en-US" sz="880" dirty="0"/>
+          </a:p>
+        </p:txBody>
+      </p:sp>
+      <p:sp>
+        <p:nvSpPr>
+          <p:cNvPr id="24" name="Shape 20"/>
+          <p:cNvSpPr/>
+          <p:nvPr/>
+        </p:nvSpPr>
+        <p:spPr>
+          <a:xfrm>
+            <a:off x="9784080" y="5468112"/>
+            <a:ext cx="237744" cy="237744"/>
+          </a:xfrm>
+          <a:prstGeom prst="ellipse">
+            <a:avLst/>
+          </a:prstGeom>
+          <a:solidFill>
+            <a:srgbClr val="D1760A"/>
+          </a:solidFill>
+          <a:ln/>
+        </p:spPr>
+      </p:sp>
+      <p:sp>
+        <p:nvSpPr>
+          <p:cNvPr id="25" name="Text 21"/>
+          <p:cNvSpPr txBox="1"/>
+          <p:nvPr/>
+        </p:nvSpPr>
+        <p:spPr>
+          <a:xfrm>
+            <a:off x="10113264" y="5440680"/>
+            <a:ext cx="1481328" cy="274320"/>
+          </a:xfrm>
+          <a:prstGeom prst="rect">
+            <a:avLst/>
+          </a:prstGeom>
+          <a:noFill/>
+          <a:ln/>
+        </p:spPr>
+        <p:txBody>
+          <a:bodyPr wrap="square" lIns="0" tIns="0" rIns="0" bIns="0" rtlCol="0" anchor="ctr"/>
+          <a:lstStyle/>
+          <a:p>
+            <a:pPr indent="0" marL="0">
+              <a:buNone/>
+            </a:pPr>
+            <a:r>
+              <a:rPr lang="en-US" sz="1000" b="1" dirty="0">
+                <a:solidFill>
+                  <a:srgbClr val="15201A"/>
+                </a:solidFill>
+                <a:latin typeface="Calibri" pitchFamily="34" charset="0"/>
+                <a:ea typeface="Calibri" pitchFamily="34" charset="-122"/>
+                <a:cs typeface="Calibri" pitchFamily="34" charset="-120"/>
+              </a:rPr>
+              <a:t>Бархатцы</a:t>
+            </a:r>
+            <a:endParaRPr lang="en-US" sz="1000" dirty="0"/>
+          </a:p>
+        </p:txBody>
+      </p:sp>
+      <p:sp>
+        <p:nvSpPr>
+          <p:cNvPr id="26" name="Text 22"/>
+          <p:cNvSpPr txBox="1"/>
+          <p:nvPr/>
+        </p:nvSpPr>
+        <p:spPr>
+          <a:xfrm>
+            <a:off x="10113264" y="5687568"/>
+            <a:ext cx="1481328" cy="274320"/>
+          </a:xfrm>
+          <a:prstGeom prst="rect">
+            <a:avLst/>
+          </a:prstGeom>
+          <a:noFill/>
+          <a:ln/>
+        </p:spPr>
+        <p:txBody>
+          <a:bodyPr wrap="square" lIns="0" tIns="0" rIns="0" bIns="0" rtlCol="0" anchor="ctr"/>
+          <a:lstStyle/>
+          <a:p>
+            <a:pPr indent="0" marL="0">
+              <a:buNone/>
+            </a:pPr>
+            <a:r>
+              <a:rPr lang="en-US" sz="880" dirty="0">
+                <a:solidFill>
+                  <a:srgbClr val="6B7A70"/>
+                </a:solidFill>
+                <a:latin typeface="Calibri" pitchFamily="34" charset="0"/>
+                <a:ea typeface="Calibri" pitchFamily="34" charset="-122"/>
+                <a:cs typeface="Calibri" pitchFamily="34" charset="-120"/>
+              </a:rPr>
+              <a:t>18 шт · июнь–октябрь</a:t>
+            </a:r>
+            <a:endParaRPr lang="en-US" sz="880" dirty="0"/>
+          </a:p>
+        </p:txBody>
+      </p:sp>
+      <p:sp>
+        <p:nvSpPr>
+          <p:cNvPr id="27" name="Shape 23"/>
+          <p:cNvSpPr/>
+          <p:nvPr/>
+        </p:nvSpPr>
+        <p:spPr>
+          <a:xfrm>
+            <a:off x="640080" y="6144768"/>
+            <a:ext cx="10908792" cy="457200"/>
           </a:xfrm>
           <a:prstGeom prst="rect">
             <a:avLst/>
@@ -8838,864 +10471,40 @@
       </p:sp>
       <p:sp>
         <p:nvSpPr>
-          <p:cNvPr id="6" name="Shape 4"/>
-          <p:cNvSpPr/>
-          <p:nvPr/>
-        </p:nvSpPr>
-        <p:spPr>
-          <a:xfrm>
-            <a:off x="914400" y="2468880"/>
-            <a:ext cx="566928" cy="566928"/>
-          </a:xfrm>
-          <a:prstGeom prst="ellipse">
-            <a:avLst/>
-          </a:prstGeom>
-          <a:solidFill>
-            <a:srgbClr val="6E9A4E"/>
-          </a:solidFill>
-          <a:ln/>
-        </p:spPr>
-      </p:sp>
-      <p:sp>
-        <p:nvSpPr>
-          <p:cNvPr id="7" name="Text 5"/>
-          <p:cNvSpPr txBox="1"/>
-          <p:nvPr/>
-        </p:nvSpPr>
-        <p:spPr>
-          <a:xfrm>
-            <a:off x="914400" y="2468880"/>
-            <a:ext cx="566928" cy="566928"/>
-          </a:xfrm>
-          <a:prstGeom prst="rect">
-            <a:avLst/>
-          </a:prstGeom>
-          <a:noFill/>
-          <a:ln/>
-        </p:spPr>
-        <p:txBody>
-          <a:bodyPr wrap="square" lIns="0" tIns="0" rIns="0" bIns="0" rtlCol="0" anchor="ctr"/>
-          <a:lstStyle/>
-          <a:p>
-            <a:pPr algn="ctr" indent="0" marL="0">
-              <a:buNone/>
-            </a:pPr>
-            <a:r>
-              <a:rPr lang="en-US" sz="2000" b="1" dirty="0">
-                <a:solidFill>
-                  <a:srgbClr val="FFFFFF"/>
-                </a:solidFill>
-                <a:latin typeface="Calibri" pitchFamily="34" charset="0"/>
-                <a:ea typeface="Calibri" pitchFamily="34" charset="-122"/>
-                <a:cs typeface="Calibri" pitchFamily="34" charset="-120"/>
-              </a:rPr>
-              <a:t>1</a:t>
-            </a:r>
-            <a:endParaRPr lang="en-US" sz="2000" dirty="0"/>
-          </a:p>
-        </p:txBody>
-      </p:sp>
-      <p:sp>
-        <p:nvSpPr>
-          <p:cNvPr id="8" name="Text 6"/>
-          <p:cNvSpPr txBox="1"/>
-          <p:nvPr/>
-        </p:nvSpPr>
-        <p:spPr>
-          <a:xfrm>
-            <a:off x="914400" y="3200400"/>
-            <a:ext cx="2103120" cy="502920"/>
-          </a:xfrm>
-          <a:prstGeom prst="rect">
-            <a:avLst/>
-          </a:prstGeom>
-          <a:noFill/>
-          <a:ln/>
-        </p:spPr>
-        <p:txBody>
-          <a:bodyPr wrap="square" lIns="0" tIns="0" rIns="0" bIns="0" rtlCol="0" anchor="ctr"/>
-          <a:lstStyle/>
-          <a:p>
-            <a:pPr indent="0" marL="0">
-              <a:buNone/>
-            </a:pPr>
-            <a:r>
-              <a:rPr lang="en-US" sz="1600" b="1" dirty="0">
+          <p:cNvPr id="28" name="Text 24"/>
+          <p:cNvSpPr txBox="1"/>
+          <p:nvPr/>
+        </p:nvSpPr>
+        <p:spPr>
+          <a:xfrm>
+            <a:off x="868680" y="6254496"/>
+            <a:ext cx="10515600" cy="274320"/>
+          </a:xfrm>
+          <a:prstGeom prst="rect">
+            <a:avLst/>
+          </a:prstGeom>
+          <a:noFill/>
+          <a:ln/>
+        </p:spPr>
+        <p:txBody>
+          <a:bodyPr wrap="square" lIns="0" tIns="0" rIns="0" bIns="0" rtlCol="0" anchor="ctr"/>
+          <a:lstStyle/>
+          <a:p>
+            <a:pPr indent="0" marL="0">
+              <a:buNone/>
+            </a:pPr>
+            <a:r>
+              <a:rPr lang="en-US" sz="1000" dirty="0">
                 <a:solidFill>
                   <a:srgbClr val="15201A"/>
                 </a:solidFill>
-                <a:latin typeface="Cambria" pitchFamily="34" charset="0"/>
-                <a:ea typeface="Cambria" pitchFamily="34" charset="-122"/>
-                <a:cs typeface="Cambria" pitchFamily="34" charset="-120"/>
-              </a:rPr>
-              <a:t>Дети</a:t>
-            </a:r>
-            <a:endParaRPr lang="en-US" sz="1600" dirty="0"/>
-          </a:p>
-        </p:txBody>
-      </p:sp>
-      <p:sp>
-        <p:nvSpPr>
-          <p:cNvPr id="9" name="Text 7"/>
-          <p:cNvSpPr txBox="1"/>
-          <p:nvPr/>
-        </p:nvSpPr>
-        <p:spPr>
-          <a:xfrm>
-            <a:off x="914400" y="3749040"/>
-            <a:ext cx="2103120" cy="685800"/>
-          </a:xfrm>
-          <a:prstGeom prst="rect">
-            <a:avLst/>
-          </a:prstGeom>
-          <a:noFill/>
-          <a:ln/>
-        </p:spPr>
-        <p:txBody>
-          <a:bodyPr wrap="square" lIns="0" tIns="0" rIns="0" bIns="0" rtlCol="0" anchor="ctr"/>
-          <a:lstStyle/>
-          <a:p>
-            <a:pPr indent="0" marL="0">
-              <a:lnSpc>
-                <a:spcPts val="1400"/>
-              </a:lnSpc>
-              <a:buNone/>
-            </a:pPr>
-            <a:r>
-              <a:rPr lang="en-US" sz="1100" dirty="0">
-                <a:solidFill>
-                  <a:srgbClr val="6B7A70"/>
-                </a:solidFill>
-                <a:latin typeface="Calibri" pitchFamily="34" charset="0"/>
-                <a:ea typeface="Calibri" pitchFamily="34" charset="-122"/>
-                <a:cs typeface="Calibri" pitchFamily="34" charset="-120"/>
-              </a:rPr>
-              <a:t>игровая площадка 195 м², в поле зрения беседки</a:t>
-            </a:r>
-            <a:endParaRPr lang="en-US" sz="1100" dirty="0"/>
-          </a:p>
-        </p:txBody>
-      </p:sp>
-      <p:sp>
-        <p:nvSpPr>
-          <p:cNvPr id="10" name="Shape 8"/>
-          <p:cNvSpPr/>
-          <p:nvPr/>
-        </p:nvSpPr>
-        <p:spPr>
-          <a:xfrm>
-            <a:off x="3456432" y="2194560"/>
-            <a:ext cx="2606040" cy="2377440"/>
-          </a:xfrm>
-          <a:prstGeom prst="rect">
-            <a:avLst/>
-          </a:prstGeom>
-          <a:solidFill>
-            <a:srgbClr val="F2F5EF"/>
-          </a:solidFill>
-          <a:ln/>
-        </p:spPr>
-      </p:sp>
-      <p:sp>
-        <p:nvSpPr>
-          <p:cNvPr id="11" name="Shape 9"/>
-          <p:cNvSpPr/>
-          <p:nvPr/>
-        </p:nvSpPr>
-        <p:spPr>
-          <a:xfrm>
-            <a:off x="3730752" y="2468880"/>
-            <a:ext cx="566928" cy="566928"/>
-          </a:xfrm>
-          <a:prstGeom prst="ellipse">
-            <a:avLst/>
-          </a:prstGeom>
-          <a:solidFill>
-            <a:srgbClr val="2F7386"/>
-          </a:solidFill>
-          <a:ln/>
-        </p:spPr>
-      </p:sp>
-      <p:sp>
-        <p:nvSpPr>
-          <p:cNvPr id="12" name="Text 10"/>
-          <p:cNvSpPr txBox="1"/>
-          <p:nvPr/>
-        </p:nvSpPr>
-        <p:spPr>
-          <a:xfrm>
-            <a:off x="3730752" y="2468880"/>
-            <a:ext cx="566928" cy="566928"/>
-          </a:xfrm>
-          <a:prstGeom prst="rect">
-            <a:avLst/>
-          </a:prstGeom>
-          <a:noFill/>
-          <a:ln/>
-        </p:spPr>
-        <p:txBody>
-          <a:bodyPr wrap="square" lIns="0" tIns="0" rIns="0" bIns="0" rtlCol="0" anchor="ctr"/>
-          <a:lstStyle/>
-          <a:p>
-            <a:pPr algn="ctr" indent="0" marL="0">
-              <a:buNone/>
-            </a:pPr>
-            <a:r>
-              <a:rPr lang="en-US" sz="2000" b="1" dirty="0">
-                <a:solidFill>
-                  <a:srgbClr val="FFFFFF"/>
-                </a:solidFill>
-                <a:latin typeface="Calibri" pitchFamily="34" charset="0"/>
-                <a:ea typeface="Calibri" pitchFamily="34" charset="-122"/>
-                <a:cs typeface="Calibri" pitchFamily="34" charset="-120"/>
-              </a:rPr>
-              <a:t>2</a:t>
-            </a:r>
-            <a:endParaRPr lang="en-US" sz="2000" dirty="0"/>
-          </a:p>
-        </p:txBody>
-      </p:sp>
-      <p:sp>
-        <p:nvSpPr>
-          <p:cNvPr id="13" name="Text 11"/>
-          <p:cNvSpPr txBox="1"/>
-          <p:nvPr/>
-        </p:nvSpPr>
-        <p:spPr>
-          <a:xfrm>
-            <a:off x="3730752" y="3200400"/>
-            <a:ext cx="2103120" cy="502920"/>
-          </a:xfrm>
-          <a:prstGeom prst="rect">
-            <a:avLst/>
-          </a:prstGeom>
-          <a:noFill/>
-          <a:ln/>
-        </p:spPr>
-        <p:txBody>
-          <a:bodyPr wrap="square" lIns="0" tIns="0" rIns="0" bIns="0" rtlCol="0" anchor="ctr"/>
-          <a:lstStyle/>
-          <a:p>
-            <a:pPr indent="0" marL="0">
-              <a:buNone/>
-            </a:pPr>
-            <a:r>
-              <a:rPr lang="en-US" sz="1600" b="1" dirty="0">
-                <a:solidFill>
-                  <a:srgbClr val="15201A"/>
-                </a:solidFill>
-                <a:latin typeface="Cambria" pitchFamily="34" charset="0"/>
-                <a:ea typeface="Cambria" pitchFamily="34" charset="-122"/>
-                <a:cs typeface="Cambria" pitchFamily="34" charset="-120"/>
-              </a:rPr>
-              <a:t>Родители</a:t>
-            </a:r>
-            <a:endParaRPr lang="en-US" sz="1600" dirty="0"/>
-          </a:p>
-        </p:txBody>
-      </p:sp>
-      <p:sp>
-        <p:nvSpPr>
-          <p:cNvPr id="14" name="Text 12"/>
-          <p:cNvSpPr txBox="1"/>
-          <p:nvPr/>
-        </p:nvSpPr>
-        <p:spPr>
-          <a:xfrm>
-            <a:off x="3730752" y="3749040"/>
-            <a:ext cx="2103120" cy="685800"/>
-          </a:xfrm>
-          <a:prstGeom prst="rect">
-            <a:avLst/>
-          </a:prstGeom>
-          <a:noFill/>
-          <a:ln/>
-        </p:spPr>
-        <p:txBody>
-          <a:bodyPr wrap="square" lIns="0" tIns="0" rIns="0" bIns="0" rtlCol="0" anchor="ctr"/>
-          <a:lstStyle/>
-          <a:p>
-            <a:pPr indent="0" marL="0">
-              <a:lnSpc>
-                <a:spcPts val="1400"/>
-              </a:lnSpc>
-              <a:buNone/>
-            </a:pPr>
-            <a:r>
-              <a:rPr lang="en-US" sz="1100" dirty="0">
-                <a:solidFill>
-                  <a:srgbClr val="6B7A70"/>
-                </a:solidFill>
-                <a:latin typeface="Calibri" pitchFamily="34" charset="0"/>
-                <a:ea typeface="Calibri" pitchFamily="34" charset="-122"/>
-                <a:cs typeface="Calibri" pitchFamily="34" charset="-120"/>
-              </a:rPr>
-              <a:t>беседка на 10–12 человек и полянка рядом с детьми</a:t>
-            </a:r>
-            <a:endParaRPr lang="en-US" sz="1100" dirty="0"/>
-          </a:p>
-        </p:txBody>
-      </p:sp>
-      <p:sp>
-        <p:nvSpPr>
-          <p:cNvPr id="15" name="Shape 13"/>
-          <p:cNvSpPr/>
-          <p:nvPr/>
-        </p:nvSpPr>
-        <p:spPr>
-          <a:xfrm>
-            <a:off x="6272784" y="2194560"/>
-            <a:ext cx="2606040" cy="2377440"/>
-          </a:xfrm>
-          <a:prstGeom prst="rect">
-            <a:avLst/>
-          </a:prstGeom>
-          <a:solidFill>
-            <a:srgbClr val="F2F5EF"/>
-          </a:solidFill>
-          <a:ln/>
-        </p:spPr>
-      </p:sp>
-      <p:sp>
-        <p:nvSpPr>
-          <p:cNvPr id="16" name="Shape 14"/>
-          <p:cNvSpPr/>
-          <p:nvPr/>
-        </p:nvSpPr>
-        <p:spPr>
-          <a:xfrm>
-            <a:off x="6547104" y="2468880"/>
-            <a:ext cx="566928" cy="566928"/>
-          </a:xfrm>
-          <a:prstGeom prst="ellipse">
-            <a:avLst/>
-          </a:prstGeom>
-          <a:solidFill>
-            <a:srgbClr val="D65E10"/>
-          </a:solidFill>
-          <a:ln/>
-        </p:spPr>
-      </p:sp>
-      <p:sp>
-        <p:nvSpPr>
-          <p:cNvPr id="17" name="Text 15"/>
-          <p:cNvSpPr txBox="1"/>
-          <p:nvPr/>
-        </p:nvSpPr>
-        <p:spPr>
-          <a:xfrm>
-            <a:off x="6547104" y="2468880"/>
-            <a:ext cx="566928" cy="566928"/>
-          </a:xfrm>
-          <a:prstGeom prst="rect">
-            <a:avLst/>
-          </a:prstGeom>
-          <a:noFill/>
-          <a:ln/>
-        </p:spPr>
-        <p:txBody>
-          <a:bodyPr wrap="square" lIns="0" tIns="0" rIns="0" bIns="0" rtlCol="0" anchor="ctr"/>
-          <a:lstStyle/>
-          <a:p>
-            <a:pPr algn="ctr" indent="0" marL="0">
-              <a:buNone/>
-            </a:pPr>
-            <a:r>
-              <a:rPr lang="en-US" sz="2000" b="1" dirty="0">
-                <a:solidFill>
-                  <a:srgbClr val="FFFFFF"/>
-                </a:solidFill>
-                <a:latin typeface="Calibri" pitchFamily="34" charset="0"/>
-                <a:ea typeface="Calibri" pitchFamily="34" charset="-122"/>
-                <a:cs typeface="Calibri" pitchFamily="34" charset="-120"/>
-              </a:rPr>
-              <a:t>3</a:t>
-            </a:r>
-            <a:endParaRPr lang="en-US" sz="2000" dirty="0"/>
-          </a:p>
-        </p:txBody>
-      </p:sp>
-      <p:sp>
-        <p:nvSpPr>
-          <p:cNvPr id="18" name="Text 16"/>
-          <p:cNvSpPr txBox="1"/>
-          <p:nvPr/>
-        </p:nvSpPr>
-        <p:spPr>
-          <a:xfrm>
-            <a:off x="6547104" y="3200400"/>
-            <a:ext cx="2103120" cy="502920"/>
-          </a:xfrm>
-          <a:prstGeom prst="rect">
-            <a:avLst/>
-          </a:prstGeom>
-          <a:noFill/>
-          <a:ln/>
-        </p:spPr>
-        <p:txBody>
-          <a:bodyPr wrap="square" lIns="0" tIns="0" rIns="0" bIns="0" rtlCol="0" anchor="ctr"/>
-          <a:lstStyle/>
-          <a:p>
-            <a:pPr indent="0" marL="0">
-              <a:buNone/>
-            </a:pPr>
-            <a:r>
-              <a:rPr lang="en-US" sz="1600" b="1" dirty="0">
-                <a:solidFill>
-                  <a:srgbClr val="15201A"/>
-                </a:solidFill>
-                <a:latin typeface="Cambria" pitchFamily="34" charset="0"/>
-                <a:ea typeface="Cambria" pitchFamily="34" charset="-122"/>
-                <a:cs typeface="Cambria" pitchFamily="34" charset="-120"/>
-              </a:rPr>
-              <a:t>Старшее поколение</a:t>
-            </a:r>
-            <a:endParaRPr lang="en-US" sz="1600" dirty="0"/>
-          </a:p>
-        </p:txBody>
-      </p:sp>
-      <p:sp>
-        <p:nvSpPr>
-          <p:cNvPr id="19" name="Text 17"/>
-          <p:cNvSpPr txBox="1"/>
-          <p:nvPr/>
-        </p:nvSpPr>
-        <p:spPr>
-          <a:xfrm>
-            <a:off x="6547104" y="3749040"/>
-            <a:ext cx="2103120" cy="685800"/>
-          </a:xfrm>
-          <a:prstGeom prst="rect">
-            <a:avLst/>
-          </a:prstGeom>
-          <a:noFill/>
-          <a:ln/>
-        </p:spPr>
-        <p:txBody>
-          <a:bodyPr wrap="square" lIns="0" tIns="0" rIns="0" bIns="0" rtlCol="0" anchor="ctr"/>
-          <a:lstStyle/>
-          <a:p>
-            <a:pPr indent="0" marL="0">
-              <a:lnSpc>
-                <a:spcPts val="1400"/>
-              </a:lnSpc>
-              <a:buNone/>
-            </a:pPr>
-            <a:r>
-              <a:rPr lang="en-US" sz="1100" dirty="0">
-                <a:solidFill>
-                  <a:srgbClr val="6B7A70"/>
-                </a:solidFill>
-                <a:latin typeface="Calibri" pitchFamily="34" charset="0"/>
-                <a:ea typeface="Calibri" pitchFamily="34" charset="-122"/>
-                <a:cs typeface="Calibri" pitchFamily="34" charset="-120"/>
-              </a:rPr>
-              <a:t>скамьи у сцены, хороводы и вечорки на полянке</a:t>
-            </a:r>
-            <a:endParaRPr lang="en-US" sz="1100" dirty="0"/>
-          </a:p>
-        </p:txBody>
-      </p:sp>
-      <p:sp>
-        <p:nvSpPr>
-          <p:cNvPr id="20" name="Shape 18"/>
-          <p:cNvSpPr/>
-          <p:nvPr/>
-        </p:nvSpPr>
-        <p:spPr>
-          <a:xfrm>
-            <a:off x="9089136" y="2194560"/>
-            <a:ext cx="2606040" cy="2377440"/>
-          </a:xfrm>
-          <a:prstGeom prst="rect">
-            <a:avLst/>
-          </a:prstGeom>
-          <a:solidFill>
-            <a:srgbClr val="F2F5EF"/>
-          </a:solidFill>
-          <a:ln/>
-        </p:spPr>
-      </p:sp>
-      <p:sp>
-        <p:nvSpPr>
-          <p:cNvPr id="21" name="Shape 19"/>
-          <p:cNvSpPr/>
-          <p:nvPr/>
-        </p:nvSpPr>
-        <p:spPr>
-          <a:xfrm>
-            <a:off x="9363456" y="2468880"/>
-            <a:ext cx="566928" cy="566928"/>
-          </a:xfrm>
-          <a:prstGeom prst="ellipse">
-            <a:avLst/>
-          </a:prstGeom>
-          <a:solidFill>
-            <a:srgbClr val="15201A"/>
-          </a:solidFill>
-          <a:ln/>
-        </p:spPr>
-      </p:sp>
-      <p:sp>
-        <p:nvSpPr>
-          <p:cNvPr id="22" name="Text 20"/>
-          <p:cNvSpPr txBox="1"/>
-          <p:nvPr/>
-        </p:nvSpPr>
-        <p:spPr>
-          <a:xfrm>
-            <a:off x="9363456" y="2468880"/>
-            <a:ext cx="566928" cy="566928"/>
-          </a:xfrm>
-          <a:prstGeom prst="rect">
-            <a:avLst/>
-          </a:prstGeom>
-          <a:noFill/>
-          <a:ln/>
-        </p:spPr>
-        <p:txBody>
-          <a:bodyPr wrap="square" lIns="0" tIns="0" rIns="0" bIns="0" rtlCol="0" anchor="ctr"/>
-          <a:lstStyle/>
-          <a:p>
-            <a:pPr algn="ctr" indent="0" marL="0">
-              <a:buNone/>
-            </a:pPr>
-            <a:r>
-              <a:rPr lang="en-US" sz="2000" b="1" dirty="0">
-                <a:solidFill>
-                  <a:srgbClr val="FFFFFF"/>
-                </a:solidFill>
-                <a:latin typeface="Calibri" pitchFamily="34" charset="0"/>
-                <a:ea typeface="Calibri" pitchFamily="34" charset="-122"/>
-                <a:cs typeface="Calibri" pitchFamily="34" charset="-120"/>
-              </a:rPr>
-              <a:t>4</a:t>
-            </a:r>
-            <a:endParaRPr lang="en-US" sz="2000" dirty="0"/>
-          </a:p>
-        </p:txBody>
-      </p:sp>
-      <p:sp>
-        <p:nvSpPr>
-          <p:cNvPr id="23" name="Text 21"/>
-          <p:cNvSpPr txBox="1"/>
-          <p:nvPr/>
-        </p:nvSpPr>
-        <p:spPr>
-          <a:xfrm>
-            <a:off x="9363456" y="3200400"/>
-            <a:ext cx="2103120" cy="502920"/>
-          </a:xfrm>
-          <a:prstGeom prst="rect">
-            <a:avLst/>
-          </a:prstGeom>
-          <a:noFill/>
-          <a:ln/>
-        </p:spPr>
-        <p:txBody>
-          <a:bodyPr wrap="square" lIns="0" tIns="0" rIns="0" bIns="0" rtlCol="0" anchor="ctr"/>
-          <a:lstStyle/>
-          <a:p>
-            <a:pPr indent="0" marL="0">
-              <a:buNone/>
-            </a:pPr>
-            <a:r>
-              <a:rPr lang="en-US" sz="1600" b="1" dirty="0">
-                <a:solidFill>
-                  <a:srgbClr val="15201A"/>
-                </a:solidFill>
-                <a:latin typeface="Cambria" pitchFamily="34" charset="0"/>
-                <a:ea typeface="Cambria" pitchFamily="34" charset="-122"/>
-                <a:cs typeface="Cambria" pitchFamily="34" charset="-120"/>
-              </a:rPr>
-              <a:t>Подростки</a:t>
-            </a:r>
-            <a:endParaRPr lang="en-US" sz="1600" dirty="0"/>
-          </a:p>
-        </p:txBody>
-      </p:sp>
-      <p:sp>
-        <p:nvSpPr>
-          <p:cNvPr id="24" name="Text 22"/>
-          <p:cNvSpPr txBox="1"/>
-          <p:nvPr/>
-        </p:nvSpPr>
-        <p:spPr>
-          <a:xfrm>
-            <a:off x="9363456" y="3749040"/>
-            <a:ext cx="2103120" cy="685800"/>
-          </a:xfrm>
-          <a:prstGeom prst="rect">
-            <a:avLst/>
-          </a:prstGeom>
-          <a:noFill/>
-          <a:ln/>
-        </p:spPr>
-        <p:txBody>
-          <a:bodyPr wrap="square" lIns="0" tIns="0" rIns="0" bIns="0" rtlCol="0" anchor="ctr"/>
-          <a:lstStyle/>
-          <a:p>
-            <a:pPr indent="0" marL="0">
-              <a:lnSpc>
-                <a:spcPts val="1400"/>
-              </a:lnSpc>
-              <a:buNone/>
-            </a:pPr>
-            <a:r>
-              <a:rPr lang="en-US" sz="1100" dirty="0">
-                <a:solidFill>
-                  <a:srgbClr val="6B7A70"/>
-                </a:solidFill>
-                <a:latin typeface="Calibri" pitchFamily="34" charset="0"/>
-                <a:ea typeface="Calibri" pitchFamily="34" charset="-122"/>
-                <a:cs typeface="Calibri" pitchFamily="34" charset="-120"/>
-              </a:rPr>
-              <a:t>асфальтированная площадка перед эстрадой — в будни место для игр</a:t>
-            </a:r>
-            <a:endParaRPr lang="en-US" sz="1100" dirty="0"/>
-          </a:p>
-        </p:txBody>
-      </p:sp>
-      <p:sp>
-        <p:nvSpPr>
-          <p:cNvPr id="25" name="Text 23"/>
-          <p:cNvSpPr txBox="1"/>
-          <p:nvPr/>
-        </p:nvSpPr>
-        <p:spPr>
-          <a:xfrm>
-            <a:off x="640080" y="4983480"/>
-            <a:ext cx="3474720" cy="640080"/>
-          </a:xfrm>
-          <a:prstGeom prst="rect">
-            <a:avLst/>
-          </a:prstGeom>
-          <a:noFill/>
-          <a:ln/>
-        </p:spPr>
-        <p:txBody>
-          <a:bodyPr wrap="square" lIns="0" tIns="0" rIns="0" bIns="0" rtlCol="0" anchor="ctr"/>
-          <a:lstStyle/>
-          <a:p>
-            <a:pPr indent="0" marL="0">
-              <a:buNone/>
-            </a:pPr>
-            <a:r>
-              <a:rPr lang="en-US" sz="3600" b="1" dirty="0">
-                <a:solidFill>
-                  <a:srgbClr val="D65E10"/>
-                </a:solidFill>
-                <a:latin typeface="Cambria" pitchFamily="34" charset="0"/>
-                <a:ea typeface="Cambria" pitchFamily="34" charset="-122"/>
-                <a:cs typeface="Cambria" pitchFamily="34" charset="-120"/>
-              </a:rPr>
-              <a:t>200–250</a:t>
-            </a:r>
-            <a:endParaRPr lang="en-US" sz="3600" dirty="0"/>
-          </a:p>
-        </p:txBody>
-      </p:sp>
-      <p:sp>
-        <p:nvSpPr>
-          <p:cNvPr id="26" name="Text 24"/>
-          <p:cNvSpPr txBox="1"/>
-          <p:nvPr/>
-        </p:nvSpPr>
-        <p:spPr>
-          <a:xfrm>
-            <a:off x="640080" y="5715000"/>
-            <a:ext cx="3474720" cy="457200"/>
-          </a:xfrm>
-          <a:prstGeom prst="rect">
-            <a:avLst/>
-          </a:prstGeom>
-          <a:noFill/>
-          <a:ln/>
-        </p:spPr>
-        <p:txBody>
-          <a:bodyPr wrap="square" lIns="0" tIns="0" rIns="0" bIns="0" rtlCol="0" anchor="ctr"/>
-          <a:lstStyle/>
-          <a:p>
-            <a:pPr indent="0" marL="0">
-              <a:lnSpc>
-                <a:spcPts val="1400"/>
-              </a:lnSpc>
-              <a:buNone/>
-            </a:pPr>
-            <a:r>
-              <a:rPr lang="en-US" sz="1100" dirty="0">
-                <a:solidFill>
-                  <a:srgbClr val="6B7A70"/>
-                </a:solidFill>
-                <a:latin typeface="Calibri" pitchFamily="34" charset="0"/>
-                <a:ea typeface="Calibri" pitchFamily="34" charset="-122"/>
-                <a:cs typeface="Calibri" pitchFamily="34" charset="-120"/>
-              </a:rPr>
-              <a:t>человек единовременно</a:t>
-            </a:r>
-            <a:endParaRPr lang="en-US" sz="1100" dirty="0"/>
-          </a:p>
-        </p:txBody>
-      </p:sp>
-      <p:sp>
-        <p:nvSpPr>
-          <p:cNvPr id="27" name="Text 25"/>
-          <p:cNvSpPr txBox="1"/>
-          <p:nvPr/>
-        </p:nvSpPr>
-        <p:spPr>
-          <a:xfrm>
-            <a:off x="4389120" y="4983480"/>
-            <a:ext cx="3474720" cy="640080"/>
-          </a:xfrm>
-          <a:prstGeom prst="rect">
-            <a:avLst/>
-          </a:prstGeom>
-          <a:noFill/>
-          <a:ln/>
-        </p:spPr>
-        <p:txBody>
-          <a:bodyPr wrap="square" lIns="0" tIns="0" rIns="0" bIns="0" rtlCol="0" anchor="ctr"/>
-          <a:lstStyle/>
-          <a:p>
-            <a:pPr indent="0" marL="0">
-              <a:buNone/>
-            </a:pPr>
-            <a:r>
-              <a:rPr lang="en-US" sz="3600" b="1" dirty="0">
-                <a:solidFill>
-                  <a:srgbClr val="D65E10"/>
-                </a:solidFill>
-                <a:latin typeface="Cambria" pitchFamily="34" charset="0"/>
-                <a:ea typeface="Cambria" pitchFamily="34" charset="-122"/>
-                <a:cs typeface="Cambria" pitchFamily="34" charset="-120"/>
-              </a:rPr>
-              <a:t>1 500</a:t>
-            </a:r>
-            <a:endParaRPr lang="en-US" sz="3600" dirty="0"/>
-          </a:p>
-        </p:txBody>
-      </p:sp>
-      <p:sp>
-        <p:nvSpPr>
-          <p:cNvPr id="28" name="Text 26"/>
-          <p:cNvSpPr txBox="1"/>
-          <p:nvPr/>
-        </p:nvSpPr>
-        <p:spPr>
-          <a:xfrm>
-            <a:off x="4389120" y="5715000"/>
-            <a:ext cx="3474720" cy="457200"/>
-          </a:xfrm>
-          <a:prstGeom prst="rect">
-            <a:avLst/>
-          </a:prstGeom>
-          <a:noFill/>
-          <a:ln/>
-        </p:spPr>
-        <p:txBody>
-          <a:bodyPr wrap="square" lIns="0" tIns="0" rIns="0" bIns="0" rtlCol="0" anchor="ctr"/>
-          <a:lstStyle/>
-          <a:p>
-            <a:pPr indent="0" marL="0">
-              <a:lnSpc>
-                <a:spcPts val="1400"/>
-              </a:lnSpc>
-              <a:buNone/>
-            </a:pPr>
-            <a:r>
-              <a:rPr lang="en-US" sz="1100" dirty="0">
-                <a:solidFill>
-                  <a:srgbClr val="6B7A70"/>
-                </a:solidFill>
-                <a:latin typeface="Calibri" pitchFamily="34" charset="0"/>
-                <a:ea typeface="Calibri" pitchFamily="34" charset="-122"/>
-                <a:cs typeface="Calibri" pitchFamily="34" charset="-120"/>
-              </a:rPr>
-              <a:t>жителей села</a:t>
-            </a:r>
-            <a:endParaRPr lang="en-US" sz="1100" dirty="0"/>
-          </a:p>
-        </p:txBody>
-      </p:sp>
-      <p:sp>
-        <p:nvSpPr>
-          <p:cNvPr id="29" name="Text 27"/>
-          <p:cNvSpPr txBox="1"/>
-          <p:nvPr/>
-        </p:nvSpPr>
-        <p:spPr>
-          <a:xfrm>
-            <a:off x="8138160" y="4983480"/>
-            <a:ext cx="3474720" cy="640080"/>
-          </a:xfrm>
-          <a:prstGeom prst="rect">
-            <a:avLst/>
-          </a:prstGeom>
-          <a:noFill/>
-          <a:ln/>
-        </p:spPr>
-        <p:txBody>
-          <a:bodyPr wrap="square" lIns="0" tIns="0" rIns="0" bIns="0" rtlCol="0" anchor="ctr"/>
-          <a:lstStyle/>
-          <a:p>
-            <a:pPr indent="0" marL="0">
-              <a:buNone/>
-            </a:pPr>
-            <a:r>
-              <a:rPr lang="en-US" sz="2400" b="1" dirty="0">
-                <a:solidFill>
-                  <a:srgbClr val="D65E10"/>
-                </a:solidFill>
-                <a:latin typeface="Cambria" pitchFamily="34" charset="0"/>
-                <a:ea typeface="Cambria" pitchFamily="34" charset="-122"/>
-                <a:cs typeface="Cambria" pitchFamily="34" charset="-120"/>
-              </a:rPr>
-              <a:t>круглый год</a:t>
-            </a:r>
-            <a:endParaRPr lang="en-US" sz="2400" dirty="0"/>
-          </a:p>
-        </p:txBody>
-      </p:sp>
-      <p:sp>
-        <p:nvSpPr>
-          <p:cNvPr id="30" name="Text 28"/>
-          <p:cNvSpPr txBox="1"/>
-          <p:nvPr/>
-        </p:nvSpPr>
-        <p:spPr>
-          <a:xfrm>
-            <a:off x="8138160" y="5715000"/>
-            <a:ext cx="3474720" cy="457200"/>
-          </a:xfrm>
-          <a:prstGeom prst="rect">
-            <a:avLst/>
-          </a:prstGeom>
-          <a:noFill/>
-          <a:ln/>
-        </p:spPr>
-        <p:txBody>
-          <a:bodyPr wrap="square" lIns="0" tIns="0" rIns="0" bIns="0" rtlCol="0" anchor="ctr"/>
-          <a:lstStyle/>
-          <a:p>
-            <a:pPr indent="0" marL="0">
-              <a:lnSpc>
-                <a:spcPts val="1400"/>
-              </a:lnSpc>
-              <a:buNone/>
-            </a:pPr>
-            <a:r>
-              <a:rPr lang="en-US" sz="1100" dirty="0">
-                <a:solidFill>
-                  <a:srgbClr val="6B7A70"/>
-                </a:solidFill>
-                <a:latin typeface="Calibri" pitchFamily="34" charset="0"/>
-                <a:ea typeface="Calibri" pitchFamily="34" charset="-122"/>
-                <a:cs typeface="Calibri" pitchFamily="34" charset="-120"/>
-              </a:rPr>
-              <a:t>лето — праздники, зима — ёлка и Масленица</a:t>
-            </a:r>
-            <a:endParaRPr lang="en-US" sz="1100" dirty="0"/>
+                <a:latin typeface="Calibri" pitchFamily="34" charset="0"/>
+                <a:ea typeface="Calibri" pitchFamily="34" charset="-122"/>
+                <a:cs typeface="Calibri" pitchFamily="34" charset="-120"/>
+              </a:rPr>
+              <a:t>Содержание цветника и газона берут на себя участники клуба совместно с администрацией села. Однолетники (бархатцы, петуния) обновляются рассадой ежегодно, многолетники высаживаются один раз.</a:t>
+            </a:r>
+            <a:endParaRPr lang="en-US" sz="1000" dirty="0"/>
           </a:p>
         </p:txBody>
       </p:sp>
@@ -9713,7 +10522,7 @@
     <p:bg>
       <p:bgPr>
         <a:solidFill>
-          <a:srgbClr val="15201A"/>
+          <a:srgbClr val="FFFFFF"/>
         </a:solidFill>
       </p:bgPr>
     </p:bg>
@@ -9758,13 +10567,13 @@
             <a:r>
               <a:rPr lang="en-US" sz="1000" b="1" spc="200" kern="0" dirty="0">
                 <a:solidFill>
-                  <a:srgbClr val="F4A56B"/>
-                </a:solidFill>
-                <a:latin typeface="Calibri" pitchFamily="34" charset="0"/>
-                <a:ea typeface="Calibri" pitchFamily="34" charset="-122"/>
-                <a:cs typeface="Calibri" pitchFamily="34" charset="-120"/>
-              </a:rPr>
-              <a:t>КУЛЬТУРНЫЙ КОД И ТРАДИЦИИ</a:t>
+                  <a:srgbClr val="6B7A70"/>
+                </a:solidFill>
+                <a:latin typeface="Calibri" pitchFamily="34" charset="0"/>
+                <a:ea typeface="Calibri" pitchFamily="34" charset="-122"/>
+                <a:cs typeface="Calibri" pitchFamily="34" charset="-120"/>
+              </a:rPr>
+              <a:t>ПОЧЕМУ ЭТО ТОЧКА ПРИТЯЖЕНИЯ</a:t>
             </a:r>
             <a:endParaRPr lang="en-US" sz="1000" dirty="0"/>
           </a:p>
@@ -9779,33 +10588,33 @@
         <p:spPr>
           <a:xfrm>
             <a:off x="640080" y="914400"/>
-            <a:ext cx="10058400" cy="548640"/>
-          </a:xfrm>
-          <a:prstGeom prst="rect">
-            <a:avLst/>
-          </a:prstGeom>
-          <a:noFill/>
-          <a:ln/>
-        </p:spPr>
-        <p:txBody>
-          <a:bodyPr wrap="square" lIns="0" tIns="0" rIns="0" bIns="0" rtlCol="0" anchor="ctr"/>
-          <a:lstStyle/>
-          <a:p>
-            <a:pPr indent="0" marL="0">
-              <a:buNone/>
-            </a:pPr>
-            <a:r>
-              <a:rPr lang="en-US" sz="3000" b="1" dirty="0">
-                <a:solidFill>
-                  <a:srgbClr val="FFFFFF"/>
+            <a:ext cx="9144000" cy="548640"/>
+          </a:xfrm>
+          <a:prstGeom prst="rect">
+            <a:avLst/>
+          </a:prstGeom>
+          <a:noFill/>
+          <a:ln/>
+        </p:spPr>
+        <p:txBody>
+          <a:bodyPr wrap="square" lIns="0" tIns="0" rIns="0" bIns="0" rtlCol="0" anchor="ctr"/>
+          <a:lstStyle/>
+          <a:p>
+            <a:pPr indent="0" marL="0">
+              <a:buNone/>
+            </a:pPr>
+            <a:r>
+              <a:rPr lang="en-US" sz="3200" b="1" dirty="0">
+                <a:solidFill>
+                  <a:srgbClr val="15201A"/>
                 </a:solidFill>
                 <a:latin typeface="Cambria" pitchFamily="34" charset="0"/>
                 <a:ea typeface="Cambria" pitchFamily="34" charset="-122"/>
                 <a:cs typeface="Cambria" pitchFamily="34" charset="-120"/>
               </a:rPr>
-              <a:t>Проект намеренно сделан не «городским»</a:t>
-            </a:r>
-            <a:endParaRPr lang="en-US" sz="3000" dirty="0"/>
+              <a:t>Одно место для четырёх поколений</a:t>
+            </a:r>
+            <a:endParaRPr lang="en-US" sz="3200" dirty="0"/>
           </a:p>
         </p:txBody>
       </p:sp>
@@ -9817,32 +10626,35 @@
         </p:nvSpPr>
         <p:spPr>
           <a:xfrm>
-            <a:off x="640080" y="1627632"/>
-            <a:ext cx="9144000" cy="320040"/>
-          </a:xfrm>
-          <a:prstGeom prst="rect">
-            <a:avLst/>
-          </a:prstGeom>
-          <a:noFill/>
-          <a:ln/>
-        </p:spPr>
-        <p:txBody>
-          <a:bodyPr wrap="square" lIns="0" tIns="0" rIns="0" bIns="0" rtlCol="0" anchor="ctr"/>
-          <a:lstStyle/>
-          <a:p>
-            <a:pPr indent="0" marL="0">
+            <a:off x="640080" y="1600200"/>
+            <a:ext cx="8686800" cy="502920"/>
+          </a:xfrm>
+          <a:prstGeom prst="rect">
+            <a:avLst/>
+          </a:prstGeom>
+          <a:noFill/>
+          <a:ln/>
+        </p:spPr>
+        <p:txBody>
+          <a:bodyPr wrap="square" lIns="0" tIns="0" rIns="0" bIns="0" rtlCol="0" anchor="ctr"/>
+          <a:lstStyle/>
+          <a:p>
+            <a:pPr indent="0" marL="0">
+              <a:lnSpc>
+                <a:spcPts val="1700"/>
+              </a:lnSpc>
               <a:buNone/>
             </a:pPr>
             <a:r>
               <a:rPr lang="en-US" sz="1300" dirty="0">
                 <a:solidFill>
-                  <a:srgbClr val="A8B6AB"/>
-                </a:solidFill>
-                <a:latin typeface="Calibri" pitchFamily="34" charset="0"/>
-                <a:ea typeface="Calibri" pitchFamily="34" charset="-122"/>
-                <a:cs typeface="Calibri" pitchFamily="34" charset="-120"/>
-              </a:rPr>
-              <a:t>Ни пластиковых скамей, ни типового павильона: каждое решение отсылает к тому, как в селе празднуют до сих пор.</a:t>
+                  <a:srgbClr val="6B7A70"/>
+                </a:solidFill>
+                <a:latin typeface="Calibri" pitchFamily="34" charset="0"/>
+                <a:ea typeface="Calibri" pitchFamily="34" charset="-122"/>
+                <a:cs typeface="Calibri" pitchFamily="34" charset="-120"/>
+              </a:rPr>
+              <a:t>Зал вмещает ограниченное число людей и делит их на сцену и ряды. Открытая площадка такого деления не делает.</a:t>
             </a:r>
             <a:endParaRPr lang="en-US" sz="1300" dirty="0"/>
           </a:p>
@@ -9856,14 +10668,14 @@
         </p:nvSpPr>
         <p:spPr>
           <a:xfrm>
-            <a:off x="640080" y="2286000"/>
-            <a:ext cx="5257800" cy="1600200"/>
+            <a:off x="640080" y="2194560"/>
+            <a:ext cx="2606040" cy="2377440"/>
           </a:xfrm>
           <a:prstGeom prst="rect">
             <a:avLst/>
           </a:prstGeom>
           <a:solidFill>
-            <a:srgbClr val="1F2C25"/>
+            <a:srgbClr val="F2F5EF"/>
           </a:solidFill>
           <a:ln/>
         </p:spPr>
@@ -9876,8 +10688,328 @@
         </p:nvSpPr>
         <p:spPr>
           <a:xfrm>
-            <a:off x="932688" y="2560320"/>
-            <a:ext cx="402336" cy="402336"/>
+            <a:off x="914400" y="2468880"/>
+            <a:ext cx="566928" cy="566928"/>
+          </a:xfrm>
+          <a:prstGeom prst="ellipse">
+            <a:avLst/>
+          </a:prstGeom>
+          <a:solidFill>
+            <a:srgbClr val="6E9A4E"/>
+          </a:solidFill>
+          <a:ln/>
+        </p:spPr>
+      </p:sp>
+      <p:sp>
+        <p:nvSpPr>
+          <p:cNvPr id="7" name="Text 5"/>
+          <p:cNvSpPr txBox="1"/>
+          <p:nvPr/>
+        </p:nvSpPr>
+        <p:spPr>
+          <a:xfrm>
+            <a:off x="914400" y="2468880"/>
+            <a:ext cx="566928" cy="566928"/>
+          </a:xfrm>
+          <a:prstGeom prst="rect">
+            <a:avLst/>
+          </a:prstGeom>
+          <a:noFill/>
+          <a:ln/>
+        </p:spPr>
+        <p:txBody>
+          <a:bodyPr wrap="square" lIns="0" tIns="0" rIns="0" bIns="0" rtlCol="0" anchor="ctr"/>
+          <a:lstStyle/>
+          <a:p>
+            <a:pPr algn="ctr" indent="0" marL="0">
+              <a:buNone/>
+            </a:pPr>
+            <a:r>
+              <a:rPr lang="en-US" sz="2000" b="1" dirty="0">
+                <a:solidFill>
+                  <a:srgbClr val="FFFFFF"/>
+                </a:solidFill>
+                <a:latin typeface="Calibri" pitchFamily="34" charset="0"/>
+                <a:ea typeface="Calibri" pitchFamily="34" charset="-122"/>
+                <a:cs typeface="Calibri" pitchFamily="34" charset="-120"/>
+              </a:rPr>
+              <a:t>1</a:t>
+            </a:r>
+            <a:endParaRPr lang="en-US" sz="2000" dirty="0"/>
+          </a:p>
+        </p:txBody>
+      </p:sp>
+      <p:sp>
+        <p:nvSpPr>
+          <p:cNvPr id="8" name="Text 6"/>
+          <p:cNvSpPr txBox="1"/>
+          <p:nvPr/>
+        </p:nvSpPr>
+        <p:spPr>
+          <a:xfrm>
+            <a:off x="914400" y="3200400"/>
+            <a:ext cx="2103120" cy="502920"/>
+          </a:xfrm>
+          <a:prstGeom prst="rect">
+            <a:avLst/>
+          </a:prstGeom>
+          <a:noFill/>
+          <a:ln/>
+        </p:spPr>
+        <p:txBody>
+          <a:bodyPr wrap="square" lIns="0" tIns="0" rIns="0" bIns="0" rtlCol="0" anchor="ctr"/>
+          <a:lstStyle/>
+          <a:p>
+            <a:pPr indent="0" marL="0">
+              <a:buNone/>
+            </a:pPr>
+            <a:r>
+              <a:rPr lang="en-US" sz="1600" b="1" dirty="0">
+                <a:solidFill>
+                  <a:srgbClr val="15201A"/>
+                </a:solidFill>
+                <a:latin typeface="Cambria" pitchFamily="34" charset="0"/>
+                <a:ea typeface="Cambria" pitchFamily="34" charset="-122"/>
+                <a:cs typeface="Cambria" pitchFamily="34" charset="-120"/>
+              </a:rPr>
+              <a:t>Дети</a:t>
+            </a:r>
+            <a:endParaRPr lang="en-US" sz="1600" dirty="0"/>
+          </a:p>
+        </p:txBody>
+      </p:sp>
+      <p:sp>
+        <p:nvSpPr>
+          <p:cNvPr id="9" name="Text 7"/>
+          <p:cNvSpPr txBox="1"/>
+          <p:nvPr/>
+        </p:nvSpPr>
+        <p:spPr>
+          <a:xfrm>
+            <a:off x="914400" y="3749040"/>
+            <a:ext cx="2103120" cy="685800"/>
+          </a:xfrm>
+          <a:prstGeom prst="rect">
+            <a:avLst/>
+          </a:prstGeom>
+          <a:noFill/>
+          <a:ln/>
+        </p:spPr>
+        <p:txBody>
+          <a:bodyPr wrap="square" lIns="0" tIns="0" rIns="0" bIns="0" rtlCol="0" anchor="ctr"/>
+          <a:lstStyle/>
+          <a:p>
+            <a:pPr indent="0" marL="0">
+              <a:lnSpc>
+                <a:spcPts val="1400"/>
+              </a:lnSpc>
+              <a:buNone/>
+            </a:pPr>
+            <a:r>
+              <a:rPr lang="en-US" sz="1100" dirty="0">
+                <a:solidFill>
+                  <a:srgbClr val="6B7A70"/>
+                </a:solidFill>
+                <a:latin typeface="Calibri" pitchFamily="34" charset="0"/>
+                <a:ea typeface="Calibri" pitchFamily="34" charset="-122"/>
+                <a:cs typeface="Calibri" pitchFamily="34" charset="-120"/>
+              </a:rPr>
+              <a:t>игровая площадка 106 м², в поле зрения беседки</a:t>
+            </a:r>
+            <a:endParaRPr lang="en-US" sz="1100" dirty="0"/>
+          </a:p>
+        </p:txBody>
+      </p:sp>
+      <p:sp>
+        <p:nvSpPr>
+          <p:cNvPr id="10" name="Shape 8"/>
+          <p:cNvSpPr/>
+          <p:nvPr/>
+        </p:nvSpPr>
+        <p:spPr>
+          <a:xfrm>
+            <a:off x="3456432" y="2194560"/>
+            <a:ext cx="2606040" cy="2377440"/>
+          </a:xfrm>
+          <a:prstGeom prst="rect">
+            <a:avLst/>
+          </a:prstGeom>
+          <a:solidFill>
+            <a:srgbClr val="F2F5EF"/>
+          </a:solidFill>
+          <a:ln/>
+        </p:spPr>
+      </p:sp>
+      <p:sp>
+        <p:nvSpPr>
+          <p:cNvPr id="11" name="Shape 9"/>
+          <p:cNvSpPr/>
+          <p:nvPr/>
+        </p:nvSpPr>
+        <p:spPr>
+          <a:xfrm>
+            <a:off x="3730752" y="2468880"/>
+            <a:ext cx="566928" cy="566928"/>
+          </a:xfrm>
+          <a:prstGeom prst="ellipse">
+            <a:avLst/>
+          </a:prstGeom>
+          <a:solidFill>
+            <a:srgbClr val="2F7386"/>
+          </a:solidFill>
+          <a:ln/>
+        </p:spPr>
+      </p:sp>
+      <p:sp>
+        <p:nvSpPr>
+          <p:cNvPr id="12" name="Text 10"/>
+          <p:cNvSpPr txBox="1"/>
+          <p:nvPr/>
+        </p:nvSpPr>
+        <p:spPr>
+          <a:xfrm>
+            <a:off x="3730752" y="2468880"/>
+            <a:ext cx="566928" cy="566928"/>
+          </a:xfrm>
+          <a:prstGeom prst="rect">
+            <a:avLst/>
+          </a:prstGeom>
+          <a:noFill/>
+          <a:ln/>
+        </p:spPr>
+        <p:txBody>
+          <a:bodyPr wrap="square" lIns="0" tIns="0" rIns="0" bIns="0" rtlCol="0" anchor="ctr"/>
+          <a:lstStyle/>
+          <a:p>
+            <a:pPr algn="ctr" indent="0" marL="0">
+              <a:buNone/>
+            </a:pPr>
+            <a:r>
+              <a:rPr lang="en-US" sz="2000" b="1" dirty="0">
+                <a:solidFill>
+                  <a:srgbClr val="FFFFFF"/>
+                </a:solidFill>
+                <a:latin typeface="Calibri" pitchFamily="34" charset="0"/>
+                <a:ea typeface="Calibri" pitchFamily="34" charset="-122"/>
+                <a:cs typeface="Calibri" pitchFamily="34" charset="-120"/>
+              </a:rPr>
+              <a:t>2</a:t>
+            </a:r>
+            <a:endParaRPr lang="en-US" sz="2000" dirty="0"/>
+          </a:p>
+        </p:txBody>
+      </p:sp>
+      <p:sp>
+        <p:nvSpPr>
+          <p:cNvPr id="13" name="Text 11"/>
+          <p:cNvSpPr txBox="1"/>
+          <p:nvPr/>
+        </p:nvSpPr>
+        <p:spPr>
+          <a:xfrm>
+            <a:off x="3730752" y="3200400"/>
+            <a:ext cx="2103120" cy="502920"/>
+          </a:xfrm>
+          <a:prstGeom prst="rect">
+            <a:avLst/>
+          </a:prstGeom>
+          <a:noFill/>
+          <a:ln/>
+        </p:spPr>
+        <p:txBody>
+          <a:bodyPr wrap="square" lIns="0" tIns="0" rIns="0" bIns="0" rtlCol="0" anchor="ctr"/>
+          <a:lstStyle/>
+          <a:p>
+            <a:pPr indent="0" marL="0">
+              <a:buNone/>
+            </a:pPr>
+            <a:r>
+              <a:rPr lang="en-US" sz="1600" b="1" dirty="0">
+                <a:solidFill>
+                  <a:srgbClr val="15201A"/>
+                </a:solidFill>
+                <a:latin typeface="Cambria" pitchFamily="34" charset="0"/>
+                <a:ea typeface="Cambria" pitchFamily="34" charset="-122"/>
+                <a:cs typeface="Cambria" pitchFamily="34" charset="-120"/>
+              </a:rPr>
+              <a:t>Родители</a:t>
+            </a:r>
+            <a:endParaRPr lang="en-US" sz="1600" dirty="0"/>
+          </a:p>
+        </p:txBody>
+      </p:sp>
+      <p:sp>
+        <p:nvSpPr>
+          <p:cNvPr id="14" name="Text 12"/>
+          <p:cNvSpPr txBox="1"/>
+          <p:nvPr/>
+        </p:nvSpPr>
+        <p:spPr>
+          <a:xfrm>
+            <a:off x="3730752" y="3749040"/>
+            <a:ext cx="2103120" cy="685800"/>
+          </a:xfrm>
+          <a:prstGeom prst="rect">
+            <a:avLst/>
+          </a:prstGeom>
+          <a:noFill/>
+          <a:ln/>
+        </p:spPr>
+        <p:txBody>
+          <a:bodyPr wrap="square" lIns="0" tIns="0" rIns="0" bIns="0" rtlCol="0" anchor="ctr"/>
+          <a:lstStyle/>
+          <a:p>
+            <a:pPr indent="0" marL="0">
+              <a:lnSpc>
+                <a:spcPts val="1400"/>
+              </a:lnSpc>
+              <a:buNone/>
+            </a:pPr>
+            <a:r>
+              <a:rPr lang="en-US" sz="1100" dirty="0">
+                <a:solidFill>
+                  <a:srgbClr val="6B7A70"/>
+                </a:solidFill>
+                <a:latin typeface="Calibri" pitchFamily="34" charset="0"/>
+                <a:ea typeface="Calibri" pitchFamily="34" charset="-122"/>
+                <a:cs typeface="Calibri" pitchFamily="34" charset="-120"/>
+              </a:rPr>
+              <a:t>беседка на 10–12 человек и полянка рядом с детьми</a:t>
+            </a:r>
+            <a:endParaRPr lang="en-US" sz="1100" dirty="0"/>
+          </a:p>
+        </p:txBody>
+      </p:sp>
+      <p:sp>
+        <p:nvSpPr>
+          <p:cNvPr id="15" name="Shape 13"/>
+          <p:cNvSpPr/>
+          <p:nvPr/>
+        </p:nvSpPr>
+        <p:spPr>
+          <a:xfrm>
+            <a:off x="6272784" y="2194560"/>
+            <a:ext cx="2606040" cy="2377440"/>
+          </a:xfrm>
+          <a:prstGeom prst="rect">
+            <a:avLst/>
+          </a:prstGeom>
+          <a:solidFill>
+            <a:srgbClr val="F2F5EF"/>
+          </a:solidFill>
+          <a:ln/>
+        </p:spPr>
+      </p:sp>
+      <p:sp>
+        <p:nvSpPr>
+          <p:cNvPr id="16" name="Shape 14"/>
+          <p:cNvSpPr/>
+          <p:nvPr/>
+        </p:nvSpPr>
+        <p:spPr>
+          <a:xfrm>
+            <a:off x="6547104" y="2468880"/>
+            <a:ext cx="566928" cy="566928"/>
           </a:xfrm>
           <a:prstGeom prst="ellipse">
             <a:avLst/>
@@ -9890,14 +11022,14 @@
       </p:sp>
       <p:sp>
         <p:nvSpPr>
-          <p:cNvPr id="7" name="Text 5"/>
-          <p:cNvSpPr txBox="1"/>
-          <p:nvPr/>
-        </p:nvSpPr>
-        <p:spPr>
-          <a:xfrm>
-            <a:off x="932688" y="2560320"/>
-            <a:ext cx="402336" cy="402336"/>
+          <p:cNvPr id="17" name="Text 15"/>
+          <p:cNvSpPr txBox="1"/>
+          <p:nvPr/>
+        </p:nvSpPr>
+        <p:spPr>
+          <a:xfrm>
+            <a:off x="6547104" y="2468880"/>
+            <a:ext cx="566928" cy="566928"/>
           </a:xfrm>
           <a:prstGeom prst="rect">
             <a:avLst/>
@@ -9913,7 +11045,7 @@
               <a:buNone/>
             </a:pPr>
             <a:r>
-              <a:rPr lang="en-US" sz="1100" b="1" dirty="0">
+              <a:rPr lang="en-US" sz="2000" b="1" dirty="0">
                 <a:solidFill>
                   <a:srgbClr val="FFFFFF"/>
                 </a:solidFill>
@@ -9921,22 +11053,22 @@
                 <a:ea typeface="Calibri" pitchFamily="34" charset="-122"/>
                 <a:cs typeface="Calibri" pitchFamily="34" charset="-120"/>
               </a:rPr>
-              <a:t>1</a:t>
-            </a:r>
-            <a:endParaRPr lang="en-US" sz="1100" dirty="0"/>
-          </a:p>
-        </p:txBody>
-      </p:sp>
-      <p:sp>
-        <p:nvSpPr>
-          <p:cNvPr id="8" name="Text 6"/>
-          <p:cNvSpPr txBox="1"/>
-          <p:nvPr/>
-        </p:nvSpPr>
-        <p:spPr>
-          <a:xfrm>
-            <a:off x="1508760" y="2578608"/>
-            <a:ext cx="4114800" cy="274320"/>
+              <a:t>3</a:t>
+            </a:r>
+            <a:endParaRPr lang="en-US" sz="2000" dirty="0"/>
+          </a:p>
+        </p:txBody>
+      </p:sp>
+      <p:sp>
+        <p:nvSpPr>
+          <p:cNvPr id="18" name="Text 16"/>
+          <p:cNvSpPr txBox="1"/>
+          <p:nvPr/>
+        </p:nvSpPr>
+        <p:spPr>
+          <a:xfrm>
+            <a:off x="6547104" y="3200400"/>
+            <a:ext cx="2103120" cy="502920"/>
           </a:xfrm>
           <a:prstGeom prst="rect">
             <a:avLst/>
@@ -9954,13 +11086,13 @@
             <a:r>
               <a:rPr lang="en-US" sz="1600" b="1" dirty="0">
                 <a:solidFill>
-                  <a:srgbClr val="F4A56B"/>
+                  <a:srgbClr val="15201A"/>
                 </a:solidFill>
                 <a:latin typeface="Cambria" pitchFamily="34" charset="0"/>
                 <a:ea typeface="Cambria" pitchFamily="34" charset="-122"/>
                 <a:cs typeface="Cambria" pitchFamily="34" charset="-120"/>
               </a:rPr>
-              <a:t>Любинские вечорки</a:t>
+              <a:t>Старшее поколение</a:t>
             </a:r>
             <a:endParaRPr lang="en-US" sz="1600" dirty="0"/>
           </a:p>
@@ -9968,14 +11100,14 @@
       </p:sp>
       <p:sp>
         <p:nvSpPr>
-          <p:cNvPr id="9" name="Text 7"/>
-          <p:cNvSpPr txBox="1"/>
-          <p:nvPr/>
-        </p:nvSpPr>
-        <p:spPr>
-          <a:xfrm>
-            <a:off x="1508760" y="2944368"/>
-            <a:ext cx="4114800" cy="822960"/>
+          <p:cNvPr id="19" name="Text 17"/>
+          <p:cNvSpPr txBox="1"/>
+          <p:nvPr/>
+        </p:nvSpPr>
+        <p:spPr>
+          <a:xfrm>
+            <a:off x="6547104" y="3749040"/>
+            <a:ext cx="2103120" cy="685800"/>
           </a:xfrm>
           <a:prstGeom prst="rect">
             <a:avLst/>
@@ -9994,70 +11126,70 @@
               <a:buNone/>
             </a:pPr>
             <a:r>
-              <a:rPr lang="en-US" sz="1050" dirty="0">
-                <a:solidFill>
-                  <a:srgbClr val="C8D3C9"/>
-                </a:solidFill>
-                <a:latin typeface="Calibri" pitchFamily="34" charset="0"/>
-                <a:ea typeface="Calibri" pitchFamily="34" charset="-122"/>
-                <a:cs typeface="Calibri" pitchFamily="34" charset="-120"/>
-              </a:rPr>
-              <a:t>Главное, ради чего затевается площадка. Молодёжные посиделки с песнями, играми и плясками планируем возродить — для них нужно ровное открытое место, где круг собирается и расходится.</a:t>
-            </a:r>
-            <a:endParaRPr lang="en-US" sz="1050" dirty="0"/>
-          </a:p>
-        </p:txBody>
-      </p:sp>
-      <p:sp>
-        <p:nvSpPr>
-          <p:cNvPr id="10" name="Shape 8"/>
+              <a:rPr lang="en-US" sz="1100" dirty="0">
+                <a:solidFill>
+                  <a:srgbClr val="6B7A70"/>
+                </a:solidFill>
+                <a:latin typeface="Calibri" pitchFamily="34" charset="0"/>
+                <a:ea typeface="Calibri" pitchFamily="34" charset="-122"/>
+                <a:cs typeface="Calibri" pitchFamily="34" charset="-120"/>
+              </a:rPr>
+              <a:t>скамьи у сцены, хороводы и вечорки на полянке</a:t>
+            </a:r>
+            <a:endParaRPr lang="en-US" sz="1100" dirty="0"/>
+          </a:p>
+        </p:txBody>
+      </p:sp>
+      <p:sp>
+        <p:nvSpPr>
+          <p:cNvPr id="20" name="Shape 18"/>
           <p:cNvSpPr/>
           <p:nvPr/>
         </p:nvSpPr>
         <p:spPr>
           <a:xfrm>
-            <a:off x="6263640" y="2286000"/>
-            <a:ext cx="5257800" cy="1600200"/>
+            <a:off x="9089136" y="2194560"/>
+            <a:ext cx="2606040" cy="2377440"/>
           </a:xfrm>
           <a:prstGeom prst="rect">
             <a:avLst/>
           </a:prstGeom>
           <a:solidFill>
-            <a:srgbClr val="1F2C25"/>
+            <a:srgbClr val="F2F5EF"/>
           </a:solidFill>
           <a:ln/>
         </p:spPr>
       </p:sp>
       <p:sp>
         <p:nvSpPr>
-          <p:cNvPr id="11" name="Shape 9"/>
+          <p:cNvPr id="21" name="Shape 19"/>
           <p:cNvSpPr/>
           <p:nvPr/>
         </p:nvSpPr>
         <p:spPr>
           <a:xfrm>
-            <a:off x="6556248" y="2560320"/>
-            <a:ext cx="402336" cy="402336"/>
+            <a:off x="9363456" y="2468880"/>
+            <a:ext cx="566928" cy="566928"/>
           </a:xfrm>
           <a:prstGeom prst="ellipse">
             <a:avLst/>
           </a:prstGeom>
           <a:solidFill>
-            <a:srgbClr val="D65E10"/>
+            <a:srgbClr val="15201A"/>
           </a:solidFill>
           <a:ln/>
         </p:spPr>
       </p:sp>
       <p:sp>
         <p:nvSpPr>
-          <p:cNvPr id="12" name="Text 10"/>
-          <p:cNvSpPr txBox="1"/>
-          <p:nvPr/>
-        </p:nvSpPr>
-        <p:spPr>
-          <a:xfrm>
-            <a:off x="6556248" y="2560320"/>
-            <a:ext cx="402336" cy="402336"/>
+          <p:cNvPr id="22" name="Text 20"/>
+          <p:cNvSpPr txBox="1"/>
+          <p:nvPr/>
+        </p:nvSpPr>
+        <p:spPr>
+          <a:xfrm>
+            <a:off x="9363456" y="2468880"/>
+            <a:ext cx="566928" cy="566928"/>
           </a:xfrm>
           <a:prstGeom prst="rect">
             <a:avLst/>
@@ -10073,7 +11205,7 @@
               <a:buNone/>
             </a:pPr>
             <a:r>
-              <a:rPr lang="en-US" sz="1100" b="1" dirty="0">
+              <a:rPr lang="en-US" sz="2000" b="1" dirty="0">
                 <a:solidFill>
                   <a:srgbClr val="FFFFFF"/>
                 </a:solidFill>
@@ -10081,22 +11213,22 @@
                 <a:ea typeface="Calibri" pitchFamily="34" charset="-122"/>
                 <a:cs typeface="Calibri" pitchFamily="34" charset="-120"/>
               </a:rPr>
-              <a:t>2</a:t>
-            </a:r>
-            <a:endParaRPr lang="en-US" sz="1100" dirty="0"/>
-          </a:p>
-        </p:txBody>
-      </p:sp>
-      <p:sp>
-        <p:nvSpPr>
-          <p:cNvPr id="13" name="Text 11"/>
-          <p:cNvSpPr txBox="1"/>
-          <p:nvPr/>
-        </p:nvSpPr>
-        <p:spPr>
-          <a:xfrm>
-            <a:off x="7132320" y="2578608"/>
-            <a:ext cx="4114800" cy="274320"/>
+              <a:t>4</a:t>
+            </a:r>
+            <a:endParaRPr lang="en-US" sz="2000" dirty="0"/>
+          </a:p>
+        </p:txBody>
+      </p:sp>
+      <p:sp>
+        <p:nvSpPr>
+          <p:cNvPr id="23" name="Text 21"/>
+          <p:cNvSpPr txBox="1"/>
+          <p:nvPr/>
+        </p:nvSpPr>
+        <p:spPr>
+          <a:xfrm>
+            <a:off x="9363456" y="3200400"/>
+            <a:ext cx="2103120" cy="502920"/>
           </a:xfrm>
           <a:prstGeom prst="rect">
             <a:avLst/>
@@ -10114,13 +11246,13 @@
             <a:r>
               <a:rPr lang="en-US" sz="1600" b="1" dirty="0">
                 <a:solidFill>
-                  <a:srgbClr val="F4A56B"/>
+                  <a:srgbClr val="15201A"/>
                 </a:solidFill>
                 <a:latin typeface="Cambria" pitchFamily="34" charset="0"/>
                 <a:ea typeface="Cambria" pitchFamily="34" charset="-122"/>
                 <a:cs typeface="Cambria" pitchFamily="34" charset="-120"/>
               </a:rPr>
-              <a:t>Традиционные хороводы</a:t>
+              <a:t>Подростки</a:t>
             </a:r>
             <a:endParaRPr lang="en-US" sz="1600" dirty="0"/>
           </a:p>
@@ -10128,14 +11260,14 @@
       </p:sp>
       <p:sp>
         <p:nvSpPr>
-          <p:cNvPr id="14" name="Text 12"/>
-          <p:cNvSpPr txBox="1"/>
-          <p:nvPr/>
-        </p:nvSpPr>
-        <p:spPr>
-          <a:xfrm>
-            <a:off x="7132320" y="2944368"/>
-            <a:ext cx="4114800" cy="822960"/>
+          <p:cNvPr id="24" name="Text 22"/>
+          <p:cNvSpPr txBox="1"/>
+          <p:nvPr/>
+        </p:nvSpPr>
+        <p:spPr>
+          <a:xfrm>
+            <a:off x="9363456" y="3749040"/>
+            <a:ext cx="2103120" cy="685800"/>
           </a:xfrm>
           <a:prstGeom prst="rect">
             <a:avLst/>
@@ -10154,94 +11286,15 @@
               <a:buNone/>
             </a:pPr>
             <a:r>
-              <a:rPr lang="en-US" sz="1050" dirty="0">
-                <a:solidFill>
-                  <a:srgbClr val="C8D3C9"/>
-                </a:solidFill>
-                <a:latin typeface="Calibri" pitchFamily="34" charset="0"/>
-                <a:ea typeface="Calibri" pitchFamily="34" charset="-122"/>
-                <a:cs typeface="Calibri" pitchFamily="34" charset="-120"/>
-              </a:rPr>
-              <a:t>Хоровод требует свободного круга, а не рядов. Именно поэтому полянка остаётся ровной и без скамеек — это не экономия, а функция.</a:t>
-            </a:r>
-            <a:endParaRPr lang="en-US" sz="1050" dirty="0"/>
-          </a:p>
-        </p:txBody>
-      </p:sp>
-      <p:sp>
-        <p:nvSpPr>
-          <p:cNvPr id="15" name="Shape 13"/>
-          <p:cNvSpPr/>
-          <p:nvPr/>
-        </p:nvSpPr>
-        <p:spPr>
-          <a:xfrm>
-            <a:off x="640080" y="4114800"/>
-            <a:ext cx="5257800" cy="1600200"/>
-          </a:xfrm>
-          <a:prstGeom prst="rect">
-            <a:avLst/>
-          </a:prstGeom>
-          <a:solidFill>
-            <a:srgbClr val="1F2C25"/>
-          </a:solidFill>
-          <a:ln/>
-        </p:spPr>
-      </p:sp>
-      <p:sp>
-        <p:nvSpPr>
-          <p:cNvPr id="16" name="Shape 14"/>
-          <p:cNvSpPr/>
-          <p:nvPr/>
-        </p:nvSpPr>
-        <p:spPr>
-          <a:xfrm>
-            <a:off x="932688" y="4389120"/>
-            <a:ext cx="402336" cy="402336"/>
-          </a:xfrm>
-          <a:prstGeom prst="ellipse">
-            <a:avLst/>
-          </a:prstGeom>
-          <a:solidFill>
-            <a:srgbClr val="D65E10"/>
-          </a:solidFill>
-          <a:ln/>
-        </p:spPr>
-      </p:sp>
-      <p:sp>
-        <p:nvSpPr>
-          <p:cNvPr id="17" name="Text 15"/>
-          <p:cNvSpPr txBox="1"/>
-          <p:nvPr/>
-        </p:nvSpPr>
-        <p:spPr>
-          <a:xfrm>
-            <a:off x="932688" y="4389120"/>
-            <a:ext cx="402336" cy="402336"/>
-          </a:xfrm>
-          <a:prstGeom prst="rect">
-            <a:avLst/>
-          </a:prstGeom>
-          <a:noFill/>
-          <a:ln/>
-        </p:spPr>
-        <p:txBody>
-          <a:bodyPr wrap="square" lIns="0" tIns="0" rIns="0" bIns="0" rtlCol="0" anchor="ctr"/>
-          <a:lstStyle/>
-          <a:p>
-            <a:pPr algn="ctr" indent="0" marL="0">
-              <a:buNone/>
-            </a:pPr>
-            <a:r>
-              <a:rPr lang="en-US" sz="1100" b="1" dirty="0">
-                <a:solidFill>
-                  <a:srgbClr val="FFFFFF"/>
-                </a:solidFill>
-                <a:latin typeface="Calibri" pitchFamily="34" charset="0"/>
-                <a:ea typeface="Calibri" pitchFamily="34" charset="-122"/>
-                <a:cs typeface="Calibri" pitchFamily="34" charset="-120"/>
-              </a:rPr>
-              <a:t>3</a:t>
+              <a:rPr lang="en-US" sz="1100" dirty="0">
+                <a:solidFill>
+                  <a:srgbClr val="6B7A70"/>
+                </a:solidFill>
+                <a:latin typeface="Calibri" pitchFamily="34" charset="0"/>
+                <a:ea typeface="Calibri" pitchFamily="34" charset="-122"/>
+                <a:cs typeface="Calibri" pitchFamily="34" charset="-120"/>
+              </a:rPr>
+              <a:t>асфальтированная площадка перед эстрадой — в будни место для игр</a:t>
             </a:r>
             <a:endParaRPr lang="en-US" sz="1100" dirty="0"/>
           </a:p>
@@ -10249,53 +11302,53 @@
       </p:sp>
       <p:sp>
         <p:nvSpPr>
-          <p:cNvPr id="18" name="Text 16"/>
-          <p:cNvSpPr txBox="1"/>
-          <p:nvPr/>
-        </p:nvSpPr>
-        <p:spPr>
-          <a:xfrm>
-            <a:off x="1508760" y="4407408"/>
-            <a:ext cx="4114800" cy="274320"/>
-          </a:xfrm>
-          <a:prstGeom prst="rect">
-            <a:avLst/>
-          </a:prstGeom>
-          <a:noFill/>
-          <a:ln/>
-        </p:spPr>
-        <p:txBody>
-          <a:bodyPr wrap="square" lIns="0" tIns="0" rIns="0" bIns="0" rtlCol="0" anchor="ctr"/>
-          <a:lstStyle/>
-          <a:p>
-            <a:pPr indent="0" marL="0">
-              <a:buNone/>
-            </a:pPr>
-            <a:r>
-              <a:rPr lang="en-US" sz="1600" b="1" dirty="0">
-                <a:solidFill>
-                  <a:srgbClr val="F4A56B"/>
+          <p:cNvPr id="25" name="Text 23"/>
+          <p:cNvSpPr txBox="1"/>
+          <p:nvPr/>
+        </p:nvSpPr>
+        <p:spPr>
+          <a:xfrm>
+            <a:off x="640080" y="4983480"/>
+            <a:ext cx="3474720" cy="640080"/>
+          </a:xfrm>
+          <a:prstGeom prst="rect">
+            <a:avLst/>
+          </a:prstGeom>
+          <a:noFill/>
+          <a:ln/>
+        </p:spPr>
+        <p:txBody>
+          <a:bodyPr wrap="square" lIns="0" tIns="0" rIns="0" bIns="0" rtlCol="0" anchor="ctr"/>
+          <a:lstStyle/>
+          <a:p>
+            <a:pPr indent="0" marL="0">
+              <a:buNone/>
+            </a:pPr>
+            <a:r>
+              <a:rPr lang="en-US" sz="3600" b="1" dirty="0">
+                <a:solidFill>
+                  <a:srgbClr val="D65E10"/>
                 </a:solidFill>
                 <a:latin typeface="Cambria" pitchFamily="34" charset="0"/>
                 <a:ea typeface="Cambria" pitchFamily="34" charset="-122"/>
                 <a:cs typeface="Cambria" pitchFamily="34" charset="-120"/>
               </a:rPr>
-              <a:t>Тканые половики</a:t>
-            </a:r>
-            <a:endParaRPr lang="en-US" sz="1600" dirty="0"/>
-          </a:p>
-        </p:txBody>
-      </p:sp>
-      <p:sp>
-        <p:nvSpPr>
-          <p:cNvPr id="19" name="Text 17"/>
-          <p:cNvSpPr txBox="1"/>
-          <p:nvPr/>
-        </p:nvSpPr>
-        <p:spPr>
-          <a:xfrm>
-            <a:off x="1508760" y="4773168"/>
-            <a:ext cx="4114800" cy="822960"/>
+              <a:t>200–250</a:t>
+            </a:r>
+            <a:endParaRPr lang="en-US" sz="3600" dirty="0"/>
+          </a:p>
+        </p:txBody>
+      </p:sp>
+      <p:sp>
+        <p:nvSpPr>
+          <p:cNvPr id="26" name="Text 24"/>
+          <p:cNvSpPr txBox="1"/>
+          <p:nvPr/>
+        </p:nvSpPr>
+        <p:spPr>
+          <a:xfrm>
+            <a:off x="640080" y="5715000"/>
+            <a:ext cx="3474720" cy="457200"/>
           </a:xfrm>
           <a:prstGeom prst="rect">
             <a:avLst/>
@@ -10314,94 +11367,15 @@
               <a:buNone/>
             </a:pPr>
             <a:r>
-              <a:rPr lang="en-US" sz="1050" dirty="0">
-                <a:solidFill>
-                  <a:srgbClr val="C8D3C9"/>
-                </a:solidFill>
-                <a:latin typeface="Calibri" pitchFamily="34" charset="0"/>
-                <a:ea typeface="Calibri" pitchFamily="34" charset="-122"/>
-                <a:cs typeface="Calibri" pitchFamily="34" charset="-120"/>
-              </a:rPr>
-              <a:t>Домотканые дорожки есть в каждом доме, и на гуляньях их расстилали испокон веку. Полянка спроектирована под половики: это принятая в проекте норма, а не декоративная отсылка.</a:t>
-            </a:r>
-            <a:endParaRPr lang="en-US" sz="1050" dirty="0"/>
-          </a:p>
-        </p:txBody>
-      </p:sp>
-      <p:sp>
-        <p:nvSpPr>
-          <p:cNvPr id="20" name="Shape 18"/>
-          <p:cNvSpPr/>
-          <p:nvPr/>
-        </p:nvSpPr>
-        <p:spPr>
-          <a:xfrm>
-            <a:off x="6263640" y="4114800"/>
-            <a:ext cx="5257800" cy="1600200"/>
-          </a:xfrm>
-          <a:prstGeom prst="rect">
-            <a:avLst/>
-          </a:prstGeom>
-          <a:solidFill>
-            <a:srgbClr val="1F2C25"/>
-          </a:solidFill>
-          <a:ln/>
-        </p:spPr>
-      </p:sp>
-      <p:sp>
-        <p:nvSpPr>
-          <p:cNvPr id="21" name="Shape 19"/>
-          <p:cNvSpPr/>
-          <p:nvPr/>
-        </p:nvSpPr>
-        <p:spPr>
-          <a:xfrm>
-            <a:off x="6556248" y="4389120"/>
-            <a:ext cx="402336" cy="402336"/>
-          </a:xfrm>
-          <a:prstGeom prst="ellipse">
-            <a:avLst/>
-          </a:prstGeom>
-          <a:solidFill>
-            <a:srgbClr val="D65E10"/>
-          </a:solidFill>
-          <a:ln/>
-        </p:spPr>
-      </p:sp>
-      <p:sp>
-        <p:nvSpPr>
-          <p:cNvPr id="22" name="Text 20"/>
-          <p:cNvSpPr txBox="1"/>
-          <p:nvPr/>
-        </p:nvSpPr>
-        <p:spPr>
-          <a:xfrm>
-            <a:off x="6556248" y="4389120"/>
-            <a:ext cx="402336" cy="402336"/>
-          </a:xfrm>
-          <a:prstGeom prst="rect">
-            <a:avLst/>
-          </a:prstGeom>
-          <a:noFill/>
-          <a:ln/>
-        </p:spPr>
-        <p:txBody>
-          <a:bodyPr wrap="square" lIns="0" tIns="0" rIns="0" bIns="0" rtlCol="0" anchor="ctr"/>
-          <a:lstStyle/>
-          <a:p>
-            <a:pPr algn="ctr" indent="0" marL="0">
-              <a:buNone/>
-            </a:pPr>
-            <a:r>
-              <a:rPr lang="en-US" sz="1100" b="1" dirty="0">
-                <a:solidFill>
-                  <a:srgbClr val="FFFFFF"/>
-                </a:solidFill>
-                <a:latin typeface="Calibri" pitchFamily="34" charset="0"/>
-                <a:ea typeface="Calibri" pitchFamily="34" charset="-122"/>
-                <a:cs typeface="Calibri" pitchFamily="34" charset="-120"/>
-              </a:rPr>
-              <a:t>4</a:t>
+              <a:rPr lang="en-US" sz="1100" dirty="0">
+                <a:solidFill>
+                  <a:srgbClr val="6B7A70"/>
+                </a:solidFill>
+                <a:latin typeface="Calibri" pitchFamily="34" charset="0"/>
+                <a:ea typeface="Calibri" pitchFamily="34" charset="-122"/>
+                <a:cs typeface="Calibri" pitchFamily="34" charset="-120"/>
+              </a:rPr>
+              <a:t>человек единовременно</a:t>
             </a:r>
             <a:endParaRPr lang="en-US" sz="1100" dirty="0"/>
           </a:p>
@@ -10409,53 +11383,53 @@
       </p:sp>
       <p:sp>
         <p:nvSpPr>
-          <p:cNvPr id="23" name="Text 21"/>
-          <p:cNvSpPr txBox="1"/>
-          <p:nvPr/>
-        </p:nvSpPr>
-        <p:spPr>
-          <a:xfrm>
-            <a:off x="7132320" y="4407408"/>
-            <a:ext cx="4114800" cy="274320"/>
-          </a:xfrm>
-          <a:prstGeom prst="rect">
-            <a:avLst/>
-          </a:prstGeom>
-          <a:noFill/>
-          <a:ln/>
-        </p:spPr>
-        <p:txBody>
-          <a:bodyPr wrap="square" lIns="0" tIns="0" rIns="0" bIns="0" rtlCol="0" anchor="ctr"/>
-          <a:lstStyle/>
-          <a:p>
-            <a:pPr indent="0" marL="0">
-              <a:buNone/>
-            </a:pPr>
-            <a:r>
-              <a:rPr lang="en-US" sz="1600" b="1" dirty="0">
-                <a:solidFill>
-                  <a:srgbClr val="F4A56B"/>
+          <p:cNvPr id="27" name="Text 25"/>
+          <p:cNvSpPr txBox="1"/>
+          <p:nvPr/>
+        </p:nvSpPr>
+        <p:spPr>
+          <a:xfrm>
+            <a:off x="4389120" y="4983480"/>
+            <a:ext cx="3474720" cy="640080"/>
+          </a:xfrm>
+          <a:prstGeom prst="rect">
+            <a:avLst/>
+          </a:prstGeom>
+          <a:noFill/>
+          <a:ln/>
+        </p:spPr>
+        <p:txBody>
+          <a:bodyPr wrap="square" lIns="0" tIns="0" rIns="0" bIns="0" rtlCol="0" anchor="ctr"/>
+          <a:lstStyle/>
+          <a:p>
+            <a:pPr indent="0" marL="0">
+              <a:buNone/>
+            </a:pPr>
+            <a:r>
+              <a:rPr lang="en-US" sz="3600" b="1" dirty="0">
+                <a:solidFill>
+                  <a:srgbClr val="D65E10"/>
                 </a:solidFill>
                 <a:latin typeface="Cambria" pitchFamily="34" charset="0"/>
                 <a:ea typeface="Cambria" pitchFamily="34" charset="-122"/>
                 <a:cs typeface="Cambria" pitchFamily="34" charset="-120"/>
               </a:rPr>
-              <a:t>Клуб и библиотека вместе</a:t>
-            </a:r>
-            <a:endParaRPr lang="en-US" sz="1600" dirty="0"/>
-          </a:p>
-        </p:txBody>
-      </p:sp>
-      <p:sp>
-        <p:nvSpPr>
-          <p:cNvPr id="24" name="Text 22"/>
-          <p:cNvSpPr txBox="1"/>
-          <p:nvPr/>
-        </p:nvSpPr>
-        <p:spPr>
-          <a:xfrm>
-            <a:off x="7132320" y="4773168"/>
-            <a:ext cx="4114800" cy="822960"/>
+              <a:t>1 500</a:t>
+            </a:r>
+            <a:endParaRPr lang="en-US" sz="3600" dirty="0"/>
+          </a:p>
+        </p:txBody>
+      </p:sp>
+      <p:sp>
+        <p:nvSpPr>
+          <p:cNvPr id="28" name="Text 26"/>
+          <p:cNvSpPr txBox="1"/>
+          <p:nvPr/>
+        </p:nvSpPr>
+        <p:spPr>
+          <a:xfrm>
+            <a:off x="4389120" y="5715000"/>
+            <a:ext cx="3474720" cy="457200"/>
           </a:xfrm>
           <a:prstGeom prst="rect">
             <a:avLst/>
@@ -10474,30 +11448,69 @@
               <a:buNone/>
             </a:pPr>
             <a:r>
-              <a:rPr lang="en-US" sz="1050" dirty="0">
-                <a:solidFill>
-                  <a:srgbClr val="C8D3C9"/>
-                </a:solidFill>
-                <a:latin typeface="Calibri" pitchFamily="34" charset="0"/>
-                <a:ea typeface="Calibri" pitchFamily="34" charset="-122"/>
-                <a:cs typeface="Calibri" pitchFamily="34" charset="-120"/>
-              </a:rPr>
-              <a:t>Две таблички на фасаде обозначают то, что у нас сохранилось и чего во многих сёлах уже нет: работающий очаг культуры с книгой.</a:t>
-            </a:r>
-            <a:endParaRPr lang="en-US" sz="1050" dirty="0"/>
-          </a:p>
-        </p:txBody>
-      </p:sp>
-      <p:sp>
-        <p:nvSpPr>
-          <p:cNvPr id="25" name="Text 23"/>
-          <p:cNvSpPr txBox="1"/>
-          <p:nvPr/>
-        </p:nvSpPr>
-        <p:spPr>
-          <a:xfrm>
-            <a:off x="640080" y="6035040"/>
-            <a:ext cx="10881360" cy="548640"/>
+              <a:rPr lang="en-US" sz="1100" dirty="0">
+                <a:solidFill>
+                  <a:srgbClr val="6B7A70"/>
+                </a:solidFill>
+                <a:latin typeface="Calibri" pitchFamily="34" charset="0"/>
+                <a:ea typeface="Calibri" pitchFamily="34" charset="-122"/>
+                <a:cs typeface="Calibri" pitchFamily="34" charset="-120"/>
+              </a:rPr>
+              <a:t>жителей села</a:t>
+            </a:r>
+            <a:endParaRPr lang="en-US" sz="1100" dirty="0"/>
+          </a:p>
+        </p:txBody>
+      </p:sp>
+      <p:sp>
+        <p:nvSpPr>
+          <p:cNvPr id="29" name="Text 27"/>
+          <p:cNvSpPr txBox="1"/>
+          <p:nvPr/>
+        </p:nvSpPr>
+        <p:spPr>
+          <a:xfrm>
+            <a:off x="8138160" y="4983480"/>
+            <a:ext cx="3474720" cy="640080"/>
+          </a:xfrm>
+          <a:prstGeom prst="rect">
+            <a:avLst/>
+          </a:prstGeom>
+          <a:noFill/>
+          <a:ln/>
+        </p:spPr>
+        <p:txBody>
+          <a:bodyPr wrap="square" lIns="0" tIns="0" rIns="0" bIns="0" rtlCol="0" anchor="ctr"/>
+          <a:lstStyle/>
+          <a:p>
+            <a:pPr indent="0" marL="0">
+              <a:buNone/>
+            </a:pPr>
+            <a:r>
+              <a:rPr lang="en-US" sz="2400" b="1" dirty="0">
+                <a:solidFill>
+                  <a:srgbClr val="D65E10"/>
+                </a:solidFill>
+                <a:latin typeface="Cambria" pitchFamily="34" charset="0"/>
+                <a:ea typeface="Cambria" pitchFamily="34" charset="-122"/>
+                <a:cs typeface="Cambria" pitchFamily="34" charset="-120"/>
+              </a:rPr>
+              <a:t>круглый год</a:t>
+            </a:r>
+            <a:endParaRPr lang="en-US" sz="2400" dirty="0"/>
+          </a:p>
+        </p:txBody>
+      </p:sp>
+      <p:sp>
+        <p:nvSpPr>
+          <p:cNvPr id="30" name="Text 28"/>
+          <p:cNvSpPr txBox="1"/>
+          <p:nvPr/>
+        </p:nvSpPr>
+        <p:spPr>
+          <a:xfrm>
+            <a:off x="8138160" y="5715000"/>
+            <a:ext cx="3474720" cy="457200"/>
           </a:xfrm>
           <a:prstGeom prst="rect">
             <a:avLst/>
@@ -10511,22 +11524,22 @@
           <a:p>
             <a:pPr indent="0" marL="0">
               <a:lnSpc>
-                <a:spcPts val="1600"/>
+                <a:spcPts val="1400"/>
               </a:lnSpc>
               <a:buNone/>
             </a:pPr>
             <a:r>
-              <a:rPr lang="en-US" sz="1200" i="1" dirty="0">
-                <a:solidFill>
-                  <a:srgbClr val="FFFFFF"/>
-                </a:solidFill>
-                <a:latin typeface="Calibri" pitchFamily="34" charset="0"/>
-                <a:ea typeface="Calibri" pitchFamily="34" charset="-122"/>
-                <a:cs typeface="Calibri" pitchFamily="34" charset="-120"/>
-              </a:rPr>
-              <a:t>Культурный код не восстанавливается лекциями. Он держится на том, что люди делают вместе и регулярно: водят хоровод, садятся на половики, поют, приводят детей на ту же поляну, где водили их самих.</a:t>
-            </a:r>
-            <a:endParaRPr lang="en-US" sz="1200" dirty="0"/>
+              <a:rPr lang="en-US" sz="1100" dirty="0">
+                <a:solidFill>
+                  <a:srgbClr val="6B7A70"/>
+                </a:solidFill>
+                <a:latin typeface="Calibri" pitchFamily="34" charset="0"/>
+                <a:ea typeface="Calibri" pitchFamily="34" charset="-122"/>
+                <a:cs typeface="Calibri" pitchFamily="34" charset="-120"/>
+              </a:rPr>
+              <a:t>лето — праздники, зима — ёлка и Масленица</a:t>
+            </a:r>
+            <a:endParaRPr lang="en-US" sz="1100" dirty="0"/>
           </a:p>
         </p:txBody>
       </p:sp>
